--- a/examples/화면설계.pptx
+++ b/examples/화면설계.pptx
@@ -8,6 +8,7 @@
     <p:sldId id="256" r:id="rId2"/>
     <p:sldId id="257" r:id="rId3"/>
     <p:sldId id="258" r:id="rId4"/>
+    <p:sldId id="259" r:id="rId5"/>
   </p:sldIdLst>
   <p:sldSz cx="12192000" cy="6858000"/>
   <p:notesSz cx="6858000" cy="9144000"/>
@@ -8414,6 +8415,66 @@
     <p:extLst>
       <p:ext uri="{BB962C8B-B14F-4D97-AF65-F5344CB8AC3E}">
         <p14:creationId xmlns:p14="http://schemas.microsoft.com/office/powerpoint/2010/main" val="3214981132"/>
+      </p:ext>
+    </p:extLst>
+  </p:cSld>
+  <p:clrMapOvr>
+    <a:masterClrMapping/>
+  </p:clrMapOvr>
+</p:sld>
+</file>
+
+<file path=ppt/slides/slide4.xml><?xml version="1.0" encoding="utf-8"?>
+<p:sld xmlns:a="http://schemas.openxmlformats.org/drawingml/2006/main" xmlns:r="http://schemas.openxmlformats.org/officeDocument/2006/relationships" xmlns:p="http://schemas.openxmlformats.org/presentationml/2006/main">
+  <p:cSld>
+    <p:spTree>
+      <p:nvGrpSpPr>
+        <p:cNvPr id="1" name=""/>
+        <p:cNvGrpSpPr/>
+        <p:nvPr/>
+      </p:nvGrpSpPr>
+      <p:grpSpPr>
+        <a:xfrm>
+          <a:off x="0" y="0"/>
+          <a:ext cx="0" cy="0"/>
+          <a:chOff x="0" y="0"/>
+          <a:chExt cx="0" cy="0"/>
+        </a:xfrm>
+      </p:grpSpPr>
+      <p:pic>
+        <p:nvPicPr>
+          <p:cNvPr id="4" name="그림 3">
+            <a:extLst>
+              <a:ext uri="{FF2B5EF4-FFF2-40B4-BE49-F238E27FC236}">
+                <a16:creationId xmlns:a16="http://schemas.microsoft.com/office/drawing/2014/main" id="{ED28C138-2018-FFFB-A739-9B5A1B1B22D0}"/>
+              </a:ext>
+            </a:extLst>
+          </p:cNvPr>
+          <p:cNvPicPr>
+            <a:picLocks noChangeAspect="1"/>
+          </p:cNvPicPr>
+          <p:nvPr/>
+        </p:nvPicPr>
+        <p:blipFill>
+          <a:blip r:embed="rId2"/>
+          <a:stretch>
+            <a:fillRect/>
+          </a:stretch>
+        </p:blipFill>
+        <p:spPr>
+          <a:xfrm>
+            <a:off x="745188" y="536727"/>
+            <a:ext cx="2597283" cy="2552831"/>
+          </a:xfrm>
+          <a:prstGeom prst="rect">
+            <a:avLst/>
+          </a:prstGeom>
+        </p:spPr>
+      </p:pic>
+    </p:spTree>
+    <p:extLst>
+      <p:ext uri="{BB962C8B-B14F-4D97-AF65-F5344CB8AC3E}">
+        <p14:creationId xmlns:p14="http://schemas.microsoft.com/office/powerpoint/2010/main" val="1934067658"/>
       </p:ext>
     </p:extLst>
   </p:cSld>

--- a/examples/화면설계.pptx
+++ b/examples/화면설계.pptx
@@ -9,6 +9,7 @@
     <p:sldId id="257" r:id="rId3"/>
     <p:sldId id="258" r:id="rId4"/>
     <p:sldId id="259" r:id="rId5"/>
+    <p:sldId id="260" r:id="rId6"/>
   </p:sldIdLst>
   <p:sldSz cx="12192000" cy="6858000"/>
   <p:notesSz cx="6858000" cy="9144000"/>
@@ -262,7 +263,7 @@
           <a:p>
             <a:fld id="{F8FA9E92-26D2-4973-9671-7F652E9E4432}" type="datetimeFigureOut">
               <a:rPr lang="ko-KR" altLang="en-US" smtClean="0"/>
-              <a:t>2026-06-20</a:t>
+              <a:t>2026-06-21</a:t>
             </a:fld>
             <a:endParaRPr lang="ko-KR" altLang="en-US"/>
           </a:p>
@@ -460,7 +461,7 @@
           <a:p>
             <a:fld id="{F8FA9E92-26D2-4973-9671-7F652E9E4432}" type="datetimeFigureOut">
               <a:rPr lang="ko-KR" altLang="en-US" smtClean="0"/>
-              <a:t>2026-06-20</a:t>
+              <a:t>2026-06-21</a:t>
             </a:fld>
             <a:endParaRPr lang="ko-KR" altLang="en-US"/>
           </a:p>
@@ -668,7 +669,7 @@
           <a:p>
             <a:fld id="{F8FA9E92-26D2-4973-9671-7F652E9E4432}" type="datetimeFigureOut">
               <a:rPr lang="ko-KR" altLang="en-US" smtClean="0"/>
-              <a:t>2026-06-20</a:t>
+              <a:t>2026-06-21</a:t>
             </a:fld>
             <a:endParaRPr lang="ko-KR" altLang="en-US"/>
           </a:p>
@@ -866,7 +867,7 @@
           <a:p>
             <a:fld id="{F8FA9E92-26D2-4973-9671-7F652E9E4432}" type="datetimeFigureOut">
               <a:rPr lang="ko-KR" altLang="en-US" smtClean="0"/>
-              <a:t>2026-06-20</a:t>
+              <a:t>2026-06-21</a:t>
             </a:fld>
             <a:endParaRPr lang="ko-KR" altLang="en-US"/>
           </a:p>
@@ -1141,7 +1142,7 @@
           <a:p>
             <a:fld id="{F8FA9E92-26D2-4973-9671-7F652E9E4432}" type="datetimeFigureOut">
               <a:rPr lang="ko-KR" altLang="en-US" smtClean="0"/>
-              <a:t>2026-06-20</a:t>
+              <a:t>2026-06-21</a:t>
             </a:fld>
             <a:endParaRPr lang="ko-KR" altLang="en-US"/>
           </a:p>
@@ -1406,7 +1407,7 @@
           <a:p>
             <a:fld id="{F8FA9E92-26D2-4973-9671-7F652E9E4432}" type="datetimeFigureOut">
               <a:rPr lang="ko-KR" altLang="en-US" smtClean="0"/>
-              <a:t>2026-06-20</a:t>
+              <a:t>2026-06-21</a:t>
             </a:fld>
             <a:endParaRPr lang="ko-KR" altLang="en-US"/>
           </a:p>
@@ -1818,7 +1819,7 @@
           <a:p>
             <a:fld id="{F8FA9E92-26D2-4973-9671-7F652E9E4432}" type="datetimeFigureOut">
               <a:rPr lang="ko-KR" altLang="en-US" smtClean="0"/>
-              <a:t>2026-06-20</a:t>
+              <a:t>2026-06-21</a:t>
             </a:fld>
             <a:endParaRPr lang="ko-KR" altLang="en-US"/>
           </a:p>
@@ -1959,7 +1960,7 @@
           <a:p>
             <a:fld id="{F8FA9E92-26D2-4973-9671-7F652E9E4432}" type="datetimeFigureOut">
               <a:rPr lang="ko-KR" altLang="en-US" smtClean="0"/>
-              <a:t>2026-06-20</a:t>
+              <a:t>2026-06-21</a:t>
             </a:fld>
             <a:endParaRPr lang="ko-KR" altLang="en-US"/>
           </a:p>
@@ -2072,7 +2073,7 @@
           <a:p>
             <a:fld id="{F8FA9E92-26D2-4973-9671-7F652E9E4432}" type="datetimeFigureOut">
               <a:rPr lang="ko-KR" altLang="en-US" smtClean="0"/>
-              <a:t>2026-06-20</a:t>
+              <a:t>2026-06-21</a:t>
             </a:fld>
             <a:endParaRPr lang="ko-KR" altLang="en-US"/>
           </a:p>
@@ -2383,7 +2384,7 @@
           <a:p>
             <a:fld id="{F8FA9E92-26D2-4973-9671-7F652E9E4432}" type="datetimeFigureOut">
               <a:rPr lang="ko-KR" altLang="en-US" smtClean="0"/>
-              <a:t>2026-06-20</a:t>
+              <a:t>2026-06-21</a:t>
             </a:fld>
             <a:endParaRPr lang="ko-KR" altLang="en-US"/>
           </a:p>
@@ -2671,7 +2672,7 @@
           <a:p>
             <a:fld id="{F8FA9E92-26D2-4973-9671-7F652E9E4432}" type="datetimeFigureOut">
               <a:rPr lang="ko-KR" altLang="en-US" smtClean="0"/>
-              <a:t>2026-06-20</a:t>
+              <a:t>2026-06-21</a:t>
             </a:fld>
             <a:endParaRPr lang="ko-KR" altLang="en-US"/>
           </a:p>
@@ -2912,7 +2913,7 @@
           <a:p>
             <a:fld id="{F8FA9E92-26D2-4973-9671-7F652E9E4432}" type="datetimeFigureOut">
               <a:rPr lang="ko-KR" altLang="en-US" smtClean="0"/>
-              <a:t>2026-06-20</a:t>
+              <a:t>2026-06-21</a:t>
             </a:fld>
             <a:endParaRPr lang="ko-KR" altLang="en-US"/>
           </a:p>
@@ -8475,6 +8476,36 @@
     <p:extLst>
       <p:ext uri="{BB962C8B-B14F-4D97-AF65-F5344CB8AC3E}">
         <p14:creationId xmlns:p14="http://schemas.microsoft.com/office/powerpoint/2010/main" val="1934067658"/>
+      </p:ext>
+    </p:extLst>
+  </p:cSld>
+  <p:clrMapOvr>
+    <a:masterClrMapping/>
+  </p:clrMapOvr>
+</p:sld>
+</file>
+
+<file path=ppt/slides/slide5.xml><?xml version="1.0" encoding="utf-8"?>
+<p:sld xmlns:a="http://schemas.openxmlformats.org/drawingml/2006/main" xmlns:r="http://schemas.openxmlformats.org/officeDocument/2006/relationships" xmlns:p="http://schemas.openxmlformats.org/presentationml/2006/main">
+  <p:cSld>
+    <p:spTree>
+      <p:nvGrpSpPr>
+        <p:cNvPr id="1" name=""/>
+        <p:cNvGrpSpPr/>
+        <p:nvPr/>
+      </p:nvGrpSpPr>
+      <p:grpSpPr>
+        <a:xfrm>
+          <a:off x="0" y="0"/>
+          <a:ext cx="0" cy="0"/>
+          <a:chOff x="0" y="0"/>
+          <a:chExt cx="0" cy="0"/>
+        </a:xfrm>
+      </p:grpSpPr>
+    </p:spTree>
+    <p:extLst>
+      <p:ext uri="{BB962C8B-B14F-4D97-AF65-F5344CB8AC3E}">
+        <p14:creationId xmlns:p14="http://schemas.microsoft.com/office/powerpoint/2010/main" val="2833232805"/>
       </p:ext>
     </p:extLst>
   </p:cSld>

--- a/examples/화면설계.pptx
+++ b/examples/화면설계.pptx
@@ -10,6 +10,7 @@
     <p:sldId id="258" r:id="rId4"/>
     <p:sldId id="259" r:id="rId5"/>
     <p:sldId id="260" r:id="rId6"/>
+    <p:sldId id="261" r:id="rId7"/>
   </p:sldIdLst>
   <p:sldSz cx="12192000" cy="6858000"/>
   <p:notesSz cx="6858000" cy="9144000"/>
@@ -8502,10 +8503,5685 @@
           <a:chExt cx="0" cy="0"/>
         </a:xfrm>
       </p:grpSpPr>
+      <p:sp>
+        <p:nvSpPr>
+          <p:cNvPr id="2" name="사각형: 둥근 모서리 1">
+            <a:extLst>
+              <a:ext uri="{FF2B5EF4-FFF2-40B4-BE49-F238E27FC236}">
+                <a16:creationId xmlns:a16="http://schemas.microsoft.com/office/drawing/2014/main" id="{91E9A215-5D0A-55E2-3EBB-9805EAEFC01B}"/>
+              </a:ext>
+            </a:extLst>
+          </p:cNvPr>
+          <p:cNvSpPr/>
+          <p:nvPr/>
+        </p:nvSpPr>
+        <p:spPr>
+          <a:xfrm>
+            <a:off x="271497" y="831117"/>
+            <a:ext cx="4911837" cy="936977"/>
+          </a:xfrm>
+          <a:prstGeom prst="roundRect">
+            <a:avLst>
+              <a:gd name="adj" fmla="val 3460"/>
+            </a:avLst>
+          </a:prstGeom>
+          <a:solidFill>
+            <a:schemeClr val="bg1">
+              <a:lumMod val="95000"/>
+            </a:schemeClr>
+          </a:solidFill>
+          <a:ln w="3175">
+            <a:solidFill>
+              <a:schemeClr val="bg1">
+                <a:lumMod val="65000"/>
+              </a:schemeClr>
+            </a:solidFill>
+          </a:ln>
+        </p:spPr>
+        <p:style>
+          <a:lnRef idx="2">
+            <a:schemeClr val="accent1">
+              <a:shade val="15000"/>
+            </a:schemeClr>
+          </a:lnRef>
+          <a:fillRef idx="1">
+            <a:schemeClr val="accent1"/>
+          </a:fillRef>
+          <a:effectRef idx="0">
+            <a:schemeClr val="accent1"/>
+          </a:effectRef>
+          <a:fontRef idx="minor">
+            <a:schemeClr val="lt1"/>
+          </a:fontRef>
+        </p:style>
+        <p:txBody>
+          <a:bodyPr rtlCol="0" anchor="ctr"/>
+          <a:lstStyle/>
+          <a:p>
+            <a:pPr algn="ctr"/>
+            <a:endParaRPr lang="ko-KR" altLang="en-US"/>
+          </a:p>
+        </p:txBody>
+      </p:sp>
+      <p:sp>
+        <p:nvSpPr>
+          <p:cNvPr id="6" name="TextBox 5">
+            <a:extLst>
+              <a:ext uri="{FF2B5EF4-FFF2-40B4-BE49-F238E27FC236}">
+                <a16:creationId xmlns:a16="http://schemas.microsoft.com/office/drawing/2014/main" id="{05EC7D9D-25C3-357F-7076-39ED593CD750}"/>
+              </a:ext>
+            </a:extLst>
+          </p:cNvPr>
+          <p:cNvSpPr txBox="1"/>
+          <p:nvPr/>
+        </p:nvSpPr>
+        <p:spPr>
+          <a:xfrm>
+            <a:off x="429541" y="921428"/>
+            <a:ext cx="1343377" cy="307777"/>
+          </a:xfrm>
+          <a:prstGeom prst="rect">
+            <a:avLst/>
+          </a:prstGeom>
+          <a:noFill/>
+        </p:spPr>
+        <p:txBody>
+          <a:bodyPr wrap="square" rtlCol="0">
+            <a:spAutoFit/>
+          </a:bodyPr>
+          <a:lstStyle/>
+          <a:p>
+            <a:r>
+              <a:rPr lang="en-US" altLang="ko-KR" sz="1400"/>
+              <a:t>Store Name</a:t>
+            </a:r>
+            <a:endParaRPr lang="ko-KR" altLang="en-US" sz="1400">
+              <a:solidFill>
+                <a:srgbClr val="FF0000"/>
+              </a:solidFill>
+            </a:endParaRPr>
+          </a:p>
+        </p:txBody>
+      </p:sp>
+      <p:sp>
+        <p:nvSpPr>
+          <p:cNvPr id="22" name="TextBox 21">
+            <a:extLst>
+              <a:ext uri="{FF2B5EF4-FFF2-40B4-BE49-F238E27FC236}">
+                <a16:creationId xmlns:a16="http://schemas.microsoft.com/office/drawing/2014/main" id="{37B4D24F-E4A1-6D8E-5D2D-3FBB3BD1E6DA}"/>
+              </a:ext>
+            </a:extLst>
+          </p:cNvPr>
+          <p:cNvSpPr txBox="1"/>
+          <p:nvPr/>
+        </p:nvSpPr>
+        <p:spPr>
+          <a:xfrm>
+            <a:off x="429541" y="1375961"/>
+            <a:ext cx="1343377" cy="307777"/>
+          </a:xfrm>
+          <a:prstGeom prst="rect">
+            <a:avLst/>
+          </a:prstGeom>
+          <a:noFill/>
+        </p:spPr>
+        <p:txBody>
+          <a:bodyPr wrap="square" rtlCol="0">
+            <a:spAutoFit/>
+          </a:bodyPr>
+          <a:lstStyle/>
+          <a:p>
+            <a:r>
+              <a:rPr lang="en-US" altLang="ko-KR" sz="1400"/>
+              <a:t>Store ID</a:t>
+            </a:r>
+            <a:endParaRPr lang="ko-KR" altLang="en-US" sz="1400"/>
+          </a:p>
+        </p:txBody>
+      </p:sp>
+      <p:sp>
+        <p:nvSpPr>
+          <p:cNvPr id="23" name="사각형: 둥근 모서리 22">
+            <a:extLst>
+              <a:ext uri="{FF2B5EF4-FFF2-40B4-BE49-F238E27FC236}">
+                <a16:creationId xmlns:a16="http://schemas.microsoft.com/office/drawing/2014/main" id="{743152C9-7D83-1EAA-D710-3C2C82375ADF}"/>
+              </a:ext>
+            </a:extLst>
+          </p:cNvPr>
+          <p:cNvSpPr/>
+          <p:nvPr/>
+        </p:nvSpPr>
+        <p:spPr>
+          <a:xfrm>
+            <a:off x="1772918" y="1347428"/>
+            <a:ext cx="3285916" cy="307777"/>
+          </a:xfrm>
+          <a:prstGeom prst="roundRect">
+            <a:avLst/>
+          </a:prstGeom>
+          <a:noFill/>
+          <a:ln w="3175">
+            <a:solidFill>
+              <a:schemeClr val="bg1">
+                <a:lumMod val="50000"/>
+              </a:schemeClr>
+            </a:solidFill>
+          </a:ln>
+        </p:spPr>
+        <p:style>
+          <a:lnRef idx="2">
+            <a:schemeClr val="accent1">
+              <a:shade val="15000"/>
+            </a:schemeClr>
+          </a:lnRef>
+          <a:fillRef idx="1">
+            <a:schemeClr val="accent1"/>
+          </a:fillRef>
+          <a:effectRef idx="0">
+            <a:schemeClr val="accent1"/>
+          </a:effectRef>
+          <a:fontRef idx="minor">
+            <a:schemeClr val="lt1"/>
+          </a:fontRef>
+        </p:style>
+        <p:txBody>
+          <a:bodyPr rtlCol="0" anchor="ctr"/>
+          <a:lstStyle/>
+          <a:p>
+            <a:pPr algn="ctr"/>
+            <a:endParaRPr lang="ko-KR" altLang="en-US"/>
+          </a:p>
+        </p:txBody>
+      </p:sp>
+      <p:sp>
+        <p:nvSpPr>
+          <p:cNvPr id="24" name="TextBox 23">
+            <a:extLst>
+              <a:ext uri="{FF2B5EF4-FFF2-40B4-BE49-F238E27FC236}">
+                <a16:creationId xmlns:a16="http://schemas.microsoft.com/office/drawing/2014/main" id="{C8D5F314-BC68-99A6-9225-41CDD4AA8B7D}"/>
+              </a:ext>
+            </a:extLst>
+          </p:cNvPr>
+          <p:cNvSpPr txBox="1"/>
+          <p:nvPr/>
+        </p:nvSpPr>
+        <p:spPr>
+          <a:xfrm>
+            <a:off x="412173" y="466895"/>
+            <a:ext cx="1794433" cy="307777"/>
+          </a:xfrm>
+          <a:prstGeom prst="rect">
+            <a:avLst/>
+          </a:prstGeom>
+          <a:noFill/>
+        </p:spPr>
+        <p:txBody>
+          <a:bodyPr wrap="square" rtlCol="0">
+            <a:spAutoFit/>
+          </a:bodyPr>
+          <a:lstStyle/>
+          <a:p>
+            <a:r>
+              <a:rPr lang="en-US" altLang="ko-KR" sz="1400"/>
+              <a:t>Pinia Store</a:t>
+            </a:r>
+            <a:endParaRPr lang="ko-KR" altLang="en-US" sz="1400"/>
+          </a:p>
+        </p:txBody>
+      </p:sp>
+      <p:sp>
+        <p:nvSpPr>
+          <p:cNvPr id="25" name="사각형: 둥근 모서리 24">
+            <a:extLst>
+              <a:ext uri="{FF2B5EF4-FFF2-40B4-BE49-F238E27FC236}">
+                <a16:creationId xmlns:a16="http://schemas.microsoft.com/office/drawing/2014/main" id="{6E36979D-D314-03BF-A537-9664491FA6D7}"/>
+              </a:ext>
+            </a:extLst>
+          </p:cNvPr>
+          <p:cNvSpPr/>
+          <p:nvPr/>
+        </p:nvSpPr>
+        <p:spPr>
+          <a:xfrm>
+            <a:off x="1772916" y="960814"/>
+            <a:ext cx="3285917" cy="307777"/>
+          </a:xfrm>
+          <a:prstGeom prst="roundRect">
+            <a:avLst/>
+          </a:prstGeom>
+          <a:noFill/>
+          <a:ln w="3175">
+            <a:solidFill>
+              <a:schemeClr val="bg1">
+                <a:lumMod val="50000"/>
+              </a:schemeClr>
+            </a:solidFill>
+          </a:ln>
+        </p:spPr>
+        <p:style>
+          <a:lnRef idx="2">
+            <a:schemeClr val="accent1">
+              <a:shade val="15000"/>
+            </a:schemeClr>
+          </a:lnRef>
+          <a:fillRef idx="1">
+            <a:schemeClr val="accent1"/>
+          </a:fillRef>
+          <a:effectRef idx="0">
+            <a:schemeClr val="accent1"/>
+          </a:effectRef>
+          <a:fontRef idx="minor">
+            <a:schemeClr val="lt1"/>
+          </a:fontRef>
+        </p:style>
+        <p:txBody>
+          <a:bodyPr rtlCol="0" anchor="ctr"/>
+          <a:lstStyle/>
+          <a:p>
+            <a:pPr algn="ctr"/>
+            <a:endParaRPr lang="ko-KR" altLang="en-US"/>
+          </a:p>
+        </p:txBody>
+      </p:sp>
+      <p:sp>
+        <p:nvSpPr>
+          <p:cNvPr id="26" name="사각형: 둥근 모서리 25">
+            <a:extLst>
+              <a:ext uri="{FF2B5EF4-FFF2-40B4-BE49-F238E27FC236}">
+                <a16:creationId xmlns:a16="http://schemas.microsoft.com/office/drawing/2014/main" id="{57079287-A496-20A4-CD1B-124FED0F0CF5}"/>
+              </a:ext>
+            </a:extLst>
+          </p:cNvPr>
+          <p:cNvSpPr/>
+          <p:nvPr/>
+        </p:nvSpPr>
+        <p:spPr>
+          <a:xfrm>
+            <a:off x="317025" y="509384"/>
+            <a:ext cx="45719" cy="222988"/>
+          </a:xfrm>
+          <a:prstGeom prst="roundRect">
+            <a:avLst/>
+          </a:prstGeom>
+        </p:spPr>
+        <p:style>
+          <a:lnRef idx="2">
+            <a:schemeClr val="accent1">
+              <a:shade val="15000"/>
+            </a:schemeClr>
+          </a:lnRef>
+          <a:fillRef idx="1">
+            <a:schemeClr val="accent1"/>
+          </a:fillRef>
+          <a:effectRef idx="0">
+            <a:schemeClr val="accent1"/>
+          </a:effectRef>
+          <a:fontRef idx="minor">
+            <a:schemeClr val="lt1"/>
+          </a:fontRef>
+        </p:style>
+        <p:txBody>
+          <a:bodyPr rtlCol="0" anchor="ctr"/>
+          <a:lstStyle/>
+          <a:p>
+            <a:pPr algn="ctr"/>
+            <a:endParaRPr lang="ko-KR" altLang="en-US"/>
+          </a:p>
+        </p:txBody>
+      </p:sp>
+      <p:sp>
+        <p:nvSpPr>
+          <p:cNvPr id="27" name="사각형: 둥근 모서리 26">
+            <a:extLst>
+              <a:ext uri="{FF2B5EF4-FFF2-40B4-BE49-F238E27FC236}">
+                <a16:creationId xmlns:a16="http://schemas.microsoft.com/office/drawing/2014/main" id="{B33607F5-E998-89C6-A004-F2C1AD513F67}"/>
+              </a:ext>
+            </a:extLst>
+          </p:cNvPr>
+          <p:cNvSpPr/>
+          <p:nvPr/>
+        </p:nvSpPr>
+        <p:spPr>
+          <a:xfrm>
+            <a:off x="271497" y="2160509"/>
+            <a:ext cx="4911837" cy="1943391"/>
+          </a:xfrm>
+          <a:prstGeom prst="roundRect">
+            <a:avLst>
+              <a:gd name="adj" fmla="val 3460"/>
+            </a:avLst>
+          </a:prstGeom>
+          <a:solidFill>
+            <a:schemeClr val="bg1">
+              <a:lumMod val="95000"/>
+            </a:schemeClr>
+          </a:solidFill>
+          <a:ln w="3175">
+            <a:solidFill>
+              <a:schemeClr val="bg1">
+                <a:lumMod val="65000"/>
+              </a:schemeClr>
+            </a:solidFill>
+          </a:ln>
+        </p:spPr>
+        <p:style>
+          <a:lnRef idx="2">
+            <a:schemeClr val="accent1">
+              <a:shade val="15000"/>
+            </a:schemeClr>
+          </a:lnRef>
+          <a:fillRef idx="1">
+            <a:schemeClr val="accent1"/>
+          </a:fillRef>
+          <a:effectRef idx="0">
+            <a:schemeClr val="accent1"/>
+          </a:effectRef>
+          <a:fontRef idx="minor">
+            <a:schemeClr val="lt1"/>
+          </a:fontRef>
+        </p:style>
+        <p:txBody>
+          <a:bodyPr rtlCol="0" anchor="ctr"/>
+          <a:lstStyle/>
+          <a:p>
+            <a:pPr algn="ctr"/>
+            <a:endParaRPr lang="ko-KR" altLang="en-US"/>
+          </a:p>
+        </p:txBody>
+      </p:sp>
+      <p:sp>
+        <p:nvSpPr>
+          <p:cNvPr id="31" name="TextBox 30">
+            <a:extLst>
+              <a:ext uri="{FF2B5EF4-FFF2-40B4-BE49-F238E27FC236}">
+                <a16:creationId xmlns:a16="http://schemas.microsoft.com/office/drawing/2014/main" id="{8C8D50A2-DB0C-A86A-8065-E33E1B84BB3A}"/>
+              </a:ext>
+            </a:extLst>
+          </p:cNvPr>
+          <p:cNvSpPr txBox="1"/>
+          <p:nvPr/>
+        </p:nvSpPr>
+        <p:spPr>
+          <a:xfrm>
+            <a:off x="412173" y="1796288"/>
+            <a:ext cx="1794433" cy="307777"/>
+          </a:xfrm>
+          <a:prstGeom prst="rect">
+            <a:avLst/>
+          </a:prstGeom>
+          <a:noFill/>
+        </p:spPr>
+        <p:txBody>
+          <a:bodyPr wrap="square" rtlCol="0">
+            <a:spAutoFit/>
+          </a:bodyPr>
+          <a:lstStyle/>
+          <a:p>
+            <a:r>
+              <a:rPr lang="en-US" altLang="ko-KR" sz="1400"/>
+              <a:t>State</a:t>
+            </a:r>
+            <a:endParaRPr lang="ko-KR" altLang="en-US" sz="1400"/>
+          </a:p>
+        </p:txBody>
+      </p:sp>
+      <p:sp>
+        <p:nvSpPr>
+          <p:cNvPr id="33" name="사각형: 둥근 모서리 32">
+            <a:extLst>
+              <a:ext uri="{FF2B5EF4-FFF2-40B4-BE49-F238E27FC236}">
+                <a16:creationId xmlns:a16="http://schemas.microsoft.com/office/drawing/2014/main" id="{328610F4-B61F-7DC5-0FCF-7F0120DC1140}"/>
+              </a:ext>
+            </a:extLst>
+          </p:cNvPr>
+          <p:cNvSpPr/>
+          <p:nvPr/>
+        </p:nvSpPr>
+        <p:spPr>
+          <a:xfrm>
+            <a:off x="317025" y="1838777"/>
+            <a:ext cx="45719" cy="222988"/>
+          </a:xfrm>
+          <a:prstGeom prst="roundRect">
+            <a:avLst/>
+          </a:prstGeom>
+        </p:spPr>
+        <p:style>
+          <a:lnRef idx="2">
+            <a:schemeClr val="accent1">
+              <a:shade val="15000"/>
+            </a:schemeClr>
+          </a:lnRef>
+          <a:fillRef idx="1">
+            <a:schemeClr val="accent1"/>
+          </a:fillRef>
+          <a:effectRef idx="0">
+            <a:schemeClr val="accent1"/>
+          </a:effectRef>
+          <a:fontRef idx="minor">
+            <a:schemeClr val="lt1"/>
+          </a:fontRef>
+        </p:style>
+        <p:txBody>
+          <a:bodyPr rtlCol="0" anchor="ctr"/>
+          <a:lstStyle/>
+          <a:p>
+            <a:pPr algn="ctr"/>
+            <a:endParaRPr lang="ko-KR" altLang="en-US"/>
+          </a:p>
+        </p:txBody>
+      </p:sp>
+      <p:sp>
+        <p:nvSpPr>
+          <p:cNvPr id="34" name="사각형: 둥근 모서리 33">
+            <a:extLst>
+              <a:ext uri="{FF2B5EF4-FFF2-40B4-BE49-F238E27FC236}">
+                <a16:creationId xmlns:a16="http://schemas.microsoft.com/office/drawing/2014/main" id="{110ED8E7-FBC8-0AC1-A3C9-F65B4733755C}"/>
+              </a:ext>
+            </a:extLst>
+          </p:cNvPr>
+          <p:cNvSpPr/>
+          <p:nvPr/>
+        </p:nvSpPr>
+        <p:spPr>
+          <a:xfrm>
+            <a:off x="271497" y="4558434"/>
+            <a:ext cx="4911837" cy="936977"/>
+          </a:xfrm>
+          <a:prstGeom prst="roundRect">
+            <a:avLst>
+              <a:gd name="adj" fmla="val 3460"/>
+            </a:avLst>
+          </a:prstGeom>
+          <a:solidFill>
+            <a:schemeClr val="bg1">
+              <a:lumMod val="95000"/>
+            </a:schemeClr>
+          </a:solidFill>
+          <a:ln w="3175">
+            <a:solidFill>
+              <a:schemeClr val="bg1">
+                <a:lumMod val="65000"/>
+              </a:schemeClr>
+            </a:solidFill>
+          </a:ln>
+        </p:spPr>
+        <p:style>
+          <a:lnRef idx="2">
+            <a:schemeClr val="accent1">
+              <a:shade val="15000"/>
+            </a:schemeClr>
+          </a:lnRef>
+          <a:fillRef idx="1">
+            <a:schemeClr val="accent1"/>
+          </a:fillRef>
+          <a:effectRef idx="0">
+            <a:schemeClr val="accent1"/>
+          </a:effectRef>
+          <a:fontRef idx="minor">
+            <a:schemeClr val="lt1"/>
+          </a:fontRef>
+        </p:style>
+        <p:txBody>
+          <a:bodyPr rtlCol="0" anchor="ctr"/>
+          <a:lstStyle/>
+          <a:p>
+            <a:pPr algn="ctr"/>
+            <a:endParaRPr lang="ko-KR" altLang="en-US"/>
+          </a:p>
+        </p:txBody>
+      </p:sp>
+      <p:sp>
+        <p:nvSpPr>
+          <p:cNvPr id="35" name="TextBox 34">
+            <a:extLst>
+              <a:ext uri="{FF2B5EF4-FFF2-40B4-BE49-F238E27FC236}">
+                <a16:creationId xmlns:a16="http://schemas.microsoft.com/office/drawing/2014/main" id="{AE42B6EF-DEFF-D41B-5D44-D01680ADA447}"/>
+              </a:ext>
+            </a:extLst>
+          </p:cNvPr>
+          <p:cNvSpPr txBox="1"/>
+          <p:nvPr/>
+        </p:nvSpPr>
+        <p:spPr>
+          <a:xfrm>
+            <a:off x="569528" y="4686157"/>
+            <a:ext cx="1343377" cy="307777"/>
+          </a:xfrm>
+          <a:prstGeom prst="rect">
+            <a:avLst/>
+          </a:prstGeom>
+          <a:noFill/>
+        </p:spPr>
+        <p:txBody>
+          <a:bodyPr wrap="square" rtlCol="0">
+            <a:spAutoFit/>
+          </a:bodyPr>
+          <a:lstStyle/>
+          <a:p>
+            <a:r>
+              <a:rPr lang="en-US" altLang="ko-KR" sz="1400"/>
+              <a:t>Getter </a:t>
+            </a:r>
+            <a:r>
+              <a:rPr lang="ko-KR" altLang="en-US" sz="1400"/>
+              <a:t>명</a:t>
+            </a:r>
+          </a:p>
+        </p:txBody>
+      </p:sp>
+      <p:sp>
+        <p:nvSpPr>
+          <p:cNvPr id="36" name="TextBox 35">
+            <a:extLst>
+              <a:ext uri="{FF2B5EF4-FFF2-40B4-BE49-F238E27FC236}">
+                <a16:creationId xmlns:a16="http://schemas.microsoft.com/office/drawing/2014/main" id="{D99D098E-D7B1-60DB-51E3-D3A83488CBEE}"/>
+              </a:ext>
+            </a:extLst>
+          </p:cNvPr>
+          <p:cNvSpPr txBox="1"/>
+          <p:nvPr/>
+        </p:nvSpPr>
+        <p:spPr>
+          <a:xfrm>
+            <a:off x="2797334" y="4645828"/>
+            <a:ext cx="1343377" cy="307777"/>
+          </a:xfrm>
+          <a:prstGeom prst="rect">
+            <a:avLst/>
+          </a:prstGeom>
+          <a:noFill/>
+        </p:spPr>
+        <p:txBody>
+          <a:bodyPr wrap="square" rtlCol="0">
+            <a:spAutoFit/>
+          </a:bodyPr>
+          <a:lstStyle/>
+          <a:p>
+            <a:r>
+              <a:rPr lang="en-US" altLang="ko-KR" sz="1400"/>
+              <a:t>Return </a:t>
+            </a:r>
+            <a:r>
+              <a:rPr lang="ko-KR" altLang="en-US" sz="1400"/>
+              <a:t>식</a:t>
+            </a:r>
+          </a:p>
+        </p:txBody>
+      </p:sp>
+      <p:sp>
+        <p:nvSpPr>
+          <p:cNvPr id="37" name="사각형: 둥근 모서리 36">
+            <a:extLst>
+              <a:ext uri="{FF2B5EF4-FFF2-40B4-BE49-F238E27FC236}">
+                <a16:creationId xmlns:a16="http://schemas.microsoft.com/office/drawing/2014/main" id="{BD2B06AC-53F2-D2DB-B869-AD7178163773}"/>
+              </a:ext>
+            </a:extLst>
+          </p:cNvPr>
+          <p:cNvSpPr/>
+          <p:nvPr/>
+        </p:nvSpPr>
+        <p:spPr>
+          <a:xfrm>
+            <a:off x="1965958" y="5052356"/>
+            <a:ext cx="2687322" cy="307777"/>
+          </a:xfrm>
+          <a:prstGeom prst="roundRect">
+            <a:avLst/>
+          </a:prstGeom>
+          <a:noFill/>
+          <a:ln w="3175">
+            <a:solidFill>
+              <a:schemeClr val="bg1">
+                <a:lumMod val="50000"/>
+              </a:schemeClr>
+            </a:solidFill>
+          </a:ln>
+        </p:spPr>
+        <p:style>
+          <a:lnRef idx="2">
+            <a:schemeClr val="accent1">
+              <a:shade val="15000"/>
+            </a:schemeClr>
+          </a:lnRef>
+          <a:fillRef idx="1">
+            <a:schemeClr val="accent1"/>
+          </a:fillRef>
+          <a:effectRef idx="0">
+            <a:schemeClr val="accent1"/>
+          </a:effectRef>
+          <a:fontRef idx="minor">
+            <a:schemeClr val="lt1"/>
+          </a:fontRef>
+        </p:style>
+        <p:txBody>
+          <a:bodyPr rtlCol="0" anchor="ctr"/>
+          <a:lstStyle/>
+          <a:p>
+            <a:r>
+              <a:rPr lang="en-US" altLang="ko-KR" sz="1200">
+                <a:solidFill>
+                  <a:schemeClr val="tx1">
+                    <a:lumMod val="75000"/>
+                    <a:lumOff val="25000"/>
+                  </a:schemeClr>
+                </a:solidFill>
+              </a:rPr>
+              <a:t>state.rows.length</a:t>
+            </a:r>
+            <a:endParaRPr lang="ko-KR" altLang="en-US" sz="1200">
+              <a:solidFill>
+                <a:schemeClr val="tx1">
+                  <a:lumMod val="75000"/>
+                  <a:lumOff val="25000"/>
+                </a:schemeClr>
+              </a:solidFill>
+            </a:endParaRPr>
+          </a:p>
+        </p:txBody>
+      </p:sp>
+      <p:sp>
+        <p:nvSpPr>
+          <p:cNvPr id="38" name="TextBox 37">
+            <a:extLst>
+              <a:ext uri="{FF2B5EF4-FFF2-40B4-BE49-F238E27FC236}">
+                <a16:creationId xmlns:a16="http://schemas.microsoft.com/office/drawing/2014/main" id="{7785CF73-FE57-2494-8036-AECFF55D17A0}"/>
+              </a:ext>
+            </a:extLst>
+          </p:cNvPr>
+          <p:cNvSpPr txBox="1"/>
+          <p:nvPr/>
+        </p:nvSpPr>
+        <p:spPr>
+          <a:xfrm>
+            <a:off x="412173" y="4194212"/>
+            <a:ext cx="1794433" cy="307777"/>
+          </a:xfrm>
+          <a:prstGeom prst="rect">
+            <a:avLst/>
+          </a:prstGeom>
+          <a:noFill/>
+        </p:spPr>
+        <p:txBody>
+          <a:bodyPr wrap="square" rtlCol="0">
+            <a:spAutoFit/>
+          </a:bodyPr>
+          <a:lstStyle/>
+          <a:p>
+            <a:r>
+              <a:rPr lang="en-US" altLang="ko-KR" sz="1400"/>
+              <a:t>Getters</a:t>
+            </a:r>
+            <a:endParaRPr lang="ko-KR" altLang="en-US" sz="1400"/>
+          </a:p>
+        </p:txBody>
+      </p:sp>
+      <p:sp>
+        <p:nvSpPr>
+          <p:cNvPr id="39" name="사각형: 둥근 모서리 38">
+            <a:extLst>
+              <a:ext uri="{FF2B5EF4-FFF2-40B4-BE49-F238E27FC236}">
+                <a16:creationId xmlns:a16="http://schemas.microsoft.com/office/drawing/2014/main" id="{1FC1D4AA-BD1E-99C3-CD4D-C5711AE5320D}"/>
+              </a:ext>
+            </a:extLst>
+          </p:cNvPr>
+          <p:cNvSpPr/>
+          <p:nvPr/>
+        </p:nvSpPr>
+        <p:spPr>
+          <a:xfrm>
+            <a:off x="429541" y="5047619"/>
+            <a:ext cx="1483364" cy="307777"/>
+          </a:xfrm>
+          <a:prstGeom prst="roundRect">
+            <a:avLst/>
+          </a:prstGeom>
+          <a:noFill/>
+          <a:ln w="3175">
+            <a:solidFill>
+              <a:schemeClr val="bg1">
+                <a:lumMod val="50000"/>
+              </a:schemeClr>
+            </a:solidFill>
+          </a:ln>
+        </p:spPr>
+        <p:style>
+          <a:lnRef idx="2">
+            <a:schemeClr val="accent1">
+              <a:shade val="15000"/>
+            </a:schemeClr>
+          </a:lnRef>
+          <a:fillRef idx="1">
+            <a:schemeClr val="accent1"/>
+          </a:fillRef>
+          <a:effectRef idx="0">
+            <a:schemeClr val="accent1"/>
+          </a:effectRef>
+          <a:fontRef idx="minor">
+            <a:schemeClr val="lt1"/>
+          </a:fontRef>
+        </p:style>
+        <p:txBody>
+          <a:bodyPr rtlCol="0" anchor="ctr"/>
+          <a:lstStyle/>
+          <a:p>
+            <a:r>
+              <a:rPr lang="en-US" altLang="ko-KR" sz="1200">
+                <a:solidFill>
+                  <a:schemeClr val="tx1">
+                    <a:lumMod val="75000"/>
+                    <a:lumOff val="25000"/>
+                  </a:schemeClr>
+                </a:solidFill>
+              </a:rPr>
+              <a:t>rowCount</a:t>
+            </a:r>
+            <a:endParaRPr lang="ko-KR" altLang="en-US" sz="1200">
+              <a:solidFill>
+                <a:schemeClr val="tx1">
+                  <a:lumMod val="75000"/>
+                  <a:lumOff val="25000"/>
+                </a:schemeClr>
+              </a:solidFill>
+            </a:endParaRPr>
+          </a:p>
+        </p:txBody>
+      </p:sp>
+      <p:sp>
+        <p:nvSpPr>
+          <p:cNvPr id="40" name="사각형: 둥근 모서리 39">
+            <a:extLst>
+              <a:ext uri="{FF2B5EF4-FFF2-40B4-BE49-F238E27FC236}">
+                <a16:creationId xmlns:a16="http://schemas.microsoft.com/office/drawing/2014/main" id="{D37AD911-D3F0-2F6B-4C98-D2FF12E86195}"/>
+              </a:ext>
+            </a:extLst>
+          </p:cNvPr>
+          <p:cNvSpPr/>
+          <p:nvPr/>
+        </p:nvSpPr>
+        <p:spPr>
+          <a:xfrm>
+            <a:off x="317025" y="4236701"/>
+            <a:ext cx="45719" cy="222988"/>
+          </a:xfrm>
+          <a:prstGeom prst="roundRect">
+            <a:avLst/>
+          </a:prstGeom>
+        </p:spPr>
+        <p:style>
+          <a:lnRef idx="2">
+            <a:schemeClr val="accent1">
+              <a:shade val="15000"/>
+            </a:schemeClr>
+          </a:lnRef>
+          <a:fillRef idx="1">
+            <a:schemeClr val="accent1"/>
+          </a:fillRef>
+          <a:effectRef idx="0">
+            <a:schemeClr val="accent1"/>
+          </a:effectRef>
+          <a:fontRef idx="minor">
+            <a:schemeClr val="lt1"/>
+          </a:fontRef>
+        </p:style>
+        <p:txBody>
+          <a:bodyPr rtlCol="0" anchor="ctr"/>
+          <a:lstStyle/>
+          <a:p>
+            <a:pPr algn="ctr"/>
+            <a:endParaRPr lang="ko-KR" altLang="en-US"/>
+          </a:p>
+        </p:txBody>
+      </p:sp>
+      <p:sp>
+        <p:nvSpPr>
+          <p:cNvPr id="41" name="사각형: 둥근 모서리 40">
+            <a:extLst>
+              <a:ext uri="{FF2B5EF4-FFF2-40B4-BE49-F238E27FC236}">
+                <a16:creationId xmlns:a16="http://schemas.microsoft.com/office/drawing/2014/main" id="{8DA14FD7-1422-9351-8256-58734870775A}"/>
+              </a:ext>
+            </a:extLst>
+          </p:cNvPr>
+          <p:cNvSpPr/>
+          <p:nvPr/>
+        </p:nvSpPr>
+        <p:spPr>
+          <a:xfrm>
+            <a:off x="271497" y="5868763"/>
+            <a:ext cx="4911837" cy="936977"/>
+          </a:xfrm>
+          <a:prstGeom prst="roundRect">
+            <a:avLst>
+              <a:gd name="adj" fmla="val 3460"/>
+            </a:avLst>
+          </a:prstGeom>
+          <a:solidFill>
+            <a:schemeClr val="bg1">
+              <a:lumMod val="95000"/>
+            </a:schemeClr>
+          </a:solidFill>
+          <a:ln w="3175">
+            <a:solidFill>
+              <a:schemeClr val="bg1">
+                <a:lumMod val="65000"/>
+              </a:schemeClr>
+            </a:solidFill>
+          </a:ln>
+        </p:spPr>
+        <p:style>
+          <a:lnRef idx="2">
+            <a:schemeClr val="accent1">
+              <a:shade val="15000"/>
+            </a:schemeClr>
+          </a:lnRef>
+          <a:fillRef idx="1">
+            <a:schemeClr val="accent1"/>
+          </a:fillRef>
+          <a:effectRef idx="0">
+            <a:schemeClr val="accent1"/>
+          </a:effectRef>
+          <a:fontRef idx="minor">
+            <a:schemeClr val="lt1"/>
+          </a:fontRef>
+        </p:style>
+        <p:txBody>
+          <a:bodyPr rtlCol="0" anchor="ctr"/>
+          <a:lstStyle/>
+          <a:p>
+            <a:pPr algn="ctr"/>
+            <a:endParaRPr lang="ko-KR" altLang="en-US"/>
+          </a:p>
+        </p:txBody>
+      </p:sp>
+      <p:sp>
+        <p:nvSpPr>
+          <p:cNvPr id="45" name="TextBox 44">
+            <a:extLst>
+              <a:ext uri="{FF2B5EF4-FFF2-40B4-BE49-F238E27FC236}">
+                <a16:creationId xmlns:a16="http://schemas.microsoft.com/office/drawing/2014/main" id="{0729BC2C-51CC-7746-8F37-883FA8110360}"/>
+              </a:ext>
+            </a:extLst>
+          </p:cNvPr>
+          <p:cNvSpPr txBox="1"/>
+          <p:nvPr/>
+        </p:nvSpPr>
+        <p:spPr>
+          <a:xfrm>
+            <a:off x="412173" y="5504541"/>
+            <a:ext cx="1794433" cy="307777"/>
+          </a:xfrm>
+          <a:prstGeom prst="rect">
+            <a:avLst/>
+          </a:prstGeom>
+          <a:noFill/>
+        </p:spPr>
+        <p:txBody>
+          <a:bodyPr wrap="square" rtlCol="0">
+            <a:spAutoFit/>
+          </a:bodyPr>
+          <a:lstStyle/>
+          <a:p>
+            <a:r>
+              <a:rPr lang="en-US" altLang="ko-KR" sz="1400"/>
+              <a:t>Actions</a:t>
+            </a:r>
+            <a:endParaRPr lang="ko-KR" altLang="en-US" sz="1400"/>
+          </a:p>
+        </p:txBody>
+      </p:sp>
+      <p:sp>
+        <p:nvSpPr>
+          <p:cNvPr id="47" name="사각형: 둥근 모서리 46">
+            <a:extLst>
+              <a:ext uri="{FF2B5EF4-FFF2-40B4-BE49-F238E27FC236}">
+                <a16:creationId xmlns:a16="http://schemas.microsoft.com/office/drawing/2014/main" id="{B3FA3AE6-7724-2319-5662-49FD32B10F98}"/>
+              </a:ext>
+            </a:extLst>
+          </p:cNvPr>
+          <p:cNvSpPr/>
+          <p:nvPr/>
+        </p:nvSpPr>
+        <p:spPr>
+          <a:xfrm>
+            <a:off x="317025" y="5547030"/>
+            <a:ext cx="45719" cy="222988"/>
+          </a:xfrm>
+          <a:prstGeom prst="roundRect">
+            <a:avLst/>
+          </a:prstGeom>
+        </p:spPr>
+        <p:style>
+          <a:lnRef idx="2">
+            <a:schemeClr val="accent1">
+              <a:shade val="15000"/>
+            </a:schemeClr>
+          </a:lnRef>
+          <a:fillRef idx="1">
+            <a:schemeClr val="accent1"/>
+          </a:fillRef>
+          <a:effectRef idx="0">
+            <a:schemeClr val="accent1"/>
+          </a:effectRef>
+          <a:fontRef idx="minor">
+            <a:schemeClr val="lt1"/>
+          </a:fontRef>
+        </p:style>
+        <p:txBody>
+          <a:bodyPr rtlCol="0" anchor="ctr"/>
+          <a:lstStyle/>
+          <a:p>
+            <a:pPr algn="ctr"/>
+            <a:endParaRPr lang="ko-KR" altLang="en-US"/>
+          </a:p>
+        </p:txBody>
+      </p:sp>
+      <p:sp>
+        <p:nvSpPr>
+          <p:cNvPr id="48" name="사각형: 둥근 모서리 47">
+            <a:extLst>
+              <a:ext uri="{FF2B5EF4-FFF2-40B4-BE49-F238E27FC236}">
+                <a16:creationId xmlns:a16="http://schemas.microsoft.com/office/drawing/2014/main" id="{D48BA778-1E22-5AD9-2AD3-B7BADCEFF4D4}"/>
+              </a:ext>
+            </a:extLst>
+          </p:cNvPr>
+          <p:cNvSpPr/>
+          <p:nvPr/>
+        </p:nvSpPr>
+        <p:spPr>
+          <a:xfrm>
+            <a:off x="5652272" y="604048"/>
+            <a:ext cx="5700892" cy="4956937"/>
+          </a:xfrm>
+          <a:prstGeom prst="roundRect">
+            <a:avLst>
+              <a:gd name="adj" fmla="val 1860"/>
+            </a:avLst>
+          </a:prstGeom>
+          <a:noFill/>
+          <a:ln w="3175">
+            <a:solidFill>
+              <a:schemeClr val="bg1">
+                <a:lumMod val="50000"/>
+              </a:schemeClr>
+            </a:solidFill>
+          </a:ln>
+        </p:spPr>
+        <p:style>
+          <a:lnRef idx="2">
+            <a:schemeClr val="accent1">
+              <a:shade val="15000"/>
+            </a:schemeClr>
+          </a:lnRef>
+          <a:fillRef idx="1">
+            <a:schemeClr val="accent1"/>
+          </a:fillRef>
+          <a:effectRef idx="0">
+            <a:schemeClr val="accent1"/>
+          </a:effectRef>
+          <a:fontRef idx="minor">
+            <a:schemeClr val="lt1"/>
+          </a:fontRef>
+        </p:style>
+        <p:txBody>
+          <a:bodyPr rtlCol="0" anchor="ctr"/>
+          <a:lstStyle/>
+          <a:p>
+            <a:pPr algn="ctr"/>
+            <a:endParaRPr lang="ko-KR" altLang="en-US"/>
+          </a:p>
+        </p:txBody>
+      </p:sp>
+      <p:sp>
+        <p:nvSpPr>
+          <p:cNvPr id="49" name="사각형: 둥근 모서리 48">
+            <a:extLst>
+              <a:ext uri="{FF2B5EF4-FFF2-40B4-BE49-F238E27FC236}">
+                <a16:creationId xmlns:a16="http://schemas.microsoft.com/office/drawing/2014/main" id="{C2EC1F98-CE5D-7942-27CA-D1336879BE76}"/>
+              </a:ext>
+            </a:extLst>
+          </p:cNvPr>
+          <p:cNvSpPr/>
+          <p:nvPr/>
+        </p:nvSpPr>
+        <p:spPr>
+          <a:xfrm>
+            <a:off x="4517289" y="4263402"/>
+            <a:ext cx="666045" cy="249037"/>
+          </a:xfrm>
+          <a:prstGeom prst="roundRect">
+            <a:avLst/>
+          </a:prstGeom>
+          <a:solidFill>
+            <a:srgbClr val="0070C0"/>
+          </a:solidFill>
+          <a:ln w="3175">
+            <a:solidFill>
+              <a:schemeClr val="bg1">
+                <a:lumMod val="75000"/>
+              </a:schemeClr>
+            </a:solidFill>
+          </a:ln>
+        </p:spPr>
+        <p:style>
+          <a:lnRef idx="2">
+            <a:schemeClr val="accent1">
+              <a:shade val="15000"/>
+            </a:schemeClr>
+          </a:lnRef>
+          <a:fillRef idx="1">
+            <a:schemeClr val="accent1"/>
+          </a:fillRef>
+          <a:effectRef idx="0">
+            <a:schemeClr val="accent1"/>
+          </a:effectRef>
+          <a:fontRef idx="minor">
+            <a:schemeClr val="lt1"/>
+          </a:fontRef>
+        </p:style>
+        <p:txBody>
+          <a:bodyPr lIns="0" tIns="0" rIns="0" bIns="0" rtlCol="0" anchor="ctr"/>
+          <a:lstStyle/>
+          <a:p>
+            <a:pPr algn="ctr"/>
+            <a:r>
+              <a:rPr lang="en-US" altLang="ko-KR" sz="1200"/>
+              <a:t>+ </a:t>
+            </a:r>
+            <a:r>
+              <a:rPr lang="ko-KR" altLang="en-US" sz="1200"/>
+              <a:t>추가</a:t>
+            </a:r>
+          </a:p>
+        </p:txBody>
+      </p:sp>
+      <p:sp>
+        <p:nvSpPr>
+          <p:cNvPr id="50" name="사각형: 둥근 모서리 49">
+            <a:extLst>
+              <a:ext uri="{FF2B5EF4-FFF2-40B4-BE49-F238E27FC236}">
+                <a16:creationId xmlns:a16="http://schemas.microsoft.com/office/drawing/2014/main" id="{19E9692A-B8E6-4798-0D04-E4A8D66CE4C7}"/>
+              </a:ext>
+            </a:extLst>
+          </p:cNvPr>
+          <p:cNvSpPr/>
+          <p:nvPr/>
+        </p:nvSpPr>
+        <p:spPr>
+          <a:xfrm>
+            <a:off x="4517289" y="5551461"/>
+            <a:ext cx="666045" cy="249037"/>
+          </a:xfrm>
+          <a:prstGeom prst="roundRect">
+            <a:avLst/>
+          </a:prstGeom>
+          <a:solidFill>
+            <a:srgbClr val="0070C0"/>
+          </a:solidFill>
+          <a:ln w="3175">
+            <a:solidFill>
+              <a:schemeClr val="bg1">
+                <a:lumMod val="75000"/>
+              </a:schemeClr>
+            </a:solidFill>
+          </a:ln>
+        </p:spPr>
+        <p:style>
+          <a:lnRef idx="2">
+            <a:schemeClr val="accent1">
+              <a:shade val="15000"/>
+            </a:schemeClr>
+          </a:lnRef>
+          <a:fillRef idx="1">
+            <a:schemeClr val="accent1"/>
+          </a:fillRef>
+          <a:effectRef idx="0">
+            <a:schemeClr val="accent1"/>
+          </a:effectRef>
+          <a:fontRef idx="minor">
+            <a:schemeClr val="lt1"/>
+          </a:fontRef>
+        </p:style>
+        <p:txBody>
+          <a:bodyPr lIns="0" tIns="0" rIns="0" bIns="0" rtlCol="0" anchor="ctr"/>
+          <a:lstStyle/>
+          <a:p>
+            <a:pPr algn="ctr"/>
+            <a:r>
+              <a:rPr lang="en-US" altLang="ko-KR" sz="1200"/>
+              <a:t>+ </a:t>
+            </a:r>
+            <a:r>
+              <a:rPr lang="ko-KR" altLang="en-US" sz="1200"/>
+              <a:t>추가</a:t>
+            </a:r>
+          </a:p>
+        </p:txBody>
+      </p:sp>
+      <p:sp>
+        <p:nvSpPr>
+          <p:cNvPr id="51" name="TextBox 50">
+            <a:extLst>
+              <a:ext uri="{FF2B5EF4-FFF2-40B4-BE49-F238E27FC236}">
+                <a16:creationId xmlns:a16="http://schemas.microsoft.com/office/drawing/2014/main" id="{C7E553B2-FA26-72B4-973F-AE06BCB9F17D}"/>
+              </a:ext>
+            </a:extLst>
+          </p:cNvPr>
+          <p:cNvSpPr txBox="1"/>
+          <p:nvPr/>
+        </p:nvSpPr>
+        <p:spPr>
+          <a:xfrm>
+            <a:off x="376779" y="2209459"/>
+            <a:ext cx="697236" cy="261610"/>
+          </a:xfrm>
+          <a:prstGeom prst="rect">
+            <a:avLst/>
+          </a:prstGeom>
+          <a:noFill/>
+        </p:spPr>
+        <p:txBody>
+          <a:bodyPr wrap="square" rtlCol="0">
+            <a:spAutoFit/>
+          </a:bodyPr>
+          <a:lstStyle/>
+          <a:p>
+            <a:r>
+              <a:rPr lang="en-US" altLang="ko-KR" sz="1050"/>
+              <a:t>+ State</a:t>
+            </a:r>
+            <a:endParaRPr lang="ko-KR" altLang="en-US" sz="1050"/>
+          </a:p>
+        </p:txBody>
+      </p:sp>
+      <p:graphicFrame>
+        <p:nvGraphicFramePr>
+          <p:cNvPr id="53" name="표 52">
+            <a:extLst>
+              <a:ext uri="{FF2B5EF4-FFF2-40B4-BE49-F238E27FC236}">
+                <a16:creationId xmlns:a16="http://schemas.microsoft.com/office/drawing/2014/main" id="{7C10CCF0-1B6E-43D5-EB3E-D8D720C5261B}"/>
+              </a:ext>
+            </a:extLst>
+          </p:cNvPr>
+          <p:cNvGraphicFramePr>
+            <a:graphicFrameLocks noGrp="1"/>
+          </p:cNvGraphicFramePr>
+          <p:nvPr>
+            <p:extLst>
+              <p:ext uri="{D42A27DB-BD31-4B8C-83A1-F6EECF244321}">
+                <p14:modId xmlns:p14="http://schemas.microsoft.com/office/powerpoint/2010/main" val="1936484945"/>
+              </p:ext>
+            </p:extLst>
+          </p:nvPr>
+        </p:nvGraphicFramePr>
+        <p:xfrm>
+          <a:off x="5798707" y="1131700"/>
+          <a:ext cx="5386695" cy="2153072"/>
+        </p:xfrm>
+        <a:graphic>
+          <a:graphicData uri="http://schemas.openxmlformats.org/drawingml/2006/table">
+            <a:tbl>
+              <a:tblPr firstRow="1" bandRow="1">
+                <a:tableStyleId>{5C22544A-7EE6-4342-B048-85BDC9FD1C3A}</a:tableStyleId>
+              </a:tblPr>
+              <a:tblGrid>
+                <a:gridCol w="1448088">
+                  <a:extLst>
+                    <a:ext uri="{9D8B030D-6E8A-4147-A177-3AD203B41FA5}">
+                      <a16:colId xmlns:a16="http://schemas.microsoft.com/office/drawing/2014/main" val="3627809492"/>
+                    </a:ext>
+                  </a:extLst>
+                </a:gridCol>
+                <a:gridCol w="1081185">
+                  <a:extLst>
+                    <a:ext uri="{9D8B030D-6E8A-4147-A177-3AD203B41FA5}">
+                      <a16:colId xmlns:a16="http://schemas.microsoft.com/office/drawing/2014/main" val="1946434474"/>
+                    </a:ext>
+                  </a:extLst>
+                </a:gridCol>
+                <a:gridCol w="1215267">
+                  <a:extLst>
+                    <a:ext uri="{9D8B030D-6E8A-4147-A177-3AD203B41FA5}">
+                      <a16:colId xmlns:a16="http://schemas.microsoft.com/office/drawing/2014/main" val="3005391761"/>
+                    </a:ext>
+                  </a:extLst>
+                </a:gridCol>
+                <a:gridCol w="1109078">
+                  <a:extLst>
+                    <a:ext uri="{9D8B030D-6E8A-4147-A177-3AD203B41FA5}">
+                      <a16:colId xmlns:a16="http://schemas.microsoft.com/office/drawing/2014/main" val="315546368"/>
+                    </a:ext>
+                  </a:extLst>
+                </a:gridCol>
+                <a:gridCol w="533077">
+                  <a:extLst>
+                    <a:ext uri="{9D8B030D-6E8A-4147-A177-3AD203B41FA5}">
+                      <a16:colId xmlns:a16="http://schemas.microsoft.com/office/drawing/2014/main" val="1451244031"/>
+                    </a:ext>
+                  </a:extLst>
+                </a:gridCol>
+              </a:tblGrid>
+              <a:tr h="389166">
+                <a:tc>
+                  <a:txBody>
+                    <a:bodyPr/>
+                    <a:lstStyle/>
+                    <a:p>
+                      <a:pPr algn="ctr" latinLnBrk="1"/>
+                      <a:r>
+                        <a:rPr lang="ko-KR" altLang="en-US" sz="1200"/>
+                        <a:t>이름</a:t>
+                      </a:r>
+                    </a:p>
+                  </a:txBody>
+                  <a:tcPr anchor="ctr"/>
+                </a:tc>
+                <a:tc>
+                  <a:txBody>
+                    <a:bodyPr/>
+                    <a:lstStyle/>
+                    <a:p>
+                      <a:pPr algn="ctr" latinLnBrk="1"/>
+                      <a:r>
+                        <a:rPr lang="ko-KR" altLang="en-US" sz="1200"/>
+                        <a:t>타입</a:t>
+                      </a:r>
+                    </a:p>
+                  </a:txBody>
+                  <a:tcPr anchor="ctr"/>
+                </a:tc>
+                <a:tc>
+                  <a:txBody>
+                    <a:bodyPr/>
+                    <a:lstStyle/>
+                    <a:p>
+                      <a:pPr algn="ctr" latinLnBrk="1"/>
+                      <a:r>
+                        <a:rPr lang="ko-KR" altLang="en-US" sz="1200"/>
+                        <a:t>초기값</a:t>
+                      </a:r>
+                    </a:p>
+                  </a:txBody>
+                  <a:tcPr anchor="ctr"/>
+                </a:tc>
+                <a:tc>
+                  <a:txBody>
+                    <a:bodyPr/>
+                    <a:lstStyle/>
+                    <a:p>
+                      <a:pPr algn="ctr" latinLnBrk="1"/>
+                      <a:r>
+                        <a:rPr lang="ko-KR" altLang="en-US" sz="1200"/>
+                        <a:t>참고사항</a:t>
+                      </a:r>
+                    </a:p>
+                  </a:txBody>
+                  <a:tcPr anchor="ctr"/>
+                </a:tc>
+                <a:tc>
+                  <a:txBody>
+                    <a:bodyPr/>
+                    <a:lstStyle/>
+                    <a:p>
+                      <a:pPr algn="ctr" latinLnBrk="1"/>
+                      <a:r>
+                        <a:rPr lang="ko-KR" altLang="en-US" sz="1200"/>
+                        <a:t>삭제</a:t>
+                      </a:r>
+                    </a:p>
+                  </a:txBody>
+                  <a:tcPr anchor="ctr"/>
+                </a:tc>
+                <a:extLst>
+                  <a:ext uri="{0D108BD9-81ED-4DB2-BD59-A6C34878D82A}">
+                    <a16:rowId xmlns:a16="http://schemas.microsoft.com/office/drawing/2014/main" val="483060118"/>
+                  </a:ext>
+                </a:extLst>
+              </a:tr>
+              <a:tr h="395257">
+                <a:tc>
+                  <a:txBody>
+                    <a:bodyPr/>
+                    <a:lstStyle/>
+                    <a:p>
+                      <a:pPr latinLnBrk="1"/>
+                      <a:r>
+                        <a:rPr lang="en-US" altLang="ko-KR" sz="1200"/>
+                        <a:t>rows</a:t>
+                      </a:r>
+                      <a:endParaRPr lang="ko-KR" altLang="en-US" sz="1200"/>
+                    </a:p>
+                  </a:txBody>
+                  <a:tcPr anchor="ctr"/>
+                </a:tc>
+                <a:tc>
+                  <a:txBody>
+                    <a:bodyPr/>
+                    <a:lstStyle/>
+                    <a:p>
+                      <a:pPr latinLnBrk="1"/>
+                      <a:r>
+                        <a:rPr lang="en-US" altLang="ko-KR" sz="1200"/>
+                        <a:t>array</a:t>
+                      </a:r>
+                      <a:endParaRPr lang="ko-KR" altLang="en-US" sz="1200"/>
+                    </a:p>
+                  </a:txBody>
+                  <a:tcPr anchor="ctr"/>
+                </a:tc>
+                <a:tc>
+                  <a:txBody>
+                    <a:bodyPr/>
+                    <a:lstStyle/>
+                    <a:p>
+                      <a:pPr latinLnBrk="1"/>
+                      <a:r>
+                        <a:rPr lang="en-US" altLang="ko-KR" sz="1200"/>
+                        <a:t>[]</a:t>
+                      </a:r>
+                      <a:endParaRPr lang="ko-KR" altLang="en-US" sz="1200"/>
+                    </a:p>
+                  </a:txBody>
+                  <a:tcPr anchor="ctr"/>
+                </a:tc>
+                <a:tc>
+                  <a:txBody>
+                    <a:bodyPr/>
+                    <a:lstStyle/>
+                    <a:p>
+                      <a:pPr latinLnBrk="1"/>
+                      <a:r>
+                        <a:rPr lang="ko-KR" altLang="en-US" sz="1200"/>
+                        <a:t>테이블 조회</a:t>
+                      </a:r>
+                    </a:p>
+                  </a:txBody>
+                  <a:tcPr anchor="ctr"/>
+                </a:tc>
+                <a:tc>
+                  <a:txBody>
+                    <a:bodyPr/>
+                    <a:lstStyle/>
+                    <a:p>
+                      <a:pPr latinLnBrk="1"/>
+                      <a:endParaRPr lang="ko-KR" altLang="en-US" sz="1200"/>
+                    </a:p>
+                  </a:txBody>
+                  <a:tcPr anchor="ctr"/>
+                </a:tc>
+                <a:extLst>
+                  <a:ext uri="{0D108BD9-81ED-4DB2-BD59-A6C34878D82A}">
+                    <a16:rowId xmlns:a16="http://schemas.microsoft.com/office/drawing/2014/main" val="35182609"/>
+                  </a:ext>
+                </a:extLst>
+              </a:tr>
+              <a:tr h="318565">
+                <a:tc>
+                  <a:txBody>
+                    <a:bodyPr/>
+                    <a:lstStyle/>
+                    <a:p>
+                      <a:pPr latinLnBrk="1"/>
+                      <a:r>
+                        <a:rPr lang="en-US" altLang="ko-KR" sz="1200"/>
+                        <a:t>selectedRow</a:t>
+                      </a:r>
+                      <a:endParaRPr lang="ko-KR" altLang="en-US" sz="1200"/>
+                    </a:p>
+                  </a:txBody>
+                  <a:tcPr anchor="ctr"/>
+                </a:tc>
+                <a:tc>
+                  <a:txBody>
+                    <a:bodyPr/>
+                    <a:lstStyle/>
+                    <a:p>
+                      <a:pPr latinLnBrk="1"/>
+                      <a:r>
+                        <a:rPr lang="en-US" altLang="ko-KR" sz="1200"/>
+                        <a:t>null</a:t>
+                      </a:r>
+                      <a:endParaRPr lang="ko-KR" altLang="en-US" sz="1200"/>
+                    </a:p>
+                  </a:txBody>
+                  <a:tcPr anchor="ctr"/>
+                </a:tc>
+                <a:tc>
+                  <a:txBody>
+                    <a:bodyPr/>
+                    <a:lstStyle/>
+                    <a:p>
+                      <a:pPr latinLnBrk="1"/>
+                      <a:r>
+                        <a:rPr lang="en-US" altLang="ko-KR" sz="1200"/>
+                        <a:t>null</a:t>
+                      </a:r>
+                      <a:endParaRPr lang="ko-KR" altLang="en-US" sz="1200"/>
+                    </a:p>
+                  </a:txBody>
+                  <a:tcPr anchor="ctr"/>
+                </a:tc>
+                <a:tc>
+                  <a:txBody>
+                    <a:bodyPr/>
+                    <a:lstStyle/>
+                    <a:p>
+                      <a:pPr latinLnBrk="1"/>
+                      <a:r>
+                        <a:rPr lang="ko-KR" altLang="en-US" sz="1200"/>
+                        <a:t>테이블 선택</a:t>
+                      </a:r>
+                    </a:p>
+                  </a:txBody>
+                  <a:tcPr anchor="ctr"/>
+                </a:tc>
+                <a:tc>
+                  <a:txBody>
+                    <a:bodyPr/>
+                    <a:lstStyle/>
+                    <a:p>
+                      <a:pPr latinLnBrk="1"/>
+                      <a:endParaRPr lang="ko-KR" altLang="en-US" sz="1200"/>
+                    </a:p>
+                  </a:txBody>
+                  <a:tcPr anchor="ctr"/>
+                </a:tc>
+                <a:extLst>
+                  <a:ext uri="{0D108BD9-81ED-4DB2-BD59-A6C34878D82A}">
+                    <a16:rowId xmlns:a16="http://schemas.microsoft.com/office/drawing/2014/main" val="1976134385"/>
+                  </a:ext>
+                </a:extLst>
+              </a:tr>
+              <a:tr h="430653">
+                <a:tc>
+                  <a:txBody>
+                    <a:bodyPr/>
+                    <a:lstStyle/>
+                    <a:p>
+                      <a:pPr latinLnBrk="1"/>
+                      <a:r>
+                        <a:rPr lang="en-US" altLang="ko-KR" sz="1200"/>
+                        <a:t>loading</a:t>
+                      </a:r>
+                      <a:endParaRPr lang="ko-KR" altLang="en-US" sz="1200"/>
+                    </a:p>
+                  </a:txBody>
+                  <a:tcPr anchor="ctr"/>
+                </a:tc>
+                <a:tc>
+                  <a:txBody>
+                    <a:bodyPr/>
+                    <a:lstStyle/>
+                    <a:p>
+                      <a:pPr latinLnBrk="1"/>
+                      <a:r>
+                        <a:rPr lang="en-US" altLang="ko-KR" sz="1200"/>
+                        <a:t>boolean</a:t>
+                      </a:r>
+                      <a:endParaRPr lang="ko-KR" altLang="en-US" sz="1200"/>
+                    </a:p>
+                  </a:txBody>
+                  <a:tcPr anchor="ctr"/>
+                </a:tc>
+                <a:tc>
+                  <a:txBody>
+                    <a:bodyPr/>
+                    <a:lstStyle/>
+                    <a:p>
+                      <a:pPr latinLnBrk="1"/>
+                      <a:r>
+                        <a:rPr lang="en-US" altLang="ko-KR" sz="1200"/>
+                        <a:t>False</a:t>
+                      </a:r>
+                      <a:endParaRPr lang="ko-KR" altLang="en-US" sz="1200"/>
+                    </a:p>
+                  </a:txBody>
+                  <a:tcPr anchor="ctr"/>
+                </a:tc>
+                <a:tc>
+                  <a:txBody>
+                    <a:bodyPr/>
+                    <a:lstStyle/>
+                    <a:p>
+                      <a:pPr latinLnBrk="1"/>
+                      <a:endParaRPr lang="ko-KR" altLang="en-US" sz="1200"/>
+                    </a:p>
+                  </a:txBody>
+                  <a:tcPr anchor="ctr"/>
+                </a:tc>
+                <a:tc>
+                  <a:txBody>
+                    <a:bodyPr/>
+                    <a:lstStyle/>
+                    <a:p>
+                      <a:pPr latinLnBrk="1"/>
+                      <a:endParaRPr lang="ko-KR" altLang="en-US" sz="1200"/>
+                    </a:p>
+                  </a:txBody>
+                  <a:tcPr anchor="ctr"/>
+                </a:tc>
+                <a:extLst>
+                  <a:ext uri="{0D108BD9-81ED-4DB2-BD59-A6C34878D82A}">
+                    <a16:rowId xmlns:a16="http://schemas.microsoft.com/office/drawing/2014/main" val="3465136426"/>
+                  </a:ext>
+                </a:extLst>
+              </a:tr>
+              <a:tr h="265470">
+                <a:tc>
+                  <a:txBody>
+                    <a:bodyPr/>
+                    <a:lstStyle/>
+                    <a:p>
+                      <a:pPr latinLnBrk="1"/>
+                      <a:r>
+                        <a:rPr lang="en-US" altLang="ko-KR" sz="1200"/>
+                        <a:t>entity</a:t>
+                      </a:r>
+                      <a:endParaRPr lang="ko-KR" altLang="en-US" sz="1200"/>
+                    </a:p>
+                  </a:txBody>
+                  <a:tcPr anchor="ctr"/>
+                </a:tc>
+                <a:tc>
+                  <a:txBody>
+                    <a:bodyPr/>
+                    <a:lstStyle/>
+                    <a:p>
+                      <a:pPr latinLnBrk="1"/>
+                      <a:r>
+                        <a:rPr lang="en-US" altLang="ko-KR" sz="1200"/>
+                        <a:t>object</a:t>
+                      </a:r>
+                      <a:endParaRPr lang="ko-KR" altLang="en-US" sz="1200"/>
+                    </a:p>
+                  </a:txBody>
+                  <a:tcPr anchor="ctr"/>
+                </a:tc>
+                <a:tc>
+                  <a:txBody>
+                    <a:bodyPr/>
+                    <a:lstStyle/>
+                    <a:p>
+                      <a:pPr latinLnBrk="1"/>
+                      <a:r>
+                        <a:rPr lang="en-US" altLang="ko-KR" sz="1200"/>
+                        <a:t>{}</a:t>
+                      </a:r>
+                      <a:endParaRPr lang="ko-KR" altLang="en-US" sz="1200"/>
+                    </a:p>
+                  </a:txBody>
+                  <a:tcPr anchor="ctr"/>
+                </a:tc>
+                <a:tc>
+                  <a:txBody>
+                    <a:bodyPr/>
+                    <a:lstStyle/>
+                    <a:p>
+                      <a:pPr latinLnBrk="1"/>
+                      <a:endParaRPr lang="ko-KR" altLang="en-US" sz="1200"/>
+                    </a:p>
+                  </a:txBody>
+                  <a:tcPr anchor="ctr"/>
+                </a:tc>
+                <a:tc>
+                  <a:txBody>
+                    <a:bodyPr/>
+                    <a:lstStyle/>
+                    <a:p>
+                      <a:pPr latinLnBrk="1"/>
+                      <a:endParaRPr lang="ko-KR" altLang="en-US" sz="1200"/>
+                    </a:p>
+                  </a:txBody>
+                  <a:tcPr anchor="ctr"/>
+                </a:tc>
+                <a:extLst>
+                  <a:ext uri="{0D108BD9-81ED-4DB2-BD59-A6C34878D82A}">
+                    <a16:rowId xmlns:a16="http://schemas.microsoft.com/office/drawing/2014/main" val="567768611"/>
+                  </a:ext>
+                </a:extLst>
+              </a:tr>
+              <a:tr h="345111">
+                <a:tc>
+                  <a:txBody>
+                    <a:bodyPr/>
+                    <a:lstStyle/>
+                    <a:p>
+                      <a:pPr latinLnBrk="1"/>
+                      <a:endParaRPr lang="ko-KR" altLang="en-US" sz="1200"/>
+                    </a:p>
+                  </a:txBody>
+                  <a:tcPr anchor="ctr"/>
+                </a:tc>
+                <a:tc>
+                  <a:txBody>
+                    <a:bodyPr/>
+                    <a:lstStyle/>
+                    <a:p>
+                      <a:pPr latinLnBrk="1"/>
+                      <a:endParaRPr lang="ko-KR" altLang="en-US" sz="1200"/>
+                    </a:p>
+                  </a:txBody>
+                  <a:tcPr anchor="ctr"/>
+                </a:tc>
+                <a:tc>
+                  <a:txBody>
+                    <a:bodyPr/>
+                    <a:lstStyle/>
+                    <a:p>
+                      <a:pPr latinLnBrk="1"/>
+                      <a:endParaRPr lang="ko-KR" altLang="en-US" sz="1200"/>
+                    </a:p>
+                  </a:txBody>
+                  <a:tcPr anchor="ctr"/>
+                </a:tc>
+                <a:tc>
+                  <a:txBody>
+                    <a:bodyPr/>
+                    <a:lstStyle/>
+                    <a:p>
+                      <a:pPr latinLnBrk="1"/>
+                      <a:endParaRPr lang="ko-KR" altLang="en-US" sz="1200"/>
+                    </a:p>
+                  </a:txBody>
+                  <a:tcPr anchor="ctr"/>
+                </a:tc>
+                <a:tc>
+                  <a:txBody>
+                    <a:bodyPr/>
+                    <a:lstStyle/>
+                    <a:p>
+                      <a:pPr latinLnBrk="1"/>
+                      <a:endParaRPr lang="ko-KR" altLang="en-US" sz="1200"/>
+                    </a:p>
+                  </a:txBody>
+                  <a:tcPr anchor="ctr"/>
+                </a:tc>
+                <a:extLst>
+                  <a:ext uri="{0D108BD9-81ED-4DB2-BD59-A6C34878D82A}">
+                    <a16:rowId xmlns:a16="http://schemas.microsoft.com/office/drawing/2014/main" val="1798177035"/>
+                  </a:ext>
+                </a:extLst>
+              </a:tr>
+            </a:tbl>
+          </a:graphicData>
+        </a:graphic>
+      </p:graphicFrame>
+      <p:sp>
+        <p:nvSpPr>
+          <p:cNvPr id="54" name="TextBox 53">
+            <a:extLst>
+              <a:ext uri="{FF2B5EF4-FFF2-40B4-BE49-F238E27FC236}">
+                <a16:creationId xmlns:a16="http://schemas.microsoft.com/office/drawing/2014/main" id="{2C1F8A86-FEC7-CE90-892A-C7BFFBDD5913}"/>
+              </a:ext>
+            </a:extLst>
+          </p:cNvPr>
+          <p:cNvSpPr txBox="1"/>
+          <p:nvPr/>
+        </p:nvSpPr>
+        <p:spPr>
+          <a:xfrm>
+            <a:off x="5798708" y="706262"/>
+            <a:ext cx="1794433" cy="307777"/>
+          </a:xfrm>
+          <a:prstGeom prst="rect">
+            <a:avLst/>
+          </a:prstGeom>
+          <a:noFill/>
+        </p:spPr>
+        <p:txBody>
+          <a:bodyPr wrap="square" rtlCol="0">
+            <a:spAutoFit/>
+          </a:bodyPr>
+          <a:lstStyle/>
+          <a:p>
+            <a:r>
+              <a:rPr lang="en-US" altLang="ko-KR" sz="1400"/>
+              <a:t>State</a:t>
+            </a:r>
+            <a:endParaRPr lang="ko-KR" altLang="en-US" sz="1400"/>
+          </a:p>
+        </p:txBody>
+      </p:sp>
+      <p:sp>
+        <p:nvSpPr>
+          <p:cNvPr id="55" name="사각형: 둥근 모서리 54">
+            <a:extLst>
+              <a:ext uri="{FF2B5EF4-FFF2-40B4-BE49-F238E27FC236}">
+                <a16:creationId xmlns:a16="http://schemas.microsoft.com/office/drawing/2014/main" id="{3F132015-B703-B67F-32AC-24A8B2AD1A3A}"/>
+              </a:ext>
+            </a:extLst>
+          </p:cNvPr>
+          <p:cNvSpPr/>
+          <p:nvPr/>
+        </p:nvSpPr>
+        <p:spPr>
+          <a:xfrm>
+            <a:off x="10519357" y="803384"/>
+            <a:ext cx="666045" cy="249037"/>
+          </a:xfrm>
+          <a:prstGeom prst="roundRect">
+            <a:avLst/>
+          </a:prstGeom>
+          <a:solidFill>
+            <a:srgbClr val="0070C0"/>
+          </a:solidFill>
+          <a:ln w="3175">
+            <a:solidFill>
+              <a:schemeClr val="bg1">
+                <a:lumMod val="75000"/>
+              </a:schemeClr>
+            </a:solidFill>
+          </a:ln>
+        </p:spPr>
+        <p:style>
+          <a:lnRef idx="2">
+            <a:schemeClr val="accent1">
+              <a:shade val="15000"/>
+            </a:schemeClr>
+          </a:lnRef>
+          <a:fillRef idx="1">
+            <a:schemeClr val="accent1"/>
+          </a:fillRef>
+          <a:effectRef idx="0">
+            <a:schemeClr val="accent1"/>
+          </a:effectRef>
+          <a:fontRef idx="minor">
+            <a:schemeClr val="lt1"/>
+          </a:fontRef>
+        </p:style>
+        <p:txBody>
+          <a:bodyPr lIns="0" tIns="0" rIns="0" bIns="0" rtlCol="0" anchor="ctr"/>
+          <a:lstStyle/>
+          <a:p>
+            <a:pPr algn="ctr"/>
+            <a:r>
+              <a:rPr lang="en-US" altLang="ko-KR" sz="1200"/>
+              <a:t>+ </a:t>
+            </a:r>
+            <a:r>
+              <a:rPr lang="ko-KR" altLang="en-US" sz="1200"/>
+              <a:t>추가</a:t>
+            </a:r>
+          </a:p>
+        </p:txBody>
+      </p:sp>
+      <p:pic>
+        <p:nvPicPr>
+          <p:cNvPr id="57" name="그림 56">
+            <a:extLst>
+              <a:ext uri="{FF2B5EF4-FFF2-40B4-BE49-F238E27FC236}">
+                <a16:creationId xmlns:a16="http://schemas.microsoft.com/office/drawing/2014/main" id="{2A9D14DE-78F0-9187-FFE0-58B9E3178351}"/>
+              </a:ext>
+            </a:extLst>
+          </p:cNvPr>
+          <p:cNvPicPr>
+            <a:picLocks noChangeAspect="1"/>
+          </p:cNvPicPr>
+          <p:nvPr/>
+        </p:nvPicPr>
+        <p:blipFill>
+          <a:blip r:embed="rId2"/>
+          <a:stretch>
+            <a:fillRect/>
+          </a:stretch>
+        </p:blipFill>
+        <p:spPr>
+          <a:xfrm>
+            <a:off x="10776213" y="1545793"/>
+            <a:ext cx="209524" cy="309297"/>
+          </a:xfrm>
+          <a:prstGeom prst="rect">
+            <a:avLst/>
+          </a:prstGeom>
+        </p:spPr>
+      </p:pic>
+      <p:pic>
+        <p:nvPicPr>
+          <p:cNvPr id="58" name="그림 57">
+            <a:extLst>
+              <a:ext uri="{FF2B5EF4-FFF2-40B4-BE49-F238E27FC236}">
+                <a16:creationId xmlns:a16="http://schemas.microsoft.com/office/drawing/2014/main" id="{76F9F044-8A20-F17B-BD6F-6F9A31F24351}"/>
+              </a:ext>
+            </a:extLst>
+          </p:cNvPr>
+          <p:cNvPicPr>
+            <a:picLocks noChangeAspect="1"/>
+          </p:cNvPicPr>
+          <p:nvPr/>
+        </p:nvPicPr>
+        <p:blipFill>
+          <a:blip r:embed="rId2"/>
+          <a:stretch>
+            <a:fillRect/>
+          </a:stretch>
+        </p:blipFill>
+        <p:spPr>
+          <a:xfrm>
+            <a:off x="10776213" y="1904827"/>
+            <a:ext cx="209524" cy="309297"/>
+          </a:xfrm>
+          <a:prstGeom prst="rect">
+            <a:avLst/>
+          </a:prstGeom>
+        </p:spPr>
+      </p:pic>
+      <p:pic>
+        <p:nvPicPr>
+          <p:cNvPr id="59" name="그림 58">
+            <a:extLst>
+              <a:ext uri="{FF2B5EF4-FFF2-40B4-BE49-F238E27FC236}">
+                <a16:creationId xmlns:a16="http://schemas.microsoft.com/office/drawing/2014/main" id="{C1802585-1A53-FF95-AD83-9C2274440A38}"/>
+              </a:ext>
+            </a:extLst>
+          </p:cNvPr>
+          <p:cNvPicPr>
+            <a:picLocks noChangeAspect="1"/>
+          </p:cNvPicPr>
+          <p:nvPr/>
+        </p:nvPicPr>
+        <p:blipFill>
+          <a:blip r:embed="rId2"/>
+          <a:stretch>
+            <a:fillRect/>
+          </a:stretch>
+        </p:blipFill>
+        <p:spPr>
+          <a:xfrm>
+            <a:off x="10776213" y="2293403"/>
+            <a:ext cx="209524" cy="309297"/>
+          </a:xfrm>
+          <a:prstGeom prst="rect">
+            <a:avLst/>
+          </a:prstGeom>
+        </p:spPr>
+      </p:pic>
+      <p:pic>
+        <p:nvPicPr>
+          <p:cNvPr id="60" name="그림 59">
+            <a:extLst>
+              <a:ext uri="{FF2B5EF4-FFF2-40B4-BE49-F238E27FC236}">
+                <a16:creationId xmlns:a16="http://schemas.microsoft.com/office/drawing/2014/main" id="{4A64A1EA-38DE-199F-A636-317F6B778489}"/>
+              </a:ext>
+            </a:extLst>
+          </p:cNvPr>
+          <p:cNvPicPr>
+            <a:picLocks noChangeAspect="1"/>
+          </p:cNvPicPr>
+          <p:nvPr/>
+        </p:nvPicPr>
+        <p:blipFill>
+          <a:blip r:embed="rId2"/>
+          <a:stretch>
+            <a:fillRect/>
+          </a:stretch>
+        </p:blipFill>
+        <p:spPr>
+          <a:xfrm>
+            <a:off x="10776213" y="2667589"/>
+            <a:ext cx="209524" cy="309297"/>
+          </a:xfrm>
+          <a:prstGeom prst="rect">
+            <a:avLst/>
+          </a:prstGeom>
+        </p:spPr>
+      </p:pic>
+      <p:sp>
+        <p:nvSpPr>
+          <p:cNvPr id="61" name="TextBox 60">
+            <a:extLst>
+              <a:ext uri="{FF2B5EF4-FFF2-40B4-BE49-F238E27FC236}">
+                <a16:creationId xmlns:a16="http://schemas.microsoft.com/office/drawing/2014/main" id="{301198DE-94E2-CBD8-E2BE-AEAD5C5049E7}"/>
+              </a:ext>
+            </a:extLst>
+          </p:cNvPr>
+          <p:cNvSpPr txBox="1"/>
+          <p:nvPr/>
+        </p:nvSpPr>
+        <p:spPr>
+          <a:xfrm>
+            <a:off x="711648" y="2479608"/>
+            <a:ext cx="1494958" cy="253916"/>
+          </a:xfrm>
+          <a:prstGeom prst="rect">
+            <a:avLst/>
+          </a:prstGeom>
+          <a:noFill/>
+        </p:spPr>
+        <p:txBody>
+          <a:bodyPr wrap="square" rtlCol="0">
+            <a:spAutoFit/>
+          </a:bodyPr>
+          <a:lstStyle/>
+          <a:p>
+            <a:r>
+              <a:rPr lang="en-US" altLang="ko-KR" sz="1050"/>
+              <a:t>rows  - array</a:t>
+            </a:r>
+            <a:endParaRPr lang="ko-KR" altLang="en-US" sz="1050"/>
+          </a:p>
+        </p:txBody>
+      </p:sp>
+      <p:sp>
+        <p:nvSpPr>
+          <p:cNvPr id="62" name="TextBox 61">
+            <a:extLst>
+              <a:ext uri="{FF2B5EF4-FFF2-40B4-BE49-F238E27FC236}">
+                <a16:creationId xmlns:a16="http://schemas.microsoft.com/office/drawing/2014/main" id="{1E25578C-412C-A9B3-68E2-BE7ECEFC7F98}"/>
+              </a:ext>
+            </a:extLst>
+          </p:cNvPr>
+          <p:cNvSpPr txBox="1"/>
+          <p:nvPr/>
+        </p:nvSpPr>
+        <p:spPr>
+          <a:xfrm>
+            <a:off x="711648" y="2731922"/>
+            <a:ext cx="1494958" cy="253916"/>
+          </a:xfrm>
+          <a:prstGeom prst="rect">
+            <a:avLst/>
+          </a:prstGeom>
+          <a:noFill/>
+        </p:spPr>
+        <p:txBody>
+          <a:bodyPr wrap="square" rtlCol="0">
+            <a:spAutoFit/>
+          </a:bodyPr>
+          <a:lstStyle/>
+          <a:p>
+            <a:r>
+              <a:rPr lang="en-US" altLang="ko-KR" sz="1050"/>
+              <a:t>selectedRow  - null</a:t>
+            </a:r>
+            <a:endParaRPr lang="ko-KR" altLang="en-US" sz="1050"/>
+          </a:p>
+        </p:txBody>
+      </p:sp>
+      <p:sp>
+        <p:nvSpPr>
+          <p:cNvPr id="65" name="TextBox 64">
+            <a:extLst>
+              <a:ext uri="{FF2B5EF4-FFF2-40B4-BE49-F238E27FC236}">
+                <a16:creationId xmlns:a16="http://schemas.microsoft.com/office/drawing/2014/main" id="{8D51B060-6637-3B37-B3B5-E27EC2736F6C}"/>
+              </a:ext>
+            </a:extLst>
+          </p:cNvPr>
+          <p:cNvSpPr txBox="1"/>
+          <p:nvPr/>
+        </p:nvSpPr>
+        <p:spPr>
+          <a:xfrm>
+            <a:off x="711648" y="2973941"/>
+            <a:ext cx="1494958" cy="253916"/>
+          </a:xfrm>
+          <a:prstGeom prst="rect">
+            <a:avLst/>
+          </a:prstGeom>
+          <a:noFill/>
+        </p:spPr>
+        <p:txBody>
+          <a:bodyPr wrap="square" rtlCol="0">
+            <a:spAutoFit/>
+          </a:bodyPr>
+          <a:lstStyle/>
+          <a:p>
+            <a:r>
+              <a:rPr lang="en-US" altLang="ko-KR" sz="1050"/>
+              <a:t>loading  - boolean</a:t>
+            </a:r>
+            <a:endParaRPr lang="ko-KR" altLang="en-US" sz="1050"/>
+          </a:p>
+        </p:txBody>
+      </p:sp>
+      <p:sp>
+        <p:nvSpPr>
+          <p:cNvPr id="66" name="TextBox 65">
+            <a:extLst>
+              <a:ext uri="{FF2B5EF4-FFF2-40B4-BE49-F238E27FC236}">
+                <a16:creationId xmlns:a16="http://schemas.microsoft.com/office/drawing/2014/main" id="{4CEC6716-A87E-7EEC-BBA0-41706112858C}"/>
+              </a:ext>
+            </a:extLst>
+          </p:cNvPr>
+          <p:cNvSpPr txBox="1"/>
+          <p:nvPr/>
+        </p:nvSpPr>
+        <p:spPr>
+          <a:xfrm>
+            <a:off x="542313" y="3244473"/>
+            <a:ext cx="1494958" cy="253916"/>
+          </a:xfrm>
+          <a:prstGeom prst="rect">
+            <a:avLst/>
+          </a:prstGeom>
+          <a:noFill/>
+        </p:spPr>
+        <p:txBody>
+          <a:bodyPr wrap="square" rtlCol="0">
+            <a:spAutoFit/>
+          </a:bodyPr>
+          <a:lstStyle/>
+          <a:p>
+            <a:r>
+              <a:rPr lang="en-US" altLang="ko-KR" sz="1050"/>
+              <a:t>+ entiry - object</a:t>
+            </a:r>
+            <a:endParaRPr lang="ko-KR" altLang="en-US" sz="1050"/>
+          </a:p>
+        </p:txBody>
+      </p:sp>
+      <p:cxnSp>
+        <p:nvCxnSpPr>
+          <p:cNvPr id="68" name="직선 연결선 67">
+            <a:extLst>
+              <a:ext uri="{FF2B5EF4-FFF2-40B4-BE49-F238E27FC236}">
+                <a16:creationId xmlns:a16="http://schemas.microsoft.com/office/drawing/2014/main" id="{A7BB394E-CF4D-7CEF-B224-578E60A61364}"/>
+              </a:ext>
+            </a:extLst>
+          </p:cNvPr>
+          <p:cNvCxnSpPr>
+            <a:cxnSpLocks/>
+          </p:cNvCxnSpPr>
+          <p:nvPr/>
+        </p:nvCxnSpPr>
+        <p:spPr>
+          <a:xfrm>
+            <a:off x="626533" y="2492173"/>
+            <a:ext cx="0" cy="735684"/>
+          </a:xfrm>
+          <a:prstGeom prst="line">
+            <a:avLst/>
+          </a:prstGeom>
+          <a:ln w="3175">
+            <a:solidFill>
+              <a:schemeClr val="tx1">
+                <a:lumMod val="65000"/>
+                <a:lumOff val="35000"/>
+              </a:schemeClr>
+            </a:solidFill>
+          </a:ln>
+        </p:spPr>
+        <p:style>
+          <a:lnRef idx="2">
+            <a:schemeClr val="accent1"/>
+          </a:lnRef>
+          <a:fillRef idx="0">
+            <a:schemeClr val="accent1"/>
+          </a:fillRef>
+          <a:effectRef idx="1">
+            <a:schemeClr val="accent1"/>
+          </a:effectRef>
+          <a:fontRef idx="minor">
+            <a:schemeClr val="tx1"/>
+          </a:fontRef>
+        </p:style>
+      </p:cxnSp>
+      <p:cxnSp>
+        <p:nvCxnSpPr>
+          <p:cNvPr id="71" name="직선 연결선 70">
+            <a:extLst>
+              <a:ext uri="{FF2B5EF4-FFF2-40B4-BE49-F238E27FC236}">
+                <a16:creationId xmlns:a16="http://schemas.microsoft.com/office/drawing/2014/main" id="{0EB1EB24-B2EB-980A-8C28-94F6FCB18C74}"/>
+              </a:ext>
+            </a:extLst>
+          </p:cNvPr>
+          <p:cNvCxnSpPr>
+            <a:cxnSpLocks/>
+          </p:cNvCxnSpPr>
+          <p:nvPr/>
+        </p:nvCxnSpPr>
+        <p:spPr>
+          <a:xfrm>
+            <a:off x="888999" y="3542087"/>
+            <a:ext cx="0" cy="444808"/>
+          </a:xfrm>
+          <a:prstGeom prst="line">
+            <a:avLst/>
+          </a:prstGeom>
+          <a:ln w="3175">
+            <a:solidFill>
+              <a:schemeClr val="tx1">
+                <a:lumMod val="65000"/>
+                <a:lumOff val="35000"/>
+              </a:schemeClr>
+            </a:solidFill>
+          </a:ln>
+        </p:spPr>
+        <p:style>
+          <a:lnRef idx="2">
+            <a:schemeClr val="accent1"/>
+          </a:lnRef>
+          <a:fillRef idx="0">
+            <a:schemeClr val="accent1"/>
+          </a:fillRef>
+          <a:effectRef idx="1">
+            <a:schemeClr val="accent1"/>
+          </a:effectRef>
+          <a:fontRef idx="minor">
+            <a:schemeClr val="tx1"/>
+          </a:fontRef>
+        </p:style>
+      </p:cxnSp>
+      <p:sp>
+        <p:nvSpPr>
+          <p:cNvPr id="73" name="TextBox 72">
+            <a:extLst>
+              <a:ext uri="{FF2B5EF4-FFF2-40B4-BE49-F238E27FC236}">
+                <a16:creationId xmlns:a16="http://schemas.microsoft.com/office/drawing/2014/main" id="{CAF850AD-ABA0-1ED0-0236-70F10B50908F}"/>
+              </a:ext>
+            </a:extLst>
+          </p:cNvPr>
+          <p:cNvSpPr txBox="1"/>
+          <p:nvPr/>
+        </p:nvSpPr>
+        <p:spPr>
+          <a:xfrm>
+            <a:off x="961415" y="3790315"/>
+            <a:ext cx="1494958" cy="253916"/>
+          </a:xfrm>
+          <a:prstGeom prst="rect">
+            <a:avLst/>
+          </a:prstGeom>
+          <a:noFill/>
+        </p:spPr>
+        <p:txBody>
+          <a:bodyPr wrap="square" rtlCol="0">
+            <a:spAutoFit/>
+          </a:bodyPr>
+          <a:lstStyle/>
+          <a:p>
+            <a:r>
+              <a:rPr lang="en-US" altLang="ko-KR" sz="1050"/>
+              <a:t>name  - null</a:t>
+            </a:r>
+            <a:endParaRPr lang="ko-KR" altLang="en-US" sz="1050"/>
+          </a:p>
+        </p:txBody>
+      </p:sp>
+      <p:sp>
+        <p:nvSpPr>
+          <p:cNvPr id="74" name="TextBox 73">
+            <a:extLst>
+              <a:ext uri="{FF2B5EF4-FFF2-40B4-BE49-F238E27FC236}">
+                <a16:creationId xmlns:a16="http://schemas.microsoft.com/office/drawing/2014/main" id="{3F7CC8E1-5C64-43CB-FC0B-EF3DF1E56B58}"/>
+              </a:ext>
+            </a:extLst>
+          </p:cNvPr>
+          <p:cNvSpPr txBox="1"/>
+          <p:nvPr/>
+        </p:nvSpPr>
+        <p:spPr>
+          <a:xfrm>
+            <a:off x="961415" y="3533660"/>
+            <a:ext cx="1494958" cy="253916"/>
+          </a:xfrm>
+          <a:prstGeom prst="rect">
+            <a:avLst/>
+          </a:prstGeom>
+          <a:noFill/>
+        </p:spPr>
+        <p:txBody>
+          <a:bodyPr wrap="square" rtlCol="0">
+            <a:spAutoFit/>
+          </a:bodyPr>
+          <a:lstStyle/>
+          <a:p>
+            <a:r>
+              <a:rPr lang="en-US" altLang="ko-KR" sz="1050"/>
+              <a:t>id  - null</a:t>
+            </a:r>
+            <a:endParaRPr lang="ko-KR" altLang="en-US" sz="1050"/>
+          </a:p>
+        </p:txBody>
+      </p:sp>
+      <p:sp>
+        <p:nvSpPr>
+          <p:cNvPr id="75" name="사각형: 모서리가 접힌 도형 74">
+            <a:extLst>
+              <a:ext uri="{FF2B5EF4-FFF2-40B4-BE49-F238E27FC236}">
+                <a16:creationId xmlns:a16="http://schemas.microsoft.com/office/drawing/2014/main" id="{7A85785A-B8A9-8072-BE19-C0EA2EB90DD7}"/>
+              </a:ext>
+            </a:extLst>
+          </p:cNvPr>
+          <p:cNvSpPr/>
+          <p:nvPr/>
+        </p:nvSpPr>
+        <p:spPr>
+          <a:xfrm>
+            <a:off x="5865988" y="3534475"/>
+            <a:ext cx="1473200" cy="2298059"/>
+          </a:xfrm>
+          <a:prstGeom prst="foldedCorner">
+            <a:avLst/>
+          </a:prstGeom>
+          <a:solidFill>
+            <a:schemeClr val="bg1">
+              <a:lumMod val="95000"/>
+            </a:schemeClr>
+          </a:solidFill>
+          <a:ln w="3175">
+            <a:solidFill>
+              <a:schemeClr val="tx1">
+                <a:lumMod val="50000"/>
+                <a:lumOff val="50000"/>
+              </a:schemeClr>
+            </a:solidFill>
+          </a:ln>
+        </p:spPr>
+        <p:style>
+          <a:lnRef idx="2">
+            <a:schemeClr val="accent1">
+              <a:shade val="15000"/>
+            </a:schemeClr>
+          </a:lnRef>
+          <a:fillRef idx="1">
+            <a:schemeClr val="accent1"/>
+          </a:fillRef>
+          <a:effectRef idx="0">
+            <a:schemeClr val="accent1"/>
+          </a:effectRef>
+          <a:fontRef idx="minor">
+            <a:schemeClr val="lt1"/>
+          </a:fontRef>
+        </p:style>
+        <p:txBody>
+          <a:bodyPr rtlCol="0" anchor="ctr"/>
+          <a:lstStyle/>
+          <a:p>
+            <a:r>
+              <a:rPr lang="en-US" altLang="ko-KR" sz="1200">
+                <a:solidFill>
+                  <a:schemeClr val="tx1">
+                    <a:lumMod val="75000"/>
+                    <a:lumOff val="25000"/>
+                  </a:schemeClr>
+                </a:solidFill>
+              </a:rPr>
+              <a:t>- </a:t>
+            </a:r>
+            <a:r>
+              <a:rPr lang="ko-KR" altLang="en-US" sz="1200">
+                <a:solidFill>
+                  <a:schemeClr val="tx1">
+                    <a:lumMod val="75000"/>
+                    <a:lumOff val="25000"/>
+                  </a:schemeClr>
+                </a:solidFill>
+              </a:rPr>
+              <a:t>설명</a:t>
+            </a:r>
+            <a:endParaRPr lang="en-US" altLang="ko-KR" sz="1200">
+              <a:solidFill>
+                <a:schemeClr val="tx1">
+                  <a:lumMod val="75000"/>
+                  <a:lumOff val="25000"/>
+                </a:schemeClr>
+              </a:solidFill>
+            </a:endParaRPr>
+          </a:p>
+          <a:p>
+            <a:r>
+              <a:rPr lang="ko-KR" altLang="en-US" sz="1200">
+                <a:solidFill>
+                  <a:schemeClr val="tx1">
+                    <a:lumMod val="75000"/>
+                    <a:lumOff val="25000"/>
+                  </a:schemeClr>
+                </a:solidFill>
+              </a:rPr>
+              <a:t>타입의 종류</a:t>
+            </a:r>
+            <a:endParaRPr lang="en-US" altLang="ko-KR" sz="1200">
+              <a:solidFill>
+                <a:schemeClr val="tx1">
+                  <a:lumMod val="75000"/>
+                  <a:lumOff val="25000"/>
+                </a:schemeClr>
+              </a:solidFill>
+            </a:endParaRPr>
+          </a:p>
+          <a:p>
+            <a:r>
+              <a:rPr lang="en-US" altLang="ko-KR" sz="1200">
+                <a:solidFill>
+                  <a:schemeClr val="tx1">
+                    <a:lumMod val="75000"/>
+                    <a:lumOff val="25000"/>
+                  </a:schemeClr>
+                </a:solidFill>
+              </a:rPr>
+              <a:t>array</a:t>
+            </a:r>
+          </a:p>
+          <a:p>
+            <a:r>
+              <a:rPr lang="en-US" altLang="ko-KR" sz="1200">
+                <a:solidFill>
+                  <a:schemeClr val="tx1">
+                    <a:lumMod val="75000"/>
+                    <a:lumOff val="25000"/>
+                  </a:schemeClr>
+                </a:solidFill>
+              </a:rPr>
+              <a:t>object</a:t>
+            </a:r>
+          </a:p>
+          <a:p>
+            <a:r>
+              <a:rPr lang="en-US" altLang="ko-KR" sz="1200">
+                <a:solidFill>
+                  <a:schemeClr val="tx1">
+                    <a:lumMod val="75000"/>
+                    <a:lumOff val="25000"/>
+                  </a:schemeClr>
+                </a:solidFill>
+              </a:rPr>
+              <a:t>string</a:t>
+            </a:r>
+          </a:p>
+          <a:p>
+            <a:r>
+              <a:rPr lang="en-US" altLang="ko-KR" sz="1200">
+                <a:solidFill>
+                  <a:schemeClr val="tx1">
+                    <a:lumMod val="75000"/>
+                    <a:lumOff val="25000"/>
+                  </a:schemeClr>
+                </a:solidFill>
+              </a:rPr>
+              <a:t>number</a:t>
+            </a:r>
+          </a:p>
+          <a:p>
+            <a:r>
+              <a:rPr lang="en-US" altLang="ko-KR" sz="1200">
+                <a:solidFill>
+                  <a:schemeClr val="tx1">
+                    <a:lumMod val="75000"/>
+                    <a:lumOff val="25000"/>
+                  </a:schemeClr>
+                </a:solidFill>
+              </a:rPr>
+              <a:t>boolean</a:t>
+            </a:r>
+          </a:p>
+          <a:p>
+            <a:r>
+              <a:rPr lang="en-US" altLang="ko-KR" sz="1200">
+                <a:solidFill>
+                  <a:schemeClr val="tx1">
+                    <a:lumMod val="75000"/>
+                    <a:lumOff val="25000"/>
+                  </a:schemeClr>
+                </a:solidFill>
+              </a:rPr>
+              <a:t>null</a:t>
+            </a:r>
+            <a:endParaRPr lang="ko-KR" altLang="en-US" sz="1200">
+              <a:solidFill>
+                <a:schemeClr val="tx1">
+                  <a:lumMod val="75000"/>
+                  <a:lumOff val="25000"/>
+                </a:schemeClr>
+              </a:solidFill>
+            </a:endParaRPr>
+          </a:p>
+        </p:txBody>
+      </p:sp>
+      <p:cxnSp>
+        <p:nvCxnSpPr>
+          <p:cNvPr id="77" name="직선 화살표 연결선 76">
+            <a:extLst>
+              <a:ext uri="{FF2B5EF4-FFF2-40B4-BE49-F238E27FC236}">
+                <a16:creationId xmlns:a16="http://schemas.microsoft.com/office/drawing/2014/main" id="{C435E679-CDE5-C206-AEED-EE0B095CA303}"/>
+              </a:ext>
+            </a:extLst>
+          </p:cNvPr>
+          <p:cNvCxnSpPr>
+            <a:cxnSpLocks/>
+            <a:stCxn id="75" idx="0"/>
+          </p:cNvCxnSpPr>
+          <p:nvPr/>
+        </p:nvCxnSpPr>
+        <p:spPr>
+          <a:xfrm flipV="1">
+            <a:off x="6602588" y="1611708"/>
+            <a:ext cx="666253" cy="1922767"/>
+          </a:xfrm>
+          <a:prstGeom prst="straightConnector1">
+            <a:avLst/>
+          </a:prstGeom>
+          <a:ln>
+            <a:solidFill>
+              <a:schemeClr val="tx1">
+                <a:lumMod val="50000"/>
+                <a:lumOff val="50000"/>
+              </a:schemeClr>
+            </a:solidFill>
+            <a:tailEnd type="triangle"/>
+          </a:ln>
+        </p:spPr>
+        <p:style>
+          <a:lnRef idx="2">
+            <a:schemeClr val="accent1"/>
+          </a:lnRef>
+          <a:fillRef idx="0">
+            <a:schemeClr val="accent1"/>
+          </a:fillRef>
+          <a:effectRef idx="1">
+            <a:schemeClr val="accent1"/>
+          </a:effectRef>
+          <a:fontRef idx="minor">
+            <a:schemeClr val="tx1"/>
+          </a:fontRef>
+        </p:style>
+      </p:cxnSp>
+      <p:pic>
+        <p:nvPicPr>
+          <p:cNvPr id="81" name="그림 80">
+            <a:extLst>
+              <a:ext uri="{FF2B5EF4-FFF2-40B4-BE49-F238E27FC236}">
+                <a16:creationId xmlns:a16="http://schemas.microsoft.com/office/drawing/2014/main" id="{BD33D7C7-B9F1-D5B7-5324-3CB6D6502F7E}"/>
+              </a:ext>
+            </a:extLst>
+          </p:cNvPr>
+          <p:cNvPicPr>
+            <a:picLocks noChangeAspect="1"/>
+          </p:cNvPicPr>
+          <p:nvPr/>
+        </p:nvPicPr>
+        <p:blipFill>
+          <a:blip r:embed="rId2"/>
+          <a:stretch>
+            <a:fillRect/>
+          </a:stretch>
+        </p:blipFill>
+        <p:spPr>
+          <a:xfrm>
+            <a:off x="4817528" y="5068449"/>
+            <a:ext cx="209524" cy="309297"/>
+          </a:xfrm>
+          <a:prstGeom prst="rect">
+            <a:avLst/>
+          </a:prstGeom>
+        </p:spPr>
+      </p:pic>
+      <p:sp>
+        <p:nvSpPr>
+          <p:cNvPr id="82" name="TextBox 81">
+            <a:extLst>
+              <a:ext uri="{FF2B5EF4-FFF2-40B4-BE49-F238E27FC236}">
+                <a16:creationId xmlns:a16="http://schemas.microsoft.com/office/drawing/2014/main" id="{A1D1FA16-8A9C-90AB-2BFF-0C7180C09130}"/>
+              </a:ext>
+            </a:extLst>
+          </p:cNvPr>
+          <p:cNvSpPr txBox="1"/>
+          <p:nvPr/>
+        </p:nvSpPr>
+        <p:spPr>
+          <a:xfrm>
+            <a:off x="579688" y="6018648"/>
+            <a:ext cx="1343377" cy="307777"/>
+          </a:xfrm>
+          <a:prstGeom prst="rect">
+            <a:avLst/>
+          </a:prstGeom>
+          <a:noFill/>
+        </p:spPr>
+        <p:txBody>
+          <a:bodyPr wrap="square" rtlCol="0">
+            <a:spAutoFit/>
+          </a:bodyPr>
+          <a:lstStyle/>
+          <a:p>
+            <a:r>
+              <a:rPr lang="en-US" altLang="ko-KR" sz="1400"/>
+              <a:t>Actions </a:t>
+            </a:r>
+            <a:r>
+              <a:rPr lang="ko-KR" altLang="en-US" sz="1400"/>
+              <a:t>명</a:t>
+            </a:r>
+          </a:p>
+        </p:txBody>
+      </p:sp>
+      <p:sp>
+        <p:nvSpPr>
+          <p:cNvPr id="83" name="TextBox 82">
+            <a:extLst>
+              <a:ext uri="{FF2B5EF4-FFF2-40B4-BE49-F238E27FC236}">
+                <a16:creationId xmlns:a16="http://schemas.microsoft.com/office/drawing/2014/main" id="{09BBE99B-5663-919B-F70E-13F6D2F8CA54}"/>
+              </a:ext>
+            </a:extLst>
+          </p:cNvPr>
+          <p:cNvSpPr txBox="1"/>
+          <p:nvPr/>
+        </p:nvSpPr>
+        <p:spPr>
+          <a:xfrm>
+            <a:off x="2072497" y="6029795"/>
+            <a:ext cx="1019477" cy="307777"/>
+          </a:xfrm>
+          <a:prstGeom prst="rect">
+            <a:avLst/>
+          </a:prstGeom>
+          <a:noFill/>
+        </p:spPr>
+        <p:txBody>
+          <a:bodyPr wrap="square" rtlCol="0">
+            <a:spAutoFit/>
+          </a:bodyPr>
+          <a:lstStyle/>
+          <a:p>
+            <a:r>
+              <a:rPr lang="en-US" altLang="ko-KR" sz="1400"/>
+              <a:t>async</a:t>
+            </a:r>
+            <a:r>
+              <a:rPr lang="ko-KR" altLang="en-US" sz="1400"/>
+              <a:t>여부</a:t>
+            </a:r>
+          </a:p>
+        </p:txBody>
+      </p:sp>
+      <p:sp>
+        <p:nvSpPr>
+          <p:cNvPr id="84" name="사각형: 둥근 모서리 83">
+            <a:extLst>
+              <a:ext uri="{FF2B5EF4-FFF2-40B4-BE49-F238E27FC236}">
+                <a16:creationId xmlns:a16="http://schemas.microsoft.com/office/drawing/2014/main" id="{5EAB1E22-C586-76D8-96DC-3443643F7B52}"/>
+              </a:ext>
+            </a:extLst>
+          </p:cNvPr>
+          <p:cNvSpPr/>
+          <p:nvPr/>
+        </p:nvSpPr>
+        <p:spPr>
+          <a:xfrm>
+            <a:off x="1976118" y="6384847"/>
+            <a:ext cx="1290322" cy="307777"/>
+          </a:xfrm>
+          <a:prstGeom prst="roundRect">
+            <a:avLst/>
+          </a:prstGeom>
+          <a:noFill/>
+          <a:ln w="3175">
+            <a:solidFill>
+              <a:schemeClr val="bg1">
+                <a:lumMod val="50000"/>
+              </a:schemeClr>
+            </a:solidFill>
+          </a:ln>
+        </p:spPr>
+        <p:style>
+          <a:lnRef idx="2">
+            <a:schemeClr val="accent1">
+              <a:shade val="15000"/>
+            </a:schemeClr>
+          </a:lnRef>
+          <a:fillRef idx="1">
+            <a:schemeClr val="accent1"/>
+          </a:fillRef>
+          <a:effectRef idx="0">
+            <a:schemeClr val="accent1"/>
+          </a:effectRef>
+          <a:fontRef idx="minor">
+            <a:schemeClr val="lt1"/>
+          </a:fontRef>
+        </p:style>
+        <p:txBody>
+          <a:bodyPr rtlCol="0" anchor="ctr"/>
+          <a:lstStyle/>
+          <a:p>
+            <a:pPr algn="ctr"/>
+            <a:r>
+              <a:rPr lang="en-US" altLang="ko-KR" sz="1400">
+                <a:solidFill>
+                  <a:schemeClr val="tx1">
+                    <a:lumMod val="75000"/>
+                    <a:lumOff val="25000"/>
+                  </a:schemeClr>
+                </a:solidFill>
+              </a:rPr>
+              <a:t>true</a:t>
+            </a:r>
+            <a:endParaRPr lang="ko-KR" altLang="en-US" sz="1400">
+              <a:solidFill>
+                <a:schemeClr val="tx1">
+                  <a:lumMod val="75000"/>
+                  <a:lumOff val="25000"/>
+                </a:schemeClr>
+              </a:solidFill>
+            </a:endParaRPr>
+          </a:p>
+        </p:txBody>
+      </p:sp>
+      <p:sp>
+        <p:nvSpPr>
+          <p:cNvPr id="85" name="사각형: 둥근 모서리 84">
+            <a:extLst>
+              <a:ext uri="{FF2B5EF4-FFF2-40B4-BE49-F238E27FC236}">
+                <a16:creationId xmlns:a16="http://schemas.microsoft.com/office/drawing/2014/main" id="{28D418A5-2D60-3DC0-ADF0-148AFA36DA08}"/>
+              </a:ext>
+            </a:extLst>
+          </p:cNvPr>
+          <p:cNvSpPr/>
+          <p:nvPr/>
+        </p:nvSpPr>
+        <p:spPr>
+          <a:xfrm>
+            <a:off x="439701" y="6380110"/>
+            <a:ext cx="1483364" cy="307777"/>
+          </a:xfrm>
+          <a:prstGeom prst="roundRect">
+            <a:avLst/>
+          </a:prstGeom>
+          <a:noFill/>
+          <a:ln w="3175">
+            <a:solidFill>
+              <a:schemeClr val="bg1">
+                <a:lumMod val="50000"/>
+              </a:schemeClr>
+            </a:solidFill>
+          </a:ln>
+        </p:spPr>
+        <p:style>
+          <a:lnRef idx="2">
+            <a:schemeClr val="accent1">
+              <a:shade val="15000"/>
+            </a:schemeClr>
+          </a:lnRef>
+          <a:fillRef idx="1">
+            <a:schemeClr val="accent1"/>
+          </a:fillRef>
+          <a:effectRef idx="0">
+            <a:schemeClr val="accent1"/>
+          </a:effectRef>
+          <a:fontRef idx="minor">
+            <a:schemeClr val="lt1"/>
+          </a:fontRef>
+        </p:style>
+        <p:txBody>
+          <a:bodyPr rtlCol="0" anchor="ctr"/>
+          <a:lstStyle/>
+          <a:p>
+            <a:pPr algn="ctr"/>
+            <a:r>
+              <a:rPr lang="en-US" altLang="ko-KR" sz="1400">
+                <a:solidFill>
+                  <a:schemeClr val="tx1">
+                    <a:lumMod val="75000"/>
+                    <a:lumOff val="25000"/>
+                  </a:schemeClr>
+                </a:solidFill>
+              </a:rPr>
+              <a:t>setRows</a:t>
+            </a:r>
+            <a:endParaRPr lang="ko-KR" altLang="en-US" sz="1400">
+              <a:solidFill>
+                <a:schemeClr val="tx1">
+                  <a:lumMod val="75000"/>
+                  <a:lumOff val="25000"/>
+                </a:schemeClr>
+              </a:solidFill>
+            </a:endParaRPr>
+          </a:p>
+        </p:txBody>
+      </p:sp>
+      <p:pic>
+        <p:nvPicPr>
+          <p:cNvPr id="86" name="그림 85">
+            <a:extLst>
+              <a:ext uri="{FF2B5EF4-FFF2-40B4-BE49-F238E27FC236}">
+                <a16:creationId xmlns:a16="http://schemas.microsoft.com/office/drawing/2014/main" id="{DF19E63E-830B-1A5D-A06E-DAAC52590D08}"/>
+              </a:ext>
+            </a:extLst>
+          </p:cNvPr>
+          <p:cNvPicPr>
+            <a:picLocks noChangeAspect="1"/>
+          </p:cNvPicPr>
+          <p:nvPr/>
+        </p:nvPicPr>
+        <p:blipFill>
+          <a:blip r:embed="rId2"/>
+          <a:stretch>
+            <a:fillRect/>
+          </a:stretch>
+        </p:blipFill>
+        <p:spPr>
+          <a:xfrm>
+            <a:off x="4827688" y="6400940"/>
+            <a:ext cx="209524" cy="309297"/>
+          </a:xfrm>
+          <a:prstGeom prst="rect">
+            <a:avLst/>
+          </a:prstGeom>
+        </p:spPr>
+      </p:pic>
+      <p:sp>
+        <p:nvSpPr>
+          <p:cNvPr id="87" name="TextBox 86">
+            <a:extLst>
+              <a:ext uri="{FF2B5EF4-FFF2-40B4-BE49-F238E27FC236}">
+                <a16:creationId xmlns:a16="http://schemas.microsoft.com/office/drawing/2014/main" id="{2CBAD4ED-A589-C021-7D48-4FFB98E02131}"/>
+              </a:ext>
+            </a:extLst>
+          </p:cNvPr>
+          <p:cNvSpPr txBox="1"/>
+          <p:nvPr/>
+        </p:nvSpPr>
+        <p:spPr>
+          <a:xfrm>
+            <a:off x="3511306" y="6029474"/>
+            <a:ext cx="1019477" cy="307777"/>
+          </a:xfrm>
+          <a:prstGeom prst="rect">
+            <a:avLst/>
+          </a:prstGeom>
+          <a:noFill/>
+        </p:spPr>
+        <p:txBody>
+          <a:bodyPr wrap="square" rtlCol="0">
+            <a:spAutoFit/>
+          </a:bodyPr>
+          <a:lstStyle/>
+          <a:p>
+            <a:r>
+              <a:rPr lang="ko-KR" altLang="en-US" sz="1400"/>
+              <a:t>참조사항</a:t>
+            </a:r>
+          </a:p>
+        </p:txBody>
+      </p:sp>
+      <p:sp>
+        <p:nvSpPr>
+          <p:cNvPr id="88" name="사각형: 둥근 모서리 87">
+            <a:extLst>
+              <a:ext uri="{FF2B5EF4-FFF2-40B4-BE49-F238E27FC236}">
+                <a16:creationId xmlns:a16="http://schemas.microsoft.com/office/drawing/2014/main" id="{84D6C2A8-18C1-24E5-9304-7B12177826EA}"/>
+              </a:ext>
+            </a:extLst>
+          </p:cNvPr>
+          <p:cNvSpPr/>
+          <p:nvPr/>
+        </p:nvSpPr>
+        <p:spPr>
+          <a:xfrm>
+            <a:off x="3344891" y="6400988"/>
+            <a:ext cx="1290322" cy="307777"/>
+          </a:xfrm>
+          <a:prstGeom prst="roundRect">
+            <a:avLst/>
+          </a:prstGeom>
+          <a:noFill/>
+          <a:ln w="3175">
+            <a:solidFill>
+              <a:schemeClr val="bg1">
+                <a:lumMod val="50000"/>
+              </a:schemeClr>
+            </a:solidFill>
+          </a:ln>
+        </p:spPr>
+        <p:style>
+          <a:lnRef idx="2">
+            <a:schemeClr val="accent1">
+              <a:shade val="15000"/>
+            </a:schemeClr>
+          </a:lnRef>
+          <a:fillRef idx="1">
+            <a:schemeClr val="accent1"/>
+          </a:fillRef>
+          <a:effectRef idx="0">
+            <a:schemeClr val="accent1"/>
+          </a:effectRef>
+          <a:fontRef idx="minor">
+            <a:schemeClr val="lt1"/>
+          </a:fontRef>
+        </p:style>
+        <p:txBody>
+          <a:bodyPr rtlCol="0" anchor="ctr"/>
+          <a:lstStyle/>
+          <a:p>
+            <a:r>
+              <a:rPr lang="ko-KR" altLang="en-US" sz="1200">
+                <a:solidFill>
+                  <a:schemeClr val="tx1">
+                    <a:lumMod val="75000"/>
+                    <a:lumOff val="25000"/>
+                  </a:schemeClr>
+                </a:solidFill>
+              </a:rPr>
+              <a:t>테이블 추가</a:t>
+            </a:r>
+          </a:p>
+        </p:txBody>
+      </p:sp>
+      <p:sp>
+        <p:nvSpPr>
+          <p:cNvPr id="89" name="사각형: 둥근 모서리 88">
+            <a:extLst>
+              <a:ext uri="{FF2B5EF4-FFF2-40B4-BE49-F238E27FC236}">
+                <a16:creationId xmlns:a16="http://schemas.microsoft.com/office/drawing/2014/main" id="{195ECAA0-A871-671A-43D9-5BA1B508240F}"/>
+              </a:ext>
+            </a:extLst>
+          </p:cNvPr>
+          <p:cNvSpPr/>
+          <p:nvPr/>
+        </p:nvSpPr>
+        <p:spPr>
+          <a:xfrm>
+            <a:off x="412173" y="2222628"/>
+            <a:ext cx="794089" cy="273095"/>
+          </a:xfrm>
+          <a:prstGeom prst="roundRect">
+            <a:avLst/>
+          </a:prstGeom>
+          <a:noFill/>
+          <a:ln>
+            <a:solidFill>
+              <a:srgbClr val="FF0000"/>
+            </a:solidFill>
+          </a:ln>
+        </p:spPr>
+        <p:style>
+          <a:lnRef idx="2">
+            <a:schemeClr val="accent1">
+              <a:shade val="15000"/>
+            </a:schemeClr>
+          </a:lnRef>
+          <a:fillRef idx="1">
+            <a:schemeClr val="accent1"/>
+          </a:fillRef>
+          <a:effectRef idx="0">
+            <a:schemeClr val="accent1"/>
+          </a:effectRef>
+          <a:fontRef idx="minor">
+            <a:schemeClr val="lt1"/>
+          </a:fontRef>
+        </p:style>
+        <p:txBody>
+          <a:bodyPr rtlCol="0" anchor="ctr"/>
+          <a:lstStyle/>
+          <a:p>
+            <a:pPr algn="ctr"/>
+            <a:endParaRPr lang="ko-KR" altLang="en-US"/>
+          </a:p>
+        </p:txBody>
+      </p:sp>
+      <p:cxnSp>
+        <p:nvCxnSpPr>
+          <p:cNvPr id="90" name="직선 화살표 연결선 89">
+            <a:extLst>
+              <a:ext uri="{FF2B5EF4-FFF2-40B4-BE49-F238E27FC236}">
+                <a16:creationId xmlns:a16="http://schemas.microsoft.com/office/drawing/2014/main" id="{ACF8AA67-FA19-604A-38D0-11D910DC7817}"/>
+              </a:ext>
+            </a:extLst>
+          </p:cNvPr>
+          <p:cNvCxnSpPr>
+            <a:cxnSpLocks/>
+            <a:stCxn id="89" idx="3"/>
+            <a:endCxn id="54" idx="1"/>
+          </p:cNvCxnSpPr>
+          <p:nvPr/>
+        </p:nvCxnSpPr>
+        <p:spPr>
+          <a:xfrm flipV="1">
+            <a:off x="1206262" y="860151"/>
+            <a:ext cx="4592446" cy="1499025"/>
+          </a:xfrm>
+          <a:prstGeom prst="straightConnector1">
+            <a:avLst/>
+          </a:prstGeom>
+          <a:ln>
+            <a:tailEnd type="triangle"/>
+          </a:ln>
+        </p:spPr>
+        <p:style>
+          <a:lnRef idx="2">
+            <a:schemeClr val="accent1"/>
+          </a:lnRef>
+          <a:fillRef idx="0">
+            <a:schemeClr val="accent1"/>
+          </a:fillRef>
+          <a:effectRef idx="1">
+            <a:schemeClr val="accent1"/>
+          </a:effectRef>
+          <a:fontRef idx="minor">
+            <a:schemeClr val="tx1"/>
+          </a:fontRef>
+        </p:style>
+      </p:cxnSp>
+      <p:sp>
+        <p:nvSpPr>
+          <p:cNvPr id="95" name="사각형: 모서리가 접힌 도형 94">
+            <a:extLst>
+              <a:ext uri="{FF2B5EF4-FFF2-40B4-BE49-F238E27FC236}">
+                <a16:creationId xmlns:a16="http://schemas.microsoft.com/office/drawing/2014/main" id="{E1E12A8A-3EC2-EAF6-FA32-D92ABEDF2AD5}"/>
+              </a:ext>
+            </a:extLst>
+          </p:cNvPr>
+          <p:cNvSpPr/>
+          <p:nvPr/>
+        </p:nvSpPr>
+        <p:spPr>
+          <a:xfrm>
+            <a:off x="2846503" y="1812418"/>
+            <a:ext cx="2735421" cy="1188370"/>
+          </a:xfrm>
+          <a:prstGeom prst="foldedCorner">
+            <a:avLst/>
+          </a:prstGeom>
+          <a:solidFill>
+            <a:schemeClr val="bg1">
+              <a:lumMod val="95000"/>
+            </a:schemeClr>
+          </a:solidFill>
+          <a:ln w="3175">
+            <a:solidFill>
+              <a:schemeClr val="tx1">
+                <a:lumMod val="50000"/>
+                <a:lumOff val="50000"/>
+              </a:schemeClr>
+            </a:solidFill>
+          </a:ln>
+        </p:spPr>
+        <p:style>
+          <a:lnRef idx="2">
+            <a:schemeClr val="accent1">
+              <a:shade val="15000"/>
+            </a:schemeClr>
+          </a:lnRef>
+          <a:fillRef idx="1">
+            <a:schemeClr val="accent1"/>
+          </a:fillRef>
+          <a:effectRef idx="0">
+            <a:schemeClr val="accent1"/>
+          </a:effectRef>
+          <a:fontRef idx="minor">
+            <a:schemeClr val="lt1"/>
+          </a:fontRef>
+        </p:style>
+        <p:txBody>
+          <a:bodyPr rtlCol="0" anchor="ctr"/>
+          <a:lstStyle/>
+          <a:p>
+            <a:r>
+              <a:rPr lang="en-US" altLang="ko-KR" sz="1200">
+                <a:solidFill>
+                  <a:schemeClr val="tx1">
+                    <a:lumMod val="75000"/>
+                    <a:lumOff val="25000"/>
+                  </a:schemeClr>
+                </a:solidFill>
+              </a:rPr>
+              <a:t>- </a:t>
+            </a:r>
+            <a:r>
+              <a:rPr lang="ko-KR" altLang="en-US" sz="1200">
+                <a:solidFill>
+                  <a:schemeClr val="tx1">
+                    <a:lumMod val="75000"/>
+                    <a:lumOff val="25000"/>
+                  </a:schemeClr>
+                </a:solidFill>
+              </a:rPr>
+              <a:t>설명</a:t>
+            </a:r>
+            <a:endParaRPr lang="en-US" altLang="ko-KR" sz="1200">
+              <a:solidFill>
+                <a:schemeClr val="tx1">
+                  <a:lumMod val="75000"/>
+                  <a:lumOff val="25000"/>
+                </a:schemeClr>
+              </a:solidFill>
+            </a:endParaRPr>
+          </a:p>
+          <a:p>
+            <a:r>
+              <a:rPr lang="en-US" altLang="ko-KR" sz="1200">
+                <a:solidFill>
+                  <a:schemeClr val="tx1">
+                    <a:lumMod val="75000"/>
+                    <a:lumOff val="25000"/>
+                  </a:schemeClr>
+                </a:solidFill>
+              </a:rPr>
+              <a:t>State</a:t>
+            </a:r>
+            <a:r>
+              <a:rPr lang="ko-KR" altLang="en-US" sz="1200">
+                <a:solidFill>
+                  <a:schemeClr val="tx1">
+                    <a:lumMod val="75000"/>
+                    <a:lumOff val="25000"/>
+                  </a:schemeClr>
+                </a:solidFill>
+              </a:rPr>
+              <a:t>창에서 각 노드를 선택했을 때</a:t>
+            </a:r>
+            <a:endParaRPr lang="en-US" altLang="ko-KR" sz="1200">
+              <a:solidFill>
+                <a:schemeClr val="tx1">
+                  <a:lumMod val="75000"/>
+                  <a:lumOff val="25000"/>
+                </a:schemeClr>
+              </a:solidFill>
+            </a:endParaRPr>
+          </a:p>
+          <a:p>
+            <a:r>
+              <a:rPr lang="ko-KR" altLang="en-US" sz="1200">
+                <a:solidFill>
+                  <a:schemeClr val="tx1">
+                    <a:lumMod val="75000"/>
+                    <a:lumOff val="25000"/>
+                  </a:schemeClr>
+                </a:solidFill>
+              </a:rPr>
+              <a:t>자식 변수 목록을 표현해 준다</a:t>
+            </a:r>
+            <a:r>
+              <a:rPr lang="en-US" altLang="ko-KR" sz="1200">
+                <a:solidFill>
+                  <a:schemeClr val="tx1">
+                    <a:lumMod val="75000"/>
+                    <a:lumOff val="25000"/>
+                  </a:schemeClr>
+                </a:solidFill>
+              </a:rPr>
+              <a:t>.</a:t>
+            </a:r>
+            <a:endParaRPr lang="ko-KR" altLang="en-US" sz="1200">
+              <a:solidFill>
+                <a:schemeClr val="tx1">
+                  <a:lumMod val="75000"/>
+                  <a:lumOff val="25000"/>
+                </a:schemeClr>
+              </a:solidFill>
+            </a:endParaRPr>
+          </a:p>
+        </p:txBody>
+      </p:sp>
+      <p:sp>
+        <p:nvSpPr>
+          <p:cNvPr id="98" name="사각형: 둥근 모서리 97">
+            <a:extLst>
+              <a:ext uri="{FF2B5EF4-FFF2-40B4-BE49-F238E27FC236}">
+                <a16:creationId xmlns:a16="http://schemas.microsoft.com/office/drawing/2014/main" id="{3124819E-78AC-3065-7B13-34F58407AFDC}"/>
+              </a:ext>
+            </a:extLst>
+          </p:cNvPr>
+          <p:cNvSpPr/>
+          <p:nvPr/>
+        </p:nvSpPr>
+        <p:spPr>
+          <a:xfrm>
+            <a:off x="271497" y="31166"/>
+            <a:ext cx="2398060" cy="388454"/>
+          </a:xfrm>
+          <a:prstGeom prst="roundRect">
+            <a:avLst/>
+          </a:prstGeom>
+          <a:solidFill>
+            <a:schemeClr val="bg1">
+              <a:lumMod val="95000"/>
+            </a:schemeClr>
+          </a:solidFill>
+          <a:ln>
+            <a:solidFill>
+              <a:schemeClr val="tx1">
+                <a:lumMod val="50000"/>
+                <a:lumOff val="50000"/>
+              </a:schemeClr>
+            </a:solidFill>
+          </a:ln>
+        </p:spPr>
+        <p:style>
+          <a:lnRef idx="2">
+            <a:schemeClr val="accent1">
+              <a:shade val="15000"/>
+            </a:schemeClr>
+          </a:lnRef>
+          <a:fillRef idx="1">
+            <a:schemeClr val="accent1"/>
+          </a:fillRef>
+          <a:effectRef idx="0">
+            <a:schemeClr val="accent1"/>
+          </a:effectRef>
+          <a:fontRef idx="minor">
+            <a:schemeClr val="lt1"/>
+          </a:fontRef>
+        </p:style>
+        <p:txBody>
+          <a:bodyPr rtlCol="0" anchor="ctr"/>
+          <a:lstStyle/>
+          <a:p>
+            <a:r>
+              <a:rPr lang="en-US" altLang="ko-KR" sz="1400">
+                <a:solidFill>
+                  <a:schemeClr val="tx1">
+                    <a:lumMod val="75000"/>
+                    <a:lumOff val="25000"/>
+                  </a:schemeClr>
+                </a:solidFill>
+              </a:rPr>
+              <a:t>indexStore</a:t>
+            </a:r>
+            <a:endParaRPr lang="ko-KR" altLang="en-US" sz="1400">
+              <a:solidFill>
+                <a:schemeClr val="tx1">
+                  <a:lumMod val="75000"/>
+                  <a:lumOff val="25000"/>
+                </a:schemeClr>
+              </a:solidFill>
+            </a:endParaRPr>
+          </a:p>
+        </p:txBody>
+      </p:sp>
+      <p:cxnSp>
+        <p:nvCxnSpPr>
+          <p:cNvPr id="100" name="직선 연결선 99">
+            <a:extLst>
+              <a:ext uri="{FF2B5EF4-FFF2-40B4-BE49-F238E27FC236}">
+                <a16:creationId xmlns:a16="http://schemas.microsoft.com/office/drawing/2014/main" id="{2837F8BD-BABE-EAFF-47D2-3544900A1B97}"/>
+              </a:ext>
+            </a:extLst>
+          </p:cNvPr>
+          <p:cNvCxnSpPr/>
+          <p:nvPr/>
+        </p:nvCxnSpPr>
+        <p:spPr>
+          <a:xfrm flipV="1">
+            <a:off x="265360" y="340625"/>
+            <a:ext cx="11124750" cy="74610"/>
+          </a:xfrm>
+          <a:prstGeom prst="line">
+            <a:avLst/>
+          </a:prstGeom>
+        </p:spPr>
+        <p:style>
+          <a:lnRef idx="2">
+            <a:schemeClr val="accent1"/>
+          </a:lnRef>
+          <a:fillRef idx="0">
+            <a:schemeClr val="accent1"/>
+          </a:fillRef>
+          <a:effectRef idx="1">
+            <a:schemeClr val="accent1"/>
+          </a:effectRef>
+          <a:fontRef idx="minor">
+            <a:schemeClr val="tx1"/>
+          </a:fontRef>
+        </p:style>
+      </p:cxnSp>
     </p:spTree>
     <p:extLst>
       <p:ext uri="{BB962C8B-B14F-4D97-AF65-F5344CB8AC3E}">
         <p14:creationId xmlns:p14="http://schemas.microsoft.com/office/powerpoint/2010/main" val="2833232805"/>
+      </p:ext>
+    </p:extLst>
+  </p:cSld>
+  <p:clrMapOvr>
+    <a:masterClrMapping/>
+  </p:clrMapOvr>
+</p:sld>
+</file>
+
+<file path=ppt/slides/slide6.xml><?xml version="1.0" encoding="utf-8"?>
+<p:sld xmlns:a="http://schemas.openxmlformats.org/drawingml/2006/main" xmlns:r="http://schemas.openxmlformats.org/officeDocument/2006/relationships" xmlns:p="http://schemas.openxmlformats.org/presentationml/2006/main">
+  <p:cSld>
+    <p:spTree>
+      <p:nvGrpSpPr>
+        <p:cNvPr id="1" name=""/>
+        <p:cNvGrpSpPr/>
+        <p:nvPr/>
+      </p:nvGrpSpPr>
+      <p:grpSpPr>
+        <a:xfrm>
+          <a:off x="0" y="0"/>
+          <a:ext cx="0" cy="0"/>
+          <a:chOff x="0" y="0"/>
+          <a:chExt cx="0" cy="0"/>
+        </a:xfrm>
+      </p:grpSpPr>
+      <p:sp>
+        <p:nvSpPr>
+          <p:cNvPr id="2" name="사각형: 둥근 모서리 1">
+            <a:extLst>
+              <a:ext uri="{FF2B5EF4-FFF2-40B4-BE49-F238E27FC236}">
+                <a16:creationId xmlns:a16="http://schemas.microsoft.com/office/drawing/2014/main" id="{91E9A215-5D0A-55E2-3EBB-9805EAEFC01B}"/>
+              </a:ext>
+            </a:extLst>
+          </p:cNvPr>
+          <p:cNvSpPr/>
+          <p:nvPr/>
+        </p:nvSpPr>
+        <p:spPr>
+          <a:xfrm>
+            <a:off x="271497" y="837254"/>
+            <a:ext cx="4911837" cy="936977"/>
+          </a:xfrm>
+          <a:prstGeom prst="roundRect">
+            <a:avLst>
+              <a:gd name="adj" fmla="val 3460"/>
+            </a:avLst>
+          </a:prstGeom>
+          <a:solidFill>
+            <a:schemeClr val="bg1">
+              <a:lumMod val="95000"/>
+            </a:schemeClr>
+          </a:solidFill>
+          <a:ln w="3175">
+            <a:solidFill>
+              <a:schemeClr val="bg1">
+                <a:lumMod val="65000"/>
+              </a:schemeClr>
+            </a:solidFill>
+          </a:ln>
+        </p:spPr>
+        <p:style>
+          <a:lnRef idx="2">
+            <a:schemeClr val="accent1">
+              <a:shade val="15000"/>
+            </a:schemeClr>
+          </a:lnRef>
+          <a:fillRef idx="1">
+            <a:schemeClr val="accent1"/>
+          </a:fillRef>
+          <a:effectRef idx="0">
+            <a:schemeClr val="accent1"/>
+          </a:effectRef>
+          <a:fontRef idx="minor">
+            <a:schemeClr val="lt1"/>
+          </a:fontRef>
+        </p:style>
+        <p:txBody>
+          <a:bodyPr rtlCol="0" anchor="ctr"/>
+          <a:lstStyle/>
+          <a:p>
+            <a:pPr algn="ctr"/>
+            <a:endParaRPr lang="ko-KR" altLang="en-US"/>
+          </a:p>
+        </p:txBody>
+      </p:sp>
+      <p:sp>
+        <p:nvSpPr>
+          <p:cNvPr id="6" name="TextBox 5">
+            <a:extLst>
+              <a:ext uri="{FF2B5EF4-FFF2-40B4-BE49-F238E27FC236}">
+                <a16:creationId xmlns:a16="http://schemas.microsoft.com/office/drawing/2014/main" id="{05EC7D9D-25C3-357F-7076-39ED593CD750}"/>
+              </a:ext>
+            </a:extLst>
+          </p:cNvPr>
+          <p:cNvSpPr txBox="1"/>
+          <p:nvPr/>
+        </p:nvSpPr>
+        <p:spPr>
+          <a:xfrm>
+            <a:off x="429541" y="927565"/>
+            <a:ext cx="1343377" cy="307777"/>
+          </a:xfrm>
+          <a:prstGeom prst="rect">
+            <a:avLst/>
+          </a:prstGeom>
+          <a:noFill/>
+        </p:spPr>
+        <p:txBody>
+          <a:bodyPr wrap="square" rtlCol="0">
+            <a:spAutoFit/>
+          </a:bodyPr>
+          <a:lstStyle/>
+          <a:p>
+            <a:r>
+              <a:rPr lang="en-US" altLang="ko-KR" sz="1400"/>
+              <a:t>Store Name</a:t>
+            </a:r>
+            <a:endParaRPr lang="ko-KR" altLang="en-US" sz="1400">
+              <a:solidFill>
+                <a:srgbClr val="FF0000"/>
+              </a:solidFill>
+            </a:endParaRPr>
+          </a:p>
+        </p:txBody>
+      </p:sp>
+      <p:sp>
+        <p:nvSpPr>
+          <p:cNvPr id="22" name="TextBox 21">
+            <a:extLst>
+              <a:ext uri="{FF2B5EF4-FFF2-40B4-BE49-F238E27FC236}">
+                <a16:creationId xmlns:a16="http://schemas.microsoft.com/office/drawing/2014/main" id="{37B4D24F-E4A1-6D8E-5D2D-3FBB3BD1E6DA}"/>
+              </a:ext>
+            </a:extLst>
+          </p:cNvPr>
+          <p:cNvSpPr txBox="1"/>
+          <p:nvPr/>
+        </p:nvSpPr>
+        <p:spPr>
+          <a:xfrm>
+            <a:off x="429541" y="1382098"/>
+            <a:ext cx="1343377" cy="307777"/>
+          </a:xfrm>
+          <a:prstGeom prst="rect">
+            <a:avLst/>
+          </a:prstGeom>
+          <a:noFill/>
+        </p:spPr>
+        <p:txBody>
+          <a:bodyPr wrap="square" rtlCol="0">
+            <a:spAutoFit/>
+          </a:bodyPr>
+          <a:lstStyle/>
+          <a:p>
+            <a:r>
+              <a:rPr lang="en-US" altLang="ko-KR" sz="1400"/>
+              <a:t>Store ID</a:t>
+            </a:r>
+            <a:endParaRPr lang="ko-KR" altLang="en-US" sz="1400"/>
+          </a:p>
+        </p:txBody>
+      </p:sp>
+      <p:sp>
+        <p:nvSpPr>
+          <p:cNvPr id="23" name="사각형: 둥근 모서리 22">
+            <a:extLst>
+              <a:ext uri="{FF2B5EF4-FFF2-40B4-BE49-F238E27FC236}">
+                <a16:creationId xmlns:a16="http://schemas.microsoft.com/office/drawing/2014/main" id="{743152C9-7D83-1EAA-D710-3C2C82375ADF}"/>
+              </a:ext>
+            </a:extLst>
+          </p:cNvPr>
+          <p:cNvSpPr/>
+          <p:nvPr/>
+        </p:nvSpPr>
+        <p:spPr>
+          <a:xfrm>
+            <a:off x="1772918" y="1353565"/>
+            <a:ext cx="3285916" cy="307777"/>
+          </a:xfrm>
+          <a:prstGeom prst="roundRect">
+            <a:avLst/>
+          </a:prstGeom>
+          <a:noFill/>
+          <a:ln w="3175">
+            <a:solidFill>
+              <a:schemeClr val="bg1">
+                <a:lumMod val="50000"/>
+              </a:schemeClr>
+            </a:solidFill>
+          </a:ln>
+        </p:spPr>
+        <p:style>
+          <a:lnRef idx="2">
+            <a:schemeClr val="accent1">
+              <a:shade val="15000"/>
+            </a:schemeClr>
+          </a:lnRef>
+          <a:fillRef idx="1">
+            <a:schemeClr val="accent1"/>
+          </a:fillRef>
+          <a:effectRef idx="0">
+            <a:schemeClr val="accent1"/>
+          </a:effectRef>
+          <a:fontRef idx="minor">
+            <a:schemeClr val="lt1"/>
+          </a:fontRef>
+        </p:style>
+        <p:txBody>
+          <a:bodyPr rtlCol="0" anchor="ctr"/>
+          <a:lstStyle/>
+          <a:p>
+            <a:pPr algn="ctr"/>
+            <a:endParaRPr lang="ko-KR" altLang="en-US"/>
+          </a:p>
+        </p:txBody>
+      </p:sp>
+      <p:sp>
+        <p:nvSpPr>
+          <p:cNvPr id="24" name="TextBox 23">
+            <a:extLst>
+              <a:ext uri="{FF2B5EF4-FFF2-40B4-BE49-F238E27FC236}">
+                <a16:creationId xmlns:a16="http://schemas.microsoft.com/office/drawing/2014/main" id="{C8D5F314-BC68-99A6-9225-41CDD4AA8B7D}"/>
+              </a:ext>
+            </a:extLst>
+          </p:cNvPr>
+          <p:cNvSpPr txBox="1"/>
+          <p:nvPr/>
+        </p:nvSpPr>
+        <p:spPr>
+          <a:xfrm>
+            <a:off x="412173" y="473032"/>
+            <a:ext cx="1794433" cy="307777"/>
+          </a:xfrm>
+          <a:prstGeom prst="rect">
+            <a:avLst/>
+          </a:prstGeom>
+          <a:noFill/>
+        </p:spPr>
+        <p:txBody>
+          <a:bodyPr wrap="square" rtlCol="0">
+            <a:spAutoFit/>
+          </a:bodyPr>
+          <a:lstStyle/>
+          <a:p>
+            <a:r>
+              <a:rPr lang="en-US" altLang="ko-KR" sz="1400"/>
+              <a:t>Pinia Store</a:t>
+            </a:r>
+            <a:endParaRPr lang="ko-KR" altLang="en-US" sz="1400"/>
+          </a:p>
+        </p:txBody>
+      </p:sp>
+      <p:sp>
+        <p:nvSpPr>
+          <p:cNvPr id="25" name="사각형: 둥근 모서리 24">
+            <a:extLst>
+              <a:ext uri="{FF2B5EF4-FFF2-40B4-BE49-F238E27FC236}">
+                <a16:creationId xmlns:a16="http://schemas.microsoft.com/office/drawing/2014/main" id="{6E36979D-D314-03BF-A537-9664491FA6D7}"/>
+              </a:ext>
+            </a:extLst>
+          </p:cNvPr>
+          <p:cNvSpPr/>
+          <p:nvPr/>
+        </p:nvSpPr>
+        <p:spPr>
+          <a:xfrm>
+            <a:off x="1772916" y="966951"/>
+            <a:ext cx="3285917" cy="307777"/>
+          </a:xfrm>
+          <a:prstGeom prst="roundRect">
+            <a:avLst/>
+          </a:prstGeom>
+          <a:noFill/>
+          <a:ln w="3175">
+            <a:solidFill>
+              <a:schemeClr val="bg1">
+                <a:lumMod val="50000"/>
+              </a:schemeClr>
+            </a:solidFill>
+          </a:ln>
+        </p:spPr>
+        <p:style>
+          <a:lnRef idx="2">
+            <a:schemeClr val="accent1">
+              <a:shade val="15000"/>
+            </a:schemeClr>
+          </a:lnRef>
+          <a:fillRef idx="1">
+            <a:schemeClr val="accent1"/>
+          </a:fillRef>
+          <a:effectRef idx="0">
+            <a:schemeClr val="accent1"/>
+          </a:effectRef>
+          <a:fontRef idx="minor">
+            <a:schemeClr val="lt1"/>
+          </a:fontRef>
+        </p:style>
+        <p:txBody>
+          <a:bodyPr rtlCol="0" anchor="ctr"/>
+          <a:lstStyle/>
+          <a:p>
+            <a:pPr algn="ctr"/>
+            <a:endParaRPr lang="ko-KR" altLang="en-US"/>
+          </a:p>
+        </p:txBody>
+      </p:sp>
+      <p:sp>
+        <p:nvSpPr>
+          <p:cNvPr id="26" name="사각형: 둥근 모서리 25">
+            <a:extLst>
+              <a:ext uri="{FF2B5EF4-FFF2-40B4-BE49-F238E27FC236}">
+                <a16:creationId xmlns:a16="http://schemas.microsoft.com/office/drawing/2014/main" id="{57079287-A496-20A4-CD1B-124FED0F0CF5}"/>
+              </a:ext>
+            </a:extLst>
+          </p:cNvPr>
+          <p:cNvSpPr/>
+          <p:nvPr/>
+        </p:nvSpPr>
+        <p:spPr>
+          <a:xfrm>
+            <a:off x="317025" y="515521"/>
+            <a:ext cx="45719" cy="222988"/>
+          </a:xfrm>
+          <a:prstGeom prst="roundRect">
+            <a:avLst/>
+          </a:prstGeom>
+        </p:spPr>
+        <p:style>
+          <a:lnRef idx="2">
+            <a:schemeClr val="accent1">
+              <a:shade val="15000"/>
+            </a:schemeClr>
+          </a:lnRef>
+          <a:fillRef idx="1">
+            <a:schemeClr val="accent1"/>
+          </a:fillRef>
+          <a:effectRef idx="0">
+            <a:schemeClr val="accent1"/>
+          </a:effectRef>
+          <a:fontRef idx="minor">
+            <a:schemeClr val="lt1"/>
+          </a:fontRef>
+        </p:style>
+        <p:txBody>
+          <a:bodyPr rtlCol="0" anchor="ctr"/>
+          <a:lstStyle/>
+          <a:p>
+            <a:pPr algn="ctr"/>
+            <a:endParaRPr lang="ko-KR" altLang="en-US"/>
+          </a:p>
+        </p:txBody>
+      </p:sp>
+      <p:sp>
+        <p:nvSpPr>
+          <p:cNvPr id="27" name="사각형: 둥근 모서리 26">
+            <a:extLst>
+              <a:ext uri="{FF2B5EF4-FFF2-40B4-BE49-F238E27FC236}">
+                <a16:creationId xmlns:a16="http://schemas.microsoft.com/office/drawing/2014/main" id="{B33607F5-E998-89C6-A004-F2C1AD513F67}"/>
+              </a:ext>
+            </a:extLst>
+          </p:cNvPr>
+          <p:cNvSpPr/>
+          <p:nvPr/>
+        </p:nvSpPr>
+        <p:spPr>
+          <a:xfrm>
+            <a:off x="271497" y="2166646"/>
+            <a:ext cx="4911837" cy="1748059"/>
+          </a:xfrm>
+          <a:prstGeom prst="roundRect">
+            <a:avLst>
+              <a:gd name="adj" fmla="val 3460"/>
+            </a:avLst>
+          </a:prstGeom>
+          <a:solidFill>
+            <a:schemeClr val="bg1">
+              <a:lumMod val="95000"/>
+            </a:schemeClr>
+          </a:solidFill>
+          <a:ln w="3175">
+            <a:solidFill>
+              <a:schemeClr val="bg1">
+                <a:lumMod val="65000"/>
+              </a:schemeClr>
+            </a:solidFill>
+          </a:ln>
+        </p:spPr>
+        <p:style>
+          <a:lnRef idx="2">
+            <a:schemeClr val="accent1">
+              <a:shade val="15000"/>
+            </a:schemeClr>
+          </a:lnRef>
+          <a:fillRef idx="1">
+            <a:schemeClr val="accent1"/>
+          </a:fillRef>
+          <a:effectRef idx="0">
+            <a:schemeClr val="accent1"/>
+          </a:effectRef>
+          <a:fontRef idx="minor">
+            <a:schemeClr val="lt1"/>
+          </a:fontRef>
+        </p:style>
+        <p:txBody>
+          <a:bodyPr rtlCol="0" anchor="ctr"/>
+          <a:lstStyle/>
+          <a:p>
+            <a:pPr algn="ctr"/>
+            <a:endParaRPr lang="ko-KR" altLang="en-US"/>
+          </a:p>
+        </p:txBody>
+      </p:sp>
+      <p:sp>
+        <p:nvSpPr>
+          <p:cNvPr id="31" name="TextBox 30">
+            <a:extLst>
+              <a:ext uri="{FF2B5EF4-FFF2-40B4-BE49-F238E27FC236}">
+                <a16:creationId xmlns:a16="http://schemas.microsoft.com/office/drawing/2014/main" id="{8C8D50A2-DB0C-A86A-8065-E33E1B84BB3A}"/>
+              </a:ext>
+            </a:extLst>
+          </p:cNvPr>
+          <p:cNvSpPr txBox="1"/>
+          <p:nvPr/>
+        </p:nvSpPr>
+        <p:spPr>
+          <a:xfrm>
+            <a:off x="412173" y="1802425"/>
+            <a:ext cx="1794433" cy="307777"/>
+          </a:xfrm>
+          <a:prstGeom prst="rect">
+            <a:avLst/>
+          </a:prstGeom>
+          <a:noFill/>
+        </p:spPr>
+        <p:txBody>
+          <a:bodyPr wrap="square" rtlCol="0">
+            <a:spAutoFit/>
+          </a:bodyPr>
+          <a:lstStyle/>
+          <a:p>
+            <a:r>
+              <a:rPr lang="en-US" altLang="ko-KR" sz="1400"/>
+              <a:t>State</a:t>
+            </a:r>
+            <a:endParaRPr lang="ko-KR" altLang="en-US" sz="1400"/>
+          </a:p>
+        </p:txBody>
+      </p:sp>
+      <p:sp>
+        <p:nvSpPr>
+          <p:cNvPr id="33" name="사각형: 둥근 모서리 32">
+            <a:extLst>
+              <a:ext uri="{FF2B5EF4-FFF2-40B4-BE49-F238E27FC236}">
+                <a16:creationId xmlns:a16="http://schemas.microsoft.com/office/drawing/2014/main" id="{328610F4-B61F-7DC5-0FCF-7F0120DC1140}"/>
+              </a:ext>
+            </a:extLst>
+          </p:cNvPr>
+          <p:cNvSpPr/>
+          <p:nvPr/>
+        </p:nvSpPr>
+        <p:spPr>
+          <a:xfrm>
+            <a:off x="317025" y="1844914"/>
+            <a:ext cx="45719" cy="222988"/>
+          </a:xfrm>
+          <a:prstGeom prst="roundRect">
+            <a:avLst/>
+          </a:prstGeom>
+        </p:spPr>
+        <p:style>
+          <a:lnRef idx="2">
+            <a:schemeClr val="accent1">
+              <a:shade val="15000"/>
+            </a:schemeClr>
+          </a:lnRef>
+          <a:fillRef idx="1">
+            <a:schemeClr val="accent1"/>
+          </a:fillRef>
+          <a:effectRef idx="0">
+            <a:schemeClr val="accent1"/>
+          </a:effectRef>
+          <a:fontRef idx="minor">
+            <a:schemeClr val="lt1"/>
+          </a:fontRef>
+        </p:style>
+        <p:txBody>
+          <a:bodyPr rtlCol="0" anchor="ctr"/>
+          <a:lstStyle/>
+          <a:p>
+            <a:pPr algn="ctr"/>
+            <a:endParaRPr lang="ko-KR" altLang="en-US"/>
+          </a:p>
+        </p:txBody>
+      </p:sp>
+      <p:sp>
+        <p:nvSpPr>
+          <p:cNvPr id="34" name="사각형: 둥근 모서리 33">
+            <a:extLst>
+              <a:ext uri="{FF2B5EF4-FFF2-40B4-BE49-F238E27FC236}">
+                <a16:creationId xmlns:a16="http://schemas.microsoft.com/office/drawing/2014/main" id="{110ED8E7-FBC8-0AC1-A3C9-F65B4733755C}"/>
+              </a:ext>
+            </a:extLst>
+          </p:cNvPr>
+          <p:cNvSpPr/>
+          <p:nvPr/>
+        </p:nvSpPr>
+        <p:spPr>
+          <a:xfrm>
+            <a:off x="271497" y="4503201"/>
+            <a:ext cx="4911837" cy="936977"/>
+          </a:xfrm>
+          <a:prstGeom prst="roundRect">
+            <a:avLst>
+              <a:gd name="adj" fmla="val 3460"/>
+            </a:avLst>
+          </a:prstGeom>
+          <a:solidFill>
+            <a:schemeClr val="bg1">
+              <a:lumMod val="95000"/>
+            </a:schemeClr>
+          </a:solidFill>
+          <a:ln w="3175">
+            <a:solidFill>
+              <a:schemeClr val="bg1">
+                <a:lumMod val="65000"/>
+              </a:schemeClr>
+            </a:solidFill>
+          </a:ln>
+        </p:spPr>
+        <p:style>
+          <a:lnRef idx="2">
+            <a:schemeClr val="accent1">
+              <a:shade val="15000"/>
+            </a:schemeClr>
+          </a:lnRef>
+          <a:fillRef idx="1">
+            <a:schemeClr val="accent1"/>
+          </a:fillRef>
+          <a:effectRef idx="0">
+            <a:schemeClr val="accent1"/>
+          </a:effectRef>
+          <a:fontRef idx="minor">
+            <a:schemeClr val="lt1"/>
+          </a:fontRef>
+        </p:style>
+        <p:txBody>
+          <a:bodyPr rtlCol="0" anchor="ctr"/>
+          <a:lstStyle/>
+          <a:p>
+            <a:pPr algn="ctr"/>
+            <a:endParaRPr lang="ko-KR" altLang="en-US"/>
+          </a:p>
+        </p:txBody>
+      </p:sp>
+      <p:sp>
+        <p:nvSpPr>
+          <p:cNvPr id="35" name="TextBox 34">
+            <a:extLst>
+              <a:ext uri="{FF2B5EF4-FFF2-40B4-BE49-F238E27FC236}">
+                <a16:creationId xmlns:a16="http://schemas.microsoft.com/office/drawing/2014/main" id="{AE42B6EF-DEFF-D41B-5D44-D01680ADA447}"/>
+              </a:ext>
+            </a:extLst>
+          </p:cNvPr>
+          <p:cNvSpPr txBox="1"/>
+          <p:nvPr/>
+        </p:nvSpPr>
+        <p:spPr>
+          <a:xfrm>
+            <a:off x="569528" y="4630924"/>
+            <a:ext cx="1343377" cy="307777"/>
+          </a:xfrm>
+          <a:prstGeom prst="rect">
+            <a:avLst/>
+          </a:prstGeom>
+          <a:noFill/>
+        </p:spPr>
+        <p:txBody>
+          <a:bodyPr wrap="square" rtlCol="0">
+            <a:spAutoFit/>
+          </a:bodyPr>
+          <a:lstStyle/>
+          <a:p>
+            <a:r>
+              <a:rPr lang="en-US" altLang="ko-KR" sz="1400"/>
+              <a:t>Getter </a:t>
+            </a:r>
+            <a:r>
+              <a:rPr lang="ko-KR" altLang="en-US" sz="1400"/>
+              <a:t>명</a:t>
+            </a:r>
+          </a:p>
+        </p:txBody>
+      </p:sp>
+      <p:sp>
+        <p:nvSpPr>
+          <p:cNvPr id="36" name="TextBox 35">
+            <a:extLst>
+              <a:ext uri="{FF2B5EF4-FFF2-40B4-BE49-F238E27FC236}">
+                <a16:creationId xmlns:a16="http://schemas.microsoft.com/office/drawing/2014/main" id="{D99D098E-D7B1-60DB-51E3-D3A83488CBEE}"/>
+              </a:ext>
+            </a:extLst>
+          </p:cNvPr>
+          <p:cNvSpPr txBox="1"/>
+          <p:nvPr/>
+        </p:nvSpPr>
+        <p:spPr>
+          <a:xfrm>
+            <a:off x="2797334" y="4590595"/>
+            <a:ext cx="1343377" cy="307777"/>
+          </a:xfrm>
+          <a:prstGeom prst="rect">
+            <a:avLst/>
+          </a:prstGeom>
+          <a:noFill/>
+        </p:spPr>
+        <p:txBody>
+          <a:bodyPr wrap="square" rtlCol="0">
+            <a:spAutoFit/>
+          </a:bodyPr>
+          <a:lstStyle/>
+          <a:p>
+            <a:r>
+              <a:rPr lang="en-US" altLang="ko-KR" sz="1400"/>
+              <a:t>Return </a:t>
+            </a:r>
+            <a:r>
+              <a:rPr lang="ko-KR" altLang="en-US" sz="1400"/>
+              <a:t>식</a:t>
+            </a:r>
+          </a:p>
+        </p:txBody>
+      </p:sp>
+      <p:sp>
+        <p:nvSpPr>
+          <p:cNvPr id="37" name="사각형: 둥근 모서리 36">
+            <a:extLst>
+              <a:ext uri="{FF2B5EF4-FFF2-40B4-BE49-F238E27FC236}">
+                <a16:creationId xmlns:a16="http://schemas.microsoft.com/office/drawing/2014/main" id="{BD2B06AC-53F2-D2DB-B869-AD7178163773}"/>
+              </a:ext>
+            </a:extLst>
+          </p:cNvPr>
+          <p:cNvSpPr/>
+          <p:nvPr/>
+        </p:nvSpPr>
+        <p:spPr>
+          <a:xfrm>
+            <a:off x="1965958" y="4997123"/>
+            <a:ext cx="2687322" cy="307777"/>
+          </a:xfrm>
+          <a:prstGeom prst="roundRect">
+            <a:avLst/>
+          </a:prstGeom>
+          <a:noFill/>
+          <a:ln w="3175">
+            <a:solidFill>
+              <a:schemeClr val="bg1">
+                <a:lumMod val="50000"/>
+              </a:schemeClr>
+            </a:solidFill>
+          </a:ln>
+        </p:spPr>
+        <p:style>
+          <a:lnRef idx="2">
+            <a:schemeClr val="accent1">
+              <a:shade val="15000"/>
+            </a:schemeClr>
+          </a:lnRef>
+          <a:fillRef idx="1">
+            <a:schemeClr val="accent1"/>
+          </a:fillRef>
+          <a:effectRef idx="0">
+            <a:schemeClr val="accent1"/>
+          </a:effectRef>
+          <a:fontRef idx="minor">
+            <a:schemeClr val="lt1"/>
+          </a:fontRef>
+        </p:style>
+        <p:txBody>
+          <a:bodyPr rtlCol="0" anchor="ctr"/>
+          <a:lstStyle/>
+          <a:p>
+            <a:r>
+              <a:rPr lang="en-US" altLang="ko-KR" sz="1200">
+                <a:solidFill>
+                  <a:schemeClr val="tx1">
+                    <a:lumMod val="75000"/>
+                    <a:lumOff val="25000"/>
+                  </a:schemeClr>
+                </a:solidFill>
+              </a:rPr>
+              <a:t>state.rows.length</a:t>
+            </a:r>
+            <a:endParaRPr lang="ko-KR" altLang="en-US" sz="1200">
+              <a:solidFill>
+                <a:schemeClr val="tx1">
+                  <a:lumMod val="75000"/>
+                  <a:lumOff val="25000"/>
+                </a:schemeClr>
+              </a:solidFill>
+            </a:endParaRPr>
+          </a:p>
+        </p:txBody>
+      </p:sp>
+      <p:sp>
+        <p:nvSpPr>
+          <p:cNvPr id="38" name="TextBox 37">
+            <a:extLst>
+              <a:ext uri="{FF2B5EF4-FFF2-40B4-BE49-F238E27FC236}">
+                <a16:creationId xmlns:a16="http://schemas.microsoft.com/office/drawing/2014/main" id="{7785CF73-FE57-2494-8036-AECFF55D17A0}"/>
+              </a:ext>
+            </a:extLst>
+          </p:cNvPr>
+          <p:cNvSpPr txBox="1"/>
+          <p:nvPr/>
+        </p:nvSpPr>
+        <p:spPr>
+          <a:xfrm>
+            <a:off x="412173" y="4138979"/>
+            <a:ext cx="1794433" cy="307777"/>
+          </a:xfrm>
+          <a:prstGeom prst="rect">
+            <a:avLst/>
+          </a:prstGeom>
+          <a:noFill/>
+        </p:spPr>
+        <p:txBody>
+          <a:bodyPr wrap="square" rtlCol="0">
+            <a:spAutoFit/>
+          </a:bodyPr>
+          <a:lstStyle/>
+          <a:p>
+            <a:r>
+              <a:rPr lang="en-US" altLang="ko-KR" sz="1400"/>
+              <a:t>Getters</a:t>
+            </a:r>
+            <a:endParaRPr lang="ko-KR" altLang="en-US" sz="1400"/>
+          </a:p>
+        </p:txBody>
+      </p:sp>
+      <p:sp>
+        <p:nvSpPr>
+          <p:cNvPr id="39" name="사각형: 둥근 모서리 38">
+            <a:extLst>
+              <a:ext uri="{FF2B5EF4-FFF2-40B4-BE49-F238E27FC236}">
+                <a16:creationId xmlns:a16="http://schemas.microsoft.com/office/drawing/2014/main" id="{1FC1D4AA-BD1E-99C3-CD4D-C5711AE5320D}"/>
+              </a:ext>
+            </a:extLst>
+          </p:cNvPr>
+          <p:cNvSpPr/>
+          <p:nvPr/>
+        </p:nvSpPr>
+        <p:spPr>
+          <a:xfrm>
+            <a:off x="429541" y="4992386"/>
+            <a:ext cx="1483364" cy="307777"/>
+          </a:xfrm>
+          <a:prstGeom prst="roundRect">
+            <a:avLst/>
+          </a:prstGeom>
+          <a:noFill/>
+          <a:ln w="3175">
+            <a:solidFill>
+              <a:schemeClr val="bg1">
+                <a:lumMod val="50000"/>
+              </a:schemeClr>
+            </a:solidFill>
+          </a:ln>
+        </p:spPr>
+        <p:style>
+          <a:lnRef idx="2">
+            <a:schemeClr val="accent1">
+              <a:shade val="15000"/>
+            </a:schemeClr>
+          </a:lnRef>
+          <a:fillRef idx="1">
+            <a:schemeClr val="accent1"/>
+          </a:fillRef>
+          <a:effectRef idx="0">
+            <a:schemeClr val="accent1"/>
+          </a:effectRef>
+          <a:fontRef idx="minor">
+            <a:schemeClr val="lt1"/>
+          </a:fontRef>
+        </p:style>
+        <p:txBody>
+          <a:bodyPr rtlCol="0" anchor="ctr"/>
+          <a:lstStyle/>
+          <a:p>
+            <a:r>
+              <a:rPr lang="en-US" altLang="ko-KR" sz="1200">
+                <a:solidFill>
+                  <a:schemeClr val="tx1">
+                    <a:lumMod val="75000"/>
+                    <a:lumOff val="25000"/>
+                  </a:schemeClr>
+                </a:solidFill>
+              </a:rPr>
+              <a:t>rowCount</a:t>
+            </a:r>
+            <a:endParaRPr lang="ko-KR" altLang="en-US" sz="1200">
+              <a:solidFill>
+                <a:schemeClr val="tx1">
+                  <a:lumMod val="75000"/>
+                  <a:lumOff val="25000"/>
+                </a:schemeClr>
+              </a:solidFill>
+            </a:endParaRPr>
+          </a:p>
+        </p:txBody>
+      </p:sp>
+      <p:sp>
+        <p:nvSpPr>
+          <p:cNvPr id="40" name="사각형: 둥근 모서리 39">
+            <a:extLst>
+              <a:ext uri="{FF2B5EF4-FFF2-40B4-BE49-F238E27FC236}">
+                <a16:creationId xmlns:a16="http://schemas.microsoft.com/office/drawing/2014/main" id="{D37AD911-D3F0-2F6B-4C98-D2FF12E86195}"/>
+              </a:ext>
+            </a:extLst>
+          </p:cNvPr>
+          <p:cNvSpPr/>
+          <p:nvPr/>
+        </p:nvSpPr>
+        <p:spPr>
+          <a:xfrm>
+            <a:off x="317025" y="4181468"/>
+            <a:ext cx="45719" cy="222988"/>
+          </a:xfrm>
+          <a:prstGeom prst="roundRect">
+            <a:avLst/>
+          </a:prstGeom>
+        </p:spPr>
+        <p:style>
+          <a:lnRef idx="2">
+            <a:schemeClr val="accent1">
+              <a:shade val="15000"/>
+            </a:schemeClr>
+          </a:lnRef>
+          <a:fillRef idx="1">
+            <a:schemeClr val="accent1"/>
+          </a:fillRef>
+          <a:effectRef idx="0">
+            <a:schemeClr val="accent1"/>
+          </a:effectRef>
+          <a:fontRef idx="minor">
+            <a:schemeClr val="lt1"/>
+          </a:fontRef>
+        </p:style>
+        <p:txBody>
+          <a:bodyPr rtlCol="0" anchor="ctr"/>
+          <a:lstStyle/>
+          <a:p>
+            <a:pPr algn="ctr"/>
+            <a:endParaRPr lang="ko-KR" altLang="en-US"/>
+          </a:p>
+        </p:txBody>
+      </p:sp>
+      <p:sp>
+        <p:nvSpPr>
+          <p:cNvPr id="41" name="사각형: 둥근 모서리 40">
+            <a:extLst>
+              <a:ext uri="{FF2B5EF4-FFF2-40B4-BE49-F238E27FC236}">
+                <a16:creationId xmlns:a16="http://schemas.microsoft.com/office/drawing/2014/main" id="{8DA14FD7-1422-9351-8256-58734870775A}"/>
+              </a:ext>
+            </a:extLst>
+          </p:cNvPr>
+          <p:cNvSpPr/>
+          <p:nvPr/>
+        </p:nvSpPr>
+        <p:spPr>
+          <a:xfrm>
+            <a:off x="271497" y="5825804"/>
+            <a:ext cx="4911837" cy="936977"/>
+          </a:xfrm>
+          <a:prstGeom prst="roundRect">
+            <a:avLst>
+              <a:gd name="adj" fmla="val 3460"/>
+            </a:avLst>
+          </a:prstGeom>
+          <a:solidFill>
+            <a:schemeClr val="bg1">
+              <a:lumMod val="95000"/>
+            </a:schemeClr>
+          </a:solidFill>
+          <a:ln w="3175">
+            <a:solidFill>
+              <a:schemeClr val="bg1">
+                <a:lumMod val="65000"/>
+              </a:schemeClr>
+            </a:solidFill>
+          </a:ln>
+        </p:spPr>
+        <p:style>
+          <a:lnRef idx="2">
+            <a:schemeClr val="accent1">
+              <a:shade val="15000"/>
+            </a:schemeClr>
+          </a:lnRef>
+          <a:fillRef idx="1">
+            <a:schemeClr val="accent1"/>
+          </a:fillRef>
+          <a:effectRef idx="0">
+            <a:schemeClr val="accent1"/>
+          </a:effectRef>
+          <a:fontRef idx="minor">
+            <a:schemeClr val="lt1"/>
+          </a:fontRef>
+        </p:style>
+        <p:txBody>
+          <a:bodyPr rtlCol="0" anchor="ctr"/>
+          <a:lstStyle/>
+          <a:p>
+            <a:pPr algn="ctr"/>
+            <a:endParaRPr lang="ko-KR" altLang="en-US"/>
+          </a:p>
+        </p:txBody>
+      </p:sp>
+      <p:sp>
+        <p:nvSpPr>
+          <p:cNvPr id="45" name="TextBox 44">
+            <a:extLst>
+              <a:ext uri="{FF2B5EF4-FFF2-40B4-BE49-F238E27FC236}">
+                <a16:creationId xmlns:a16="http://schemas.microsoft.com/office/drawing/2014/main" id="{0729BC2C-51CC-7746-8F37-883FA8110360}"/>
+              </a:ext>
+            </a:extLst>
+          </p:cNvPr>
+          <p:cNvSpPr txBox="1"/>
+          <p:nvPr/>
+        </p:nvSpPr>
+        <p:spPr>
+          <a:xfrm>
+            <a:off x="412173" y="5461582"/>
+            <a:ext cx="1794433" cy="307777"/>
+          </a:xfrm>
+          <a:prstGeom prst="rect">
+            <a:avLst/>
+          </a:prstGeom>
+          <a:noFill/>
+        </p:spPr>
+        <p:txBody>
+          <a:bodyPr wrap="square" rtlCol="0">
+            <a:spAutoFit/>
+          </a:bodyPr>
+          <a:lstStyle/>
+          <a:p>
+            <a:r>
+              <a:rPr lang="en-US" altLang="ko-KR" sz="1400"/>
+              <a:t>Actions</a:t>
+            </a:r>
+            <a:endParaRPr lang="ko-KR" altLang="en-US" sz="1400"/>
+          </a:p>
+        </p:txBody>
+      </p:sp>
+      <p:sp>
+        <p:nvSpPr>
+          <p:cNvPr id="47" name="사각형: 둥근 모서리 46">
+            <a:extLst>
+              <a:ext uri="{FF2B5EF4-FFF2-40B4-BE49-F238E27FC236}">
+                <a16:creationId xmlns:a16="http://schemas.microsoft.com/office/drawing/2014/main" id="{B3FA3AE6-7724-2319-5662-49FD32B10F98}"/>
+              </a:ext>
+            </a:extLst>
+          </p:cNvPr>
+          <p:cNvSpPr/>
+          <p:nvPr/>
+        </p:nvSpPr>
+        <p:spPr>
+          <a:xfrm>
+            <a:off x="317025" y="5504071"/>
+            <a:ext cx="45719" cy="222988"/>
+          </a:xfrm>
+          <a:prstGeom prst="roundRect">
+            <a:avLst/>
+          </a:prstGeom>
+        </p:spPr>
+        <p:style>
+          <a:lnRef idx="2">
+            <a:schemeClr val="accent1">
+              <a:shade val="15000"/>
+            </a:schemeClr>
+          </a:lnRef>
+          <a:fillRef idx="1">
+            <a:schemeClr val="accent1"/>
+          </a:fillRef>
+          <a:effectRef idx="0">
+            <a:schemeClr val="accent1"/>
+          </a:effectRef>
+          <a:fontRef idx="minor">
+            <a:schemeClr val="lt1"/>
+          </a:fontRef>
+        </p:style>
+        <p:txBody>
+          <a:bodyPr rtlCol="0" anchor="ctr"/>
+          <a:lstStyle/>
+          <a:p>
+            <a:pPr algn="ctr"/>
+            <a:endParaRPr lang="ko-KR" altLang="en-US"/>
+          </a:p>
+        </p:txBody>
+      </p:sp>
+      <p:sp>
+        <p:nvSpPr>
+          <p:cNvPr id="48" name="사각형: 둥근 모서리 47">
+            <a:extLst>
+              <a:ext uri="{FF2B5EF4-FFF2-40B4-BE49-F238E27FC236}">
+                <a16:creationId xmlns:a16="http://schemas.microsoft.com/office/drawing/2014/main" id="{D48BA778-1E22-5AD9-2AD3-B7BADCEFF4D4}"/>
+              </a:ext>
+            </a:extLst>
+          </p:cNvPr>
+          <p:cNvSpPr/>
+          <p:nvPr/>
+        </p:nvSpPr>
+        <p:spPr>
+          <a:xfrm>
+            <a:off x="5652272" y="622459"/>
+            <a:ext cx="5700892" cy="4956937"/>
+          </a:xfrm>
+          <a:prstGeom prst="roundRect">
+            <a:avLst>
+              <a:gd name="adj" fmla="val 1860"/>
+            </a:avLst>
+          </a:prstGeom>
+          <a:noFill/>
+          <a:ln w="3175">
+            <a:solidFill>
+              <a:schemeClr val="bg1">
+                <a:lumMod val="50000"/>
+              </a:schemeClr>
+            </a:solidFill>
+          </a:ln>
+        </p:spPr>
+        <p:style>
+          <a:lnRef idx="2">
+            <a:schemeClr val="accent1">
+              <a:shade val="15000"/>
+            </a:schemeClr>
+          </a:lnRef>
+          <a:fillRef idx="1">
+            <a:schemeClr val="accent1"/>
+          </a:fillRef>
+          <a:effectRef idx="0">
+            <a:schemeClr val="accent1"/>
+          </a:effectRef>
+          <a:fontRef idx="minor">
+            <a:schemeClr val="lt1"/>
+          </a:fontRef>
+        </p:style>
+        <p:txBody>
+          <a:bodyPr rtlCol="0" anchor="ctr"/>
+          <a:lstStyle/>
+          <a:p>
+            <a:pPr algn="ctr"/>
+            <a:endParaRPr lang="ko-KR" altLang="en-US"/>
+          </a:p>
+        </p:txBody>
+      </p:sp>
+      <p:sp>
+        <p:nvSpPr>
+          <p:cNvPr id="49" name="사각형: 둥근 모서리 48">
+            <a:extLst>
+              <a:ext uri="{FF2B5EF4-FFF2-40B4-BE49-F238E27FC236}">
+                <a16:creationId xmlns:a16="http://schemas.microsoft.com/office/drawing/2014/main" id="{C2EC1F98-CE5D-7942-27CA-D1336879BE76}"/>
+              </a:ext>
+            </a:extLst>
+          </p:cNvPr>
+          <p:cNvSpPr/>
+          <p:nvPr/>
+        </p:nvSpPr>
+        <p:spPr>
+          <a:xfrm>
+            <a:off x="4517289" y="4208169"/>
+            <a:ext cx="666045" cy="249037"/>
+          </a:xfrm>
+          <a:prstGeom prst="roundRect">
+            <a:avLst/>
+          </a:prstGeom>
+          <a:solidFill>
+            <a:srgbClr val="0070C0"/>
+          </a:solidFill>
+          <a:ln w="3175">
+            <a:solidFill>
+              <a:schemeClr val="bg1">
+                <a:lumMod val="75000"/>
+              </a:schemeClr>
+            </a:solidFill>
+          </a:ln>
+        </p:spPr>
+        <p:style>
+          <a:lnRef idx="2">
+            <a:schemeClr val="accent1">
+              <a:shade val="15000"/>
+            </a:schemeClr>
+          </a:lnRef>
+          <a:fillRef idx="1">
+            <a:schemeClr val="accent1"/>
+          </a:fillRef>
+          <a:effectRef idx="0">
+            <a:schemeClr val="accent1"/>
+          </a:effectRef>
+          <a:fontRef idx="minor">
+            <a:schemeClr val="lt1"/>
+          </a:fontRef>
+        </p:style>
+        <p:txBody>
+          <a:bodyPr lIns="0" tIns="0" rIns="0" bIns="0" rtlCol="0" anchor="ctr"/>
+          <a:lstStyle/>
+          <a:p>
+            <a:pPr algn="ctr"/>
+            <a:r>
+              <a:rPr lang="en-US" altLang="ko-KR" sz="1200"/>
+              <a:t>+ </a:t>
+            </a:r>
+            <a:r>
+              <a:rPr lang="ko-KR" altLang="en-US" sz="1200"/>
+              <a:t>추가</a:t>
+            </a:r>
+          </a:p>
+        </p:txBody>
+      </p:sp>
+      <p:sp>
+        <p:nvSpPr>
+          <p:cNvPr id="50" name="사각형: 둥근 모서리 49">
+            <a:extLst>
+              <a:ext uri="{FF2B5EF4-FFF2-40B4-BE49-F238E27FC236}">
+                <a16:creationId xmlns:a16="http://schemas.microsoft.com/office/drawing/2014/main" id="{19E9692A-B8E6-4798-0D04-E4A8D66CE4C7}"/>
+              </a:ext>
+            </a:extLst>
+          </p:cNvPr>
+          <p:cNvSpPr/>
+          <p:nvPr/>
+        </p:nvSpPr>
+        <p:spPr>
+          <a:xfrm>
+            <a:off x="4517289" y="5508502"/>
+            <a:ext cx="666045" cy="249037"/>
+          </a:xfrm>
+          <a:prstGeom prst="roundRect">
+            <a:avLst/>
+          </a:prstGeom>
+          <a:solidFill>
+            <a:srgbClr val="0070C0"/>
+          </a:solidFill>
+          <a:ln w="3175">
+            <a:solidFill>
+              <a:schemeClr val="bg1">
+                <a:lumMod val="75000"/>
+              </a:schemeClr>
+            </a:solidFill>
+          </a:ln>
+        </p:spPr>
+        <p:style>
+          <a:lnRef idx="2">
+            <a:schemeClr val="accent1">
+              <a:shade val="15000"/>
+            </a:schemeClr>
+          </a:lnRef>
+          <a:fillRef idx="1">
+            <a:schemeClr val="accent1"/>
+          </a:fillRef>
+          <a:effectRef idx="0">
+            <a:schemeClr val="accent1"/>
+          </a:effectRef>
+          <a:fontRef idx="minor">
+            <a:schemeClr val="lt1"/>
+          </a:fontRef>
+        </p:style>
+        <p:txBody>
+          <a:bodyPr lIns="0" tIns="0" rIns="0" bIns="0" rtlCol="0" anchor="ctr"/>
+          <a:lstStyle/>
+          <a:p>
+            <a:pPr algn="ctr"/>
+            <a:r>
+              <a:rPr lang="en-US" altLang="ko-KR" sz="1200"/>
+              <a:t>+ </a:t>
+            </a:r>
+            <a:r>
+              <a:rPr lang="ko-KR" altLang="en-US" sz="1200"/>
+              <a:t>추가</a:t>
+            </a:r>
+          </a:p>
+        </p:txBody>
+      </p:sp>
+      <p:sp>
+        <p:nvSpPr>
+          <p:cNvPr id="51" name="TextBox 50">
+            <a:extLst>
+              <a:ext uri="{FF2B5EF4-FFF2-40B4-BE49-F238E27FC236}">
+                <a16:creationId xmlns:a16="http://schemas.microsoft.com/office/drawing/2014/main" id="{C7E553B2-FA26-72B4-973F-AE06BCB9F17D}"/>
+              </a:ext>
+            </a:extLst>
+          </p:cNvPr>
+          <p:cNvSpPr txBox="1"/>
+          <p:nvPr/>
+        </p:nvSpPr>
+        <p:spPr>
+          <a:xfrm>
+            <a:off x="376779" y="2215596"/>
+            <a:ext cx="697236" cy="261610"/>
+          </a:xfrm>
+          <a:prstGeom prst="rect">
+            <a:avLst/>
+          </a:prstGeom>
+          <a:noFill/>
+        </p:spPr>
+        <p:txBody>
+          <a:bodyPr wrap="square" rtlCol="0">
+            <a:spAutoFit/>
+          </a:bodyPr>
+          <a:lstStyle/>
+          <a:p>
+            <a:r>
+              <a:rPr lang="en-US" altLang="ko-KR" sz="1050"/>
+              <a:t>+ State</a:t>
+            </a:r>
+            <a:endParaRPr lang="ko-KR" altLang="en-US" sz="1050"/>
+          </a:p>
+        </p:txBody>
+      </p:sp>
+      <p:sp>
+        <p:nvSpPr>
+          <p:cNvPr id="54" name="TextBox 53">
+            <a:extLst>
+              <a:ext uri="{FF2B5EF4-FFF2-40B4-BE49-F238E27FC236}">
+                <a16:creationId xmlns:a16="http://schemas.microsoft.com/office/drawing/2014/main" id="{2C1F8A86-FEC7-CE90-892A-C7BFFBDD5913}"/>
+              </a:ext>
+            </a:extLst>
+          </p:cNvPr>
+          <p:cNvSpPr txBox="1"/>
+          <p:nvPr/>
+        </p:nvSpPr>
+        <p:spPr>
+          <a:xfrm>
+            <a:off x="5798708" y="724673"/>
+            <a:ext cx="1794433" cy="307777"/>
+          </a:xfrm>
+          <a:prstGeom prst="rect">
+            <a:avLst/>
+          </a:prstGeom>
+          <a:noFill/>
+        </p:spPr>
+        <p:txBody>
+          <a:bodyPr wrap="square" rtlCol="0">
+            <a:spAutoFit/>
+          </a:bodyPr>
+          <a:lstStyle/>
+          <a:p>
+            <a:r>
+              <a:rPr lang="ko-KR" altLang="en-US" sz="1400"/>
+              <a:t>함수명 </a:t>
+            </a:r>
+            <a:r>
+              <a:rPr lang="en-US" altLang="ko-KR" sz="1400"/>
+              <a:t>: setRows</a:t>
+            </a:r>
+            <a:endParaRPr lang="ko-KR" altLang="en-US" sz="1400"/>
+          </a:p>
+        </p:txBody>
+      </p:sp>
+      <p:sp>
+        <p:nvSpPr>
+          <p:cNvPr id="61" name="TextBox 60">
+            <a:extLst>
+              <a:ext uri="{FF2B5EF4-FFF2-40B4-BE49-F238E27FC236}">
+                <a16:creationId xmlns:a16="http://schemas.microsoft.com/office/drawing/2014/main" id="{301198DE-94E2-CBD8-E2BE-AEAD5C5049E7}"/>
+              </a:ext>
+            </a:extLst>
+          </p:cNvPr>
+          <p:cNvSpPr txBox="1"/>
+          <p:nvPr/>
+        </p:nvSpPr>
+        <p:spPr>
+          <a:xfrm>
+            <a:off x="711648" y="2485745"/>
+            <a:ext cx="1494958" cy="253916"/>
+          </a:xfrm>
+          <a:prstGeom prst="rect">
+            <a:avLst/>
+          </a:prstGeom>
+          <a:noFill/>
+        </p:spPr>
+        <p:txBody>
+          <a:bodyPr wrap="square" rtlCol="0">
+            <a:spAutoFit/>
+          </a:bodyPr>
+          <a:lstStyle/>
+          <a:p>
+            <a:r>
+              <a:rPr lang="en-US" altLang="ko-KR" sz="1050"/>
+              <a:t>rows  - array</a:t>
+            </a:r>
+            <a:endParaRPr lang="ko-KR" altLang="en-US" sz="1050"/>
+          </a:p>
+        </p:txBody>
+      </p:sp>
+      <p:sp>
+        <p:nvSpPr>
+          <p:cNvPr id="62" name="TextBox 61">
+            <a:extLst>
+              <a:ext uri="{FF2B5EF4-FFF2-40B4-BE49-F238E27FC236}">
+                <a16:creationId xmlns:a16="http://schemas.microsoft.com/office/drawing/2014/main" id="{1E25578C-412C-A9B3-68E2-BE7ECEFC7F98}"/>
+              </a:ext>
+            </a:extLst>
+          </p:cNvPr>
+          <p:cNvSpPr txBox="1"/>
+          <p:nvPr/>
+        </p:nvSpPr>
+        <p:spPr>
+          <a:xfrm>
+            <a:off x="711648" y="2738059"/>
+            <a:ext cx="1494958" cy="253916"/>
+          </a:xfrm>
+          <a:prstGeom prst="rect">
+            <a:avLst/>
+          </a:prstGeom>
+          <a:noFill/>
+        </p:spPr>
+        <p:txBody>
+          <a:bodyPr wrap="square" rtlCol="0">
+            <a:spAutoFit/>
+          </a:bodyPr>
+          <a:lstStyle/>
+          <a:p>
+            <a:r>
+              <a:rPr lang="en-US" altLang="ko-KR" sz="1050"/>
+              <a:t>selectedRow  - null</a:t>
+            </a:r>
+            <a:endParaRPr lang="ko-KR" altLang="en-US" sz="1050"/>
+          </a:p>
+        </p:txBody>
+      </p:sp>
+      <p:sp>
+        <p:nvSpPr>
+          <p:cNvPr id="65" name="TextBox 64">
+            <a:extLst>
+              <a:ext uri="{FF2B5EF4-FFF2-40B4-BE49-F238E27FC236}">
+                <a16:creationId xmlns:a16="http://schemas.microsoft.com/office/drawing/2014/main" id="{8D51B060-6637-3B37-B3B5-E27EC2736F6C}"/>
+              </a:ext>
+            </a:extLst>
+          </p:cNvPr>
+          <p:cNvSpPr txBox="1"/>
+          <p:nvPr/>
+        </p:nvSpPr>
+        <p:spPr>
+          <a:xfrm>
+            <a:off x="711648" y="2980078"/>
+            <a:ext cx="1494958" cy="253916"/>
+          </a:xfrm>
+          <a:prstGeom prst="rect">
+            <a:avLst/>
+          </a:prstGeom>
+          <a:noFill/>
+        </p:spPr>
+        <p:txBody>
+          <a:bodyPr wrap="square" rtlCol="0">
+            <a:spAutoFit/>
+          </a:bodyPr>
+          <a:lstStyle/>
+          <a:p>
+            <a:r>
+              <a:rPr lang="en-US" altLang="ko-KR" sz="1050"/>
+              <a:t>loading  - boolean</a:t>
+            </a:r>
+            <a:endParaRPr lang="ko-KR" altLang="en-US" sz="1050"/>
+          </a:p>
+        </p:txBody>
+      </p:sp>
+      <p:sp>
+        <p:nvSpPr>
+          <p:cNvPr id="66" name="TextBox 65">
+            <a:extLst>
+              <a:ext uri="{FF2B5EF4-FFF2-40B4-BE49-F238E27FC236}">
+                <a16:creationId xmlns:a16="http://schemas.microsoft.com/office/drawing/2014/main" id="{4CEC6716-A87E-7EEC-BBA0-41706112858C}"/>
+              </a:ext>
+            </a:extLst>
+          </p:cNvPr>
+          <p:cNvSpPr txBox="1"/>
+          <p:nvPr/>
+        </p:nvSpPr>
+        <p:spPr>
+          <a:xfrm>
+            <a:off x="542313" y="3250610"/>
+            <a:ext cx="1494958" cy="253916"/>
+          </a:xfrm>
+          <a:prstGeom prst="rect">
+            <a:avLst/>
+          </a:prstGeom>
+          <a:noFill/>
+        </p:spPr>
+        <p:txBody>
+          <a:bodyPr wrap="square" rtlCol="0">
+            <a:spAutoFit/>
+          </a:bodyPr>
+          <a:lstStyle/>
+          <a:p>
+            <a:r>
+              <a:rPr lang="en-US" altLang="ko-KR" sz="1050"/>
+              <a:t>+ entiry - object</a:t>
+            </a:r>
+            <a:endParaRPr lang="ko-KR" altLang="en-US" sz="1050"/>
+          </a:p>
+        </p:txBody>
+      </p:sp>
+      <p:cxnSp>
+        <p:nvCxnSpPr>
+          <p:cNvPr id="68" name="직선 연결선 67">
+            <a:extLst>
+              <a:ext uri="{FF2B5EF4-FFF2-40B4-BE49-F238E27FC236}">
+                <a16:creationId xmlns:a16="http://schemas.microsoft.com/office/drawing/2014/main" id="{A7BB394E-CF4D-7CEF-B224-578E60A61364}"/>
+              </a:ext>
+            </a:extLst>
+          </p:cNvPr>
+          <p:cNvCxnSpPr>
+            <a:cxnSpLocks/>
+          </p:cNvCxnSpPr>
+          <p:nvPr/>
+        </p:nvCxnSpPr>
+        <p:spPr>
+          <a:xfrm>
+            <a:off x="626533" y="2498310"/>
+            <a:ext cx="0" cy="735684"/>
+          </a:xfrm>
+          <a:prstGeom prst="line">
+            <a:avLst/>
+          </a:prstGeom>
+          <a:ln w="3175">
+            <a:solidFill>
+              <a:schemeClr val="tx1">
+                <a:lumMod val="65000"/>
+                <a:lumOff val="35000"/>
+              </a:schemeClr>
+            </a:solidFill>
+          </a:ln>
+        </p:spPr>
+        <p:style>
+          <a:lnRef idx="2">
+            <a:schemeClr val="accent1"/>
+          </a:lnRef>
+          <a:fillRef idx="0">
+            <a:schemeClr val="accent1"/>
+          </a:fillRef>
+          <a:effectRef idx="1">
+            <a:schemeClr val="accent1"/>
+          </a:effectRef>
+          <a:fontRef idx="minor">
+            <a:schemeClr val="tx1"/>
+          </a:fontRef>
+        </p:style>
+      </p:cxnSp>
+      <p:cxnSp>
+        <p:nvCxnSpPr>
+          <p:cNvPr id="71" name="직선 연결선 70">
+            <a:extLst>
+              <a:ext uri="{FF2B5EF4-FFF2-40B4-BE49-F238E27FC236}">
+                <a16:creationId xmlns:a16="http://schemas.microsoft.com/office/drawing/2014/main" id="{0EB1EB24-B2EB-980A-8C28-94F6FCB18C74}"/>
+              </a:ext>
+            </a:extLst>
+          </p:cNvPr>
+          <p:cNvCxnSpPr>
+            <a:cxnSpLocks/>
+          </p:cNvCxnSpPr>
+          <p:nvPr/>
+        </p:nvCxnSpPr>
+        <p:spPr>
+          <a:xfrm>
+            <a:off x="888999" y="3548224"/>
+            <a:ext cx="0" cy="444808"/>
+          </a:xfrm>
+          <a:prstGeom prst="line">
+            <a:avLst/>
+          </a:prstGeom>
+          <a:ln w="3175">
+            <a:solidFill>
+              <a:schemeClr val="tx1">
+                <a:lumMod val="65000"/>
+                <a:lumOff val="35000"/>
+              </a:schemeClr>
+            </a:solidFill>
+          </a:ln>
+        </p:spPr>
+        <p:style>
+          <a:lnRef idx="2">
+            <a:schemeClr val="accent1"/>
+          </a:lnRef>
+          <a:fillRef idx="0">
+            <a:schemeClr val="accent1"/>
+          </a:fillRef>
+          <a:effectRef idx="1">
+            <a:schemeClr val="accent1"/>
+          </a:effectRef>
+          <a:fontRef idx="minor">
+            <a:schemeClr val="tx1"/>
+          </a:fontRef>
+        </p:style>
+      </p:cxnSp>
+      <p:sp>
+        <p:nvSpPr>
+          <p:cNvPr id="73" name="TextBox 72">
+            <a:extLst>
+              <a:ext uri="{FF2B5EF4-FFF2-40B4-BE49-F238E27FC236}">
+                <a16:creationId xmlns:a16="http://schemas.microsoft.com/office/drawing/2014/main" id="{CAF850AD-ABA0-1ED0-0236-70F10B50908F}"/>
+              </a:ext>
+            </a:extLst>
+          </p:cNvPr>
+          <p:cNvSpPr txBox="1"/>
+          <p:nvPr/>
+        </p:nvSpPr>
+        <p:spPr>
+          <a:xfrm>
+            <a:off x="961415" y="3796452"/>
+            <a:ext cx="1494958" cy="253916"/>
+          </a:xfrm>
+          <a:prstGeom prst="rect">
+            <a:avLst/>
+          </a:prstGeom>
+          <a:noFill/>
+        </p:spPr>
+        <p:txBody>
+          <a:bodyPr wrap="square" rtlCol="0">
+            <a:spAutoFit/>
+          </a:bodyPr>
+          <a:lstStyle/>
+          <a:p>
+            <a:r>
+              <a:rPr lang="en-US" altLang="ko-KR" sz="1050"/>
+              <a:t>name  - null</a:t>
+            </a:r>
+            <a:endParaRPr lang="ko-KR" altLang="en-US" sz="1050"/>
+          </a:p>
+        </p:txBody>
+      </p:sp>
+      <p:sp>
+        <p:nvSpPr>
+          <p:cNvPr id="74" name="TextBox 73">
+            <a:extLst>
+              <a:ext uri="{FF2B5EF4-FFF2-40B4-BE49-F238E27FC236}">
+                <a16:creationId xmlns:a16="http://schemas.microsoft.com/office/drawing/2014/main" id="{3F7CC8E1-5C64-43CB-FC0B-EF3DF1E56B58}"/>
+              </a:ext>
+            </a:extLst>
+          </p:cNvPr>
+          <p:cNvSpPr txBox="1"/>
+          <p:nvPr/>
+        </p:nvSpPr>
+        <p:spPr>
+          <a:xfrm>
+            <a:off x="961415" y="3539797"/>
+            <a:ext cx="1494958" cy="253916"/>
+          </a:xfrm>
+          <a:prstGeom prst="rect">
+            <a:avLst/>
+          </a:prstGeom>
+          <a:noFill/>
+        </p:spPr>
+        <p:txBody>
+          <a:bodyPr wrap="square" rtlCol="0">
+            <a:spAutoFit/>
+          </a:bodyPr>
+          <a:lstStyle/>
+          <a:p>
+            <a:r>
+              <a:rPr lang="en-US" altLang="ko-KR" sz="1050"/>
+              <a:t>id  - null</a:t>
+            </a:r>
+            <a:endParaRPr lang="ko-KR" altLang="en-US" sz="1050"/>
+          </a:p>
+        </p:txBody>
+      </p:sp>
+      <p:cxnSp>
+        <p:nvCxnSpPr>
+          <p:cNvPr id="77" name="직선 화살표 연결선 76">
+            <a:extLst>
+              <a:ext uri="{FF2B5EF4-FFF2-40B4-BE49-F238E27FC236}">
+                <a16:creationId xmlns:a16="http://schemas.microsoft.com/office/drawing/2014/main" id="{C435E679-CDE5-C206-AEED-EE0B095CA303}"/>
+              </a:ext>
+            </a:extLst>
+          </p:cNvPr>
+          <p:cNvCxnSpPr>
+            <a:cxnSpLocks/>
+          </p:cNvCxnSpPr>
+          <p:nvPr/>
+        </p:nvCxnSpPr>
+        <p:spPr>
+          <a:xfrm flipV="1">
+            <a:off x="2037271" y="1291931"/>
+            <a:ext cx="3858616" cy="5063731"/>
+          </a:xfrm>
+          <a:prstGeom prst="straightConnector1">
+            <a:avLst/>
+          </a:prstGeom>
+          <a:ln>
+            <a:solidFill>
+              <a:schemeClr val="tx1">
+                <a:lumMod val="50000"/>
+                <a:lumOff val="50000"/>
+              </a:schemeClr>
+            </a:solidFill>
+            <a:tailEnd type="triangle"/>
+          </a:ln>
+        </p:spPr>
+        <p:style>
+          <a:lnRef idx="2">
+            <a:schemeClr val="accent1"/>
+          </a:lnRef>
+          <a:fillRef idx="0">
+            <a:schemeClr val="accent1"/>
+          </a:fillRef>
+          <a:effectRef idx="1">
+            <a:schemeClr val="accent1"/>
+          </a:effectRef>
+          <a:fontRef idx="minor">
+            <a:schemeClr val="tx1"/>
+          </a:fontRef>
+        </p:style>
+      </p:cxnSp>
+      <p:pic>
+        <p:nvPicPr>
+          <p:cNvPr id="81" name="그림 80">
+            <a:extLst>
+              <a:ext uri="{FF2B5EF4-FFF2-40B4-BE49-F238E27FC236}">
+                <a16:creationId xmlns:a16="http://schemas.microsoft.com/office/drawing/2014/main" id="{BD33D7C7-B9F1-D5B7-5324-3CB6D6502F7E}"/>
+              </a:ext>
+            </a:extLst>
+          </p:cNvPr>
+          <p:cNvPicPr>
+            <a:picLocks noChangeAspect="1"/>
+          </p:cNvPicPr>
+          <p:nvPr/>
+        </p:nvPicPr>
+        <p:blipFill>
+          <a:blip r:embed="rId2"/>
+          <a:stretch>
+            <a:fillRect/>
+          </a:stretch>
+        </p:blipFill>
+        <p:spPr>
+          <a:xfrm>
+            <a:off x="4817528" y="5013216"/>
+            <a:ext cx="209524" cy="309297"/>
+          </a:xfrm>
+          <a:prstGeom prst="rect">
+            <a:avLst/>
+          </a:prstGeom>
+        </p:spPr>
+      </p:pic>
+      <p:sp>
+        <p:nvSpPr>
+          <p:cNvPr id="82" name="TextBox 81">
+            <a:extLst>
+              <a:ext uri="{FF2B5EF4-FFF2-40B4-BE49-F238E27FC236}">
+                <a16:creationId xmlns:a16="http://schemas.microsoft.com/office/drawing/2014/main" id="{A1D1FA16-8A9C-90AB-2BFF-0C7180C09130}"/>
+              </a:ext>
+            </a:extLst>
+          </p:cNvPr>
+          <p:cNvSpPr txBox="1"/>
+          <p:nvPr/>
+        </p:nvSpPr>
+        <p:spPr>
+          <a:xfrm>
+            <a:off x="579688" y="5975689"/>
+            <a:ext cx="1343377" cy="307777"/>
+          </a:xfrm>
+          <a:prstGeom prst="rect">
+            <a:avLst/>
+          </a:prstGeom>
+          <a:noFill/>
+        </p:spPr>
+        <p:txBody>
+          <a:bodyPr wrap="square" rtlCol="0">
+            <a:spAutoFit/>
+          </a:bodyPr>
+          <a:lstStyle/>
+          <a:p>
+            <a:r>
+              <a:rPr lang="en-US" altLang="ko-KR" sz="1400"/>
+              <a:t>Actions </a:t>
+            </a:r>
+            <a:r>
+              <a:rPr lang="ko-KR" altLang="en-US" sz="1400"/>
+              <a:t>명</a:t>
+            </a:r>
+          </a:p>
+        </p:txBody>
+      </p:sp>
+      <p:sp>
+        <p:nvSpPr>
+          <p:cNvPr id="83" name="TextBox 82">
+            <a:extLst>
+              <a:ext uri="{FF2B5EF4-FFF2-40B4-BE49-F238E27FC236}">
+                <a16:creationId xmlns:a16="http://schemas.microsoft.com/office/drawing/2014/main" id="{09BBE99B-5663-919B-F70E-13F6D2F8CA54}"/>
+              </a:ext>
+            </a:extLst>
+          </p:cNvPr>
+          <p:cNvSpPr txBox="1"/>
+          <p:nvPr/>
+        </p:nvSpPr>
+        <p:spPr>
+          <a:xfrm>
+            <a:off x="2072497" y="5986836"/>
+            <a:ext cx="1019477" cy="307777"/>
+          </a:xfrm>
+          <a:prstGeom prst="rect">
+            <a:avLst/>
+          </a:prstGeom>
+          <a:noFill/>
+        </p:spPr>
+        <p:txBody>
+          <a:bodyPr wrap="square" rtlCol="0">
+            <a:spAutoFit/>
+          </a:bodyPr>
+          <a:lstStyle/>
+          <a:p>
+            <a:r>
+              <a:rPr lang="en-US" altLang="ko-KR" sz="1400"/>
+              <a:t>async</a:t>
+            </a:r>
+            <a:r>
+              <a:rPr lang="ko-KR" altLang="en-US" sz="1400"/>
+              <a:t>여부</a:t>
+            </a:r>
+          </a:p>
+        </p:txBody>
+      </p:sp>
+      <p:sp>
+        <p:nvSpPr>
+          <p:cNvPr id="84" name="사각형: 둥근 모서리 83">
+            <a:extLst>
+              <a:ext uri="{FF2B5EF4-FFF2-40B4-BE49-F238E27FC236}">
+                <a16:creationId xmlns:a16="http://schemas.microsoft.com/office/drawing/2014/main" id="{5EAB1E22-C586-76D8-96DC-3443643F7B52}"/>
+              </a:ext>
+            </a:extLst>
+          </p:cNvPr>
+          <p:cNvSpPr/>
+          <p:nvPr/>
+        </p:nvSpPr>
+        <p:spPr>
+          <a:xfrm>
+            <a:off x="1976118" y="6341888"/>
+            <a:ext cx="1290322" cy="307777"/>
+          </a:xfrm>
+          <a:prstGeom prst="roundRect">
+            <a:avLst/>
+          </a:prstGeom>
+          <a:noFill/>
+          <a:ln w="3175">
+            <a:solidFill>
+              <a:schemeClr val="bg1">
+                <a:lumMod val="50000"/>
+              </a:schemeClr>
+            </a:solidFill>
+          </a:ln>
+        </p:spPr>
+        <p:style>
+          <a:lnRef idx="2">
+            <a:schemeClr val="accent1">
+              <a:shade val="15000"/>
+            </a:schemeClr>
+          </a:lnRef>
+          <a:fillRef idx="1">
+            <a:schemeClr val="accent1"/>
+          </a:fillRef>
+          <a:effectRef idx="0">
+            <a:schemeClr val="accent1"/>
+          </a:effectRef>
+          <a:fontRef idx="minor">
+            <a:schemeClr val="lt1"/>
+          </a:fontRef>
+        </p:style>
+        <p:txBody>
+          <a:bodyPr rtlCol="0" anchor="ctr"/>
+          <a:lstStyle/>
+          <a:p>
+            <a:pPr algn="ctr"/>
+            <a:r>
+              <a:rPr lang="en-US" altLang="ko-KR" sz="1400">
+                <a:solidFill>
+                  <a:schemeClr val="tx1">
+                    <a:lumMod val="75000"/>
+                    <a:lumOff val="25000"/>
+                  </a:schemeClr>
+                </a:solidFill>
+              </a:rPr>
+              <a:t>true</a:t>
+            </a:r>
+            <a:endParaRPr lang="ko-KR" altLang="en-US" sz="1400">
+              <a:solidFill>
+                <a:schemeClr val="tx1">
+                  <a:lumMod val="75000"/>
+                  <a:lumOff val="25000"/>
+                </a:schemeClr>
+              </a:solidFill>
+            </a:endParaRPr>
+          </a:p>
+        </p:txBody>
+      </p:sp>
+      <p:sp>
+        <p:nvSpPr>
+          <p:cNvPr id="85" name="사각형: 둥근 모서리 84">
+            <a:extLst>
+              <a:ext uri="{FF2B5EF4-FFF2-40B4-BE49-F238E27FC236}">
+                <a16:creationId xmlns:a16="http://schemas.microsoft.com/office/drawing/2014/main" id="{28D418A5-2D60-3DC0-ADF0-148AFA36DA08}"/>
+              </a:ext>
+            </a:extLst>
+          </p:cNvPr>
+          <p:cNvSpPr/>
+          <p:nvPr/>
+        </p:nvSpPr>
+        <p:spPr>
+          <a:xfrm>
+            <a:off x="439701" y="6337151"/>
+            <a:ext cx="1483364" cy="307777"/>
+          </a:xfrm>
+          <a:prstGeom prst="roundRect">
+            <a:avLst/>
+          </a:prstGeom>
+          <a:noFill/>
+          <a:ln w="3175">
+            <a:solidFill>
+              <a:schemeClr val="bg1">
+                <a:lumMod val="50000"/>
+              </a:schemeClr>
+            </a:solidFill>
+          </a:ln>
+        </p:spPr>
+        <p:style>
+          <a:lnRef idx="2">
+            <a:schemeClr val="accent1">
+              <a:shade val="15000"/>
+            </a:schemeClr>
+          </a:lnRef>
+          <a:fillRef idx="1">
+            <a:schemeClr val="accent1"/>
+          </a:fillRef>
+          <a:effectRef idx="0">
+            <a:schemeClr val="accent1"/>
+          </a:effectRef>
+          <a:fontRef idx="minor">
+            <a:schemeClr val="lt1"/>
+          </a:fontRef>
+        </p:style>
+        <p:txBody>
+          <a:bodyPr rtlCol="0" anchor="ctr"/>
+          <a:lstStyle/>
+          <a:p>
+            <a:pPr algn="ctr"/>
+            <a:r>
+              <a:rPr lang="en-US" altLang="ko-KR" sz="1400">
+                <a:solidFill>
+                  <a:schemeClr val="tx1">
+                    <a:lumMod val="75000"/>
+                    <a:lumOff val="25000"/>
+                  </a:schemeClr>
+                </a:solidFill>
+              </a:rPr>
+              <a:t>setRows</a:t>
+            </a:r>
+            <a:endParaRPr lang="ko-KR" altLang="en-US" sz="1400">
+              <a:solidFill>
+                <a:schemeClr val="tx1">
+                  <a:lumMod val="75000"/>
+                  <a:lumOff val="25000"/>
+                </a:schemeClr>
+              </a:solidFill>
+            </a:endParaRPr>
+          </a:p>
+        </p:txBody>
+      </p:sp>
+      <p:pic>
+        <p:nvPicPr>
+          <p:cNvPr id="86" name="그림 85">
+            <a:extLst>
+              <a:ext uri="{FF2B5EF4-FFF2-40B4-BE49-F238E27FC236}">
+                <a16:creationId xmlns:a16="http://schemas.microsoft.com/office/drawing/2014/main" id="{DF19E63E-830B-1A5D-A06E-DAAC52590D08}"/>
+              </a:ext>
+            </a:extLst>
+          </p:cNvPr>
+          <p:cNvPicPr>
+            <a:picLocks noChangeAspect="1"/>
+          </p:cNvPicPr>
+          <p:nvPr/>
+        </p:nvPicPr>
+        <p:blipFill>
+          <a:blip r:embed="rId2"/>
+          <a:stretch>
+            <a:fillRect/>
+          </a:stretch>
+        </p:blipFill>
+        <p:spPr>
+          <a:xfrm>
+            <a:off x="4827688" y="6357981"/>
+            <a:ext cx="209524" cy="309297"/>
+          </a:xfrm>
+          <a:prstGeom prst="rect">
+            <a:avLst/>
+          </a:prstGeom>
+        </p:spPr>
+      </p:pic>
+      <p:sp>
+        <p:nvSpPr>
+          <p:cNvPr id="87" name="TextBox 86">
+            <a:extLst>
+              <a:ext uri="{FF2B5EF4-FFF2-40B4-BE49-F238E27FC236}">
+                <a16:creationId xmlns:a16="http://schemas.microsoft.com/office/drawing/2014/main" id="{2CBAD4ED-A589-C021-7D48-4FFB98E02131}"/>
+              </a:ext>
+            </a:extLst>
+          </p:cNvPr>
+          <p:cNvSpPr txBox="1"/>
+          <p:nvPr/>
+        </p:nvSpPr>
+        <p:spPr>
+          <a:xfrm>
+            <a:off x="3511306" y="5986515"/>
+            <a:ext cx="1019477" cy="307777"/>
+          </a:xfrm>
+          <a:prstGeom prst="rect">
+            <a:avLst/>
+          </a:prstGeom>
+          <a:noFill/>
+        </p:spPr>
+        <p:txBody>
+          <a:bodyPr wrap="square" rtlCol="0">
+            <a:spAutoFit/>
+          </a:bodyPr>
+          <a:lstStyle/>
+          <a:p>
+            <a:r>
+              <a:rPr lang="ko-KR" altLang="en-US" sz="1400"/>
+              <a:t>참조사항</a:t>
+            </a:r>
+          </a:p>
+        </p:txBody>
+      </p:sp>
+      <p:sp>
+        <p:nvSpPr>
+          <p:cNvPr id="88" name="사각형: 둥근 모서리 87">
+            <a:extLst>
+              <a:ext uri="{FF2B5EF4-FFF2-40B4-BE49-F238E27FC236}">
+                <a16:creationId xmlns:a16="http://schemas.microsoft.com/office/drawing/2014/main" id="{84D6C2A8-18C1-24E5-9304-7B12177826EA}"/>
+              </a:ext>
+            </a:extLst>
+          </p:cNvPr>
+          <p:cNvSpPr/>
+          <p:nvPr/>
+        </p:nvSpPr>
+        <p:spPr>
+          <a:xfrm>
+            <a:off x="3344891" y="6358029"/>
+            <a:ext cx="1290322" cy="307777"/>
+          </a:xfrm>
+          <a:prstGeom prst="roundRect">
+            <a:avLst/>
+          </a:prstGeom>
+          <a:noFill/>
+          <a:ln w="3175">
+            <a:solidFill>
+              <a:schemeClr val="bg1">
+                <a:lumMod val="50000"/>
+              </a:schemeClr>
+            </a:solidFill>
+          </a:ln>
+        </p:spPr>
+        <p:style>
+          <a:lnRef idx="2">
+            <a:schemeClr val="accent1">
+              <a:shade val="15000"/>
+            </a:schemeClr>
+          </a:lnRef>
+          <a:fillRef idx="1">
+            <a:schemeClr val="accent1"/>
+          </a:fillRef>
+          <a:effectRef idx="0">
+            <a:schemeClr val="accent1"/>
+          </a:effectRef>
+          <a:fontRef idx="minor">
+            <a:schemeClr val="lt1"/>
+          </a:fontRef>
+        </p:style>
+        <p:txBody>
+          <a:bodyPr rtlCol="0" anchor="ctr"/>
+          <a:lstStyle/>
+          <a:p>
+            <a:r>
+              <a:rPr lang="ko-KR" altLang="en-US" sz="1200">
+                <a:solidFill>
+                  <a:schemeClr val="tx1">
+                    <a:lumMod val="75000"/>
+                    <a:lumOff val="25000"/>
+                  </a:schemeClr>
+                </a:solidFill>
+              </a:rPr>
+              <a:t>테이블 추가</a:t>
+            </a:r>
+          </a:p>
+        </p:txBody>
+      </p:sp>
+      <p:sp>
+        <p:nvSpPr>
+          <p:cNvPr id="89" name="사각형: 둥근 모서리 88">
+            <a:extLst>
+              <a:ext uri="{FF2B5EF4-FFF2-40B4-BE49-F238E27FC236}">
+                <a16:creationId xmlns:a16="http://schemas.microsoft.com/office/drawing/2014/main" id="{195ECAA0-A871-671A-43D9-5BA1B508240F}"/>
+              </a:ext>
+            </a:extLst>
+          </p:cNvPr>
+          <p:cNvSpPr/>
+          <p:nvPr/>
+        </p:nvSpPr>
+        <p:spPr>
+          <a:xfrm>
+            <a:off x="396259" y="4960528"/>
+            <a:ext cx="4264987" cy="361985"/>
+          </a:xfrm>
+          <a:prstGeom prst="roundRect">
+            <a:avLst/>
+          </a:prstGeom>
+          <a:noFill/>
+          <a:ln>
+            <a:solidFill>
+              <a:srgbClr val="FF0000"/>
+            </a:solidFill>
+          </a:ln>
+        </p:spPr>
+        <p:style>
+          <a:lnRef idx="2">
+            <a:schemeClr val="accent1">
+              <a:shade val="15000"/>
+            </a:schemeClr>
+          </a:lnRef>
+          <a:fillRef idx="1">
+            <a:schemeClr val="accent1"/>
+          </a:fillRef>
+          <a:effectRef idx="0">
+            <a:schemeClr val="accent1"/>
+          </a:effectRef>
+          <a:fontRef idx="minor">
+            <a:schemeClr val="lt1"/>
+          </a:fontRef>
+        </p:style>
+        <p:txBody>
+          <a:bodyPr rtlCol="0" anchor="ctr"/>
+          <a:lstStyle/>
+          <a:p>
+            <a:pPr algn="ctr"/>
+            <a:endParaRPr lang="ko-KR" altLang="en-US"/>
+          </a:p>
+        </p:txBody>
+      </p:sp>
+      <p:cxnSp>
+        <p:nvCxnSpPr>
+          <p:cNvPr id="90" name="직선 화살표 연결선 89">
+            <a:extLst>
+              <a:ext uri="{FF2B5EF4-FFF2-40B4-BE49-F238E27FC236}">
+                <a16:creationId xmlns:a16="http://schemas.microsoft.com/office/drawing/2014/main" id="{ACF8AA67-FA19-604A-38D0-11D910DC7817}"/>
+              </a:ext>
+            </a:extLst>
+          </p:cNvPr>
+          <p:cNvCxnSpPr>
+            <a:cxnSpLocks/>
+            <a:endCxn id="54" idx="1"/>
+          </p:cNvCxnSpPr>
+          <p:nvPr/>
+        </p:nvCxnSpPr>
+        <p:spPr>
+          <a:xfrm flipV="1">
+            <a:off x="2200751" y="878562"/>
+            <a:ext cx="3597957" cy="3885726"/>
+          </a:xfrm>
+          <a:prstGeom prst="straightConnector1">
+            <a:avLst/>
+          </a:prstGeom>
+          <a:ln>
+            <a:tailEnd type="triangle"/>
+          </a:ln>
+        </p:spPr>
+        <p:style>
+          <a:lnRef idx="2">
+            <a:schemeClr val="accent1"/>
+          </a:lnRef>
+          <a:fillRef idx="0">
+            <a:schemeClr val="accent1"/>
+          </a:fillRef>
+          <a:effectRef idx="1">
+            <a:schemeClr val="accent1"/>
+          </a:effectRef>
+          <a:fontRef idx="minor">
+            <a:schemeClr val="tx1"/>
+          </a:fontRef>
+        </p:style>
+      </p:cxnSp>
+      <p:sp>
+        <p:nvSpPr>
+          <p:cNvPr id="95" name="사각형: 모서리가 접힌 도형 94">
+            <a:extLst>
+              <a:ext uri="{FF2B5EF4-FFF2-40B4-BE49-F238E27FC236}">
+                <a16:creationId xmlns:a16="http://schemas.microsoft.com/office/drawing/2014/main" id="{E1E12A8A-3EC2-EAF6-FA32-D92ABEDF2AD5}"/>
+              </a:ext>
+            </a:extLst>
+          </p:cNvPr>
+          <p:cNvSpPr/>
+          <p:nvPr/>
+        </p:nvSpPr>
+        <p:spPr>
+          <a:xfrm>
+            <a:off x="847394" y="3163385"/>
+            <a:ext cx="2735421" cy="1188370"/>
+          </a:xfrm>
+          <a:prstGeom prst="foldedCorner">
+            <a:avLst/>
+          </a:prstGeom>
+          <a:solidFill>
+            <a:schemeClr val="bg1">
+              <a:lumMod val="95000"/>
+            </a:schemeClr>
+          </a:solidFill>
+          <a:ln w="3175">
+            <a:solidFill>
+              <a:schemeClr val="tx1">
+                <a:lumMod val="50000"/>
+                <a:lumOff val="50000"/>
+              </a:schemeClr>
+            </a:solidFill>
+          </a:ln>
+        </p:spPr>
+        <p:style>
+          <a:lnRef idx="2">
+            <a:schemeClr val="accent1">
+              <a:shade val="15000"/>
+            </a:schemeClr>
+          </a:lnRef>
+          <a:fillRef idx="1">
+            <a:schemeClr val="accent1"/>
+          </a:fillRef>
+          <a:effectRef idx="0">
+            <a:schemeClr val="accent1"/>
+          </a:effectRef>
+          <a:fontRef idx="minor">
+            <a:schemeClr val="lt1"/>
+          </a:fontRef>
+        </p:style>
+        <p:txBody>
+          <a:bodyPr rtlCol="0" anchor="ctr"/>
+          <a:lstStyle/>
+          <a:p>
+            <a:r>
+              <a:rPr lang="en-US" altLang="ko-KR" sz="1200">
+                <a:solidFill>
+                  <a:schemeClr val="tx1">
+                    <a:lumMod val="75000"/>
+                    <a:lumOff val="25000"/>
+                  </a:schemeClr>
+                </a:solidFill>
+              </a:rPr>
+              <a:t>- </a:t>
+            </a:r>
+            <a:r>
+              <a:rPr lang="ko-KR" altLang="en-US" sz="1200">
+                <a:solidFill>
+                  <a:schemeClr val="tx1">
+                    <a:lumMod val="75000"/>
+                    <a:lumOff val="25000"/>
+                  </a:schemeClr>
+                </a:solidFill>
+              </a:rPr>
+              <a:t>설명</a:t>
+            </a:r>
+            <a:endParaRPr lang="en-US" altLang="ko-KR" sz="1200">
+              <a:solidFill>
+                <a:schemeClr val="tx1">
+                  <a:lumMod val="75000"/>
+                  <a:lumOff val="25000"/>
+                </a:schemeClr>
+              </a:solidFill>
+            </a:endParaRPr>
+          </a:p>
+          <a:p>
+            <a:r>
+              <a:rPr lang="en-US" altLang="ko-KR" sz="1200">
+                <a:solidFill>
+                  <a:schemeClr val="tx1">
+                    <a:lumMod val="75000"/>
+                    <a:lumOff val="25000"/>
+                  </a:schemeClr>
+                </a:solidFill>
+              </a:rPr>
+              <a:t>Getters,</a:t>
+            </a:r>
+            <a:r>
+              <a:rPr lang="ko-KR" altLang="en-US" sz="1200">
+                <a:solidFill>
+                  <a:schemeClr val="tx1">
+                    <a:lumMod val="75000"/>
+                    <a:lumOff val="25000"/>
+                  </a:schemeClr>
+                </a:solidFill>
+              </a:rPr>
+              <a:t> </a:t>
+            </a:r>
+            <a:r>
+              <a:rPr lang="en-US" altLang="ko-KR" sz="1200">
+                <a:solidFill>
+                  <a:schemeClr val="tx1">
+                    <a:lumMod val="75000"/>
+                    <a:lumOff val="25000"/>
+                  </a:schemeClr>
+                </a:solidFill>
+              </a:rPr>
+              <a:t>Actions</a:t>
+            </a:r>
+            <a:r>
+              <a:rPr lang="ko-KR" altLang="en-US" sz="1200">
+                <a:solidFill>
+                  <a:schemeClr val="tx1">
+                    <a:lumMod val="75000"/>
+                    <a:lumOff val="25000"/>
+                  </a:schemeClr>
+                </a:solidFill>
+              </a:rPr>
+              <a:t>을 클릭했을 때</a:t>
+            </a:r>
+            <a:endParaRPr lang="en-US" altLang="ko-KR" sz="1200">
+              <a:solidFill>
+                <a:schemeClr val="tx1">
+                  <a:lumMod val="75000"/>
+                  <a:lumOff val="25000"/>
+                </a:schemeClr>
+              </a:solidFill>
+            </a:endParaRPr>
+          </a:p>
+          <a:p>
+            <a:r>
+              <a:rPr lang="en-US" altLang="ko-KR" sz="1200">
+                <a:solidFill>
+                  <a:schemeClr val="tx1">
+                    <a:lumMod val="75000"/>
+                    <a:lumOff val="25000"/>
+                  </a:schemeClr>
+                </a:solidFill>
+              </a:rPr>
+              <a:t>Script </a:t>
+            </a:r>
+            <a:r>
+              <a:rPr lang="ko-KR" altLang="en-US" sz="1200">
+                <a:solidFill>
+                  <a:schemeClr val="tx1">
+                    <a:lumMod val="75000"/>
+                    <a:lumOff val="25000"/>
+                  </a:schemeClr>
+                </a:solidFill>
+              </a:rPr>
+              <a:t>편집창표시 됨</a:t>
+            </a:r>
+          </a:p>
+        </p:txBody>
+      </p:sp>
+      <p:sp>
+        <p:nvSpPr>
+          <p:cNvPr id="9" name="사각형: 둥근 모서리 8">
+            <a:extLst>
+              <a:ext uri="{FF2B5EF4-FFF2-40B4-BE49-F238E27FC236}">
+                <a16:creationId xmlns:a16="http://schemas.microsoft.com/office/drawing/2014/main" id="{1C8714EB-CC01-BF70-5270-84B6A7A86DEF}"/>
+              </a:ext>
+            </a:extLst>
+          </p:cNvPr>
+          <p:cNvSpPr/>
+          <p:nvPr/>
+        </p:nvSpPr>
+        <p:spPr>
+          <a:xfrm>
+            <a:off x="412173" y="6324396"/>
+            <a:ext cx="4264987" cy="361985"/>
+          </a:xfrm>
+          <a:prstGeom prst="roundRect">
+            <a:avLst/>
+          </a:prstGeom>
+          <a:noFill/>
+          <a:ln>
+            <a:solidFill>
+              <a:srgbClr val="FF0000"/>
+            </a:solidFill>
+          </a:ln>
+        </p:spPr>
+        <p:style>
+          <a:lnRef idx="2">
+            <a:schemeClr val="accent1">
+              <a:shade val="15000"/>
+            </a:schemeClr>
+          </a:lnRef>
+          <a:fillRef idx="1">
+            <a:schemeClr val="accent1"/>
+          </a:fillRef>
+          <a:effectRef idx="0">
+            <a:schemeClr val="accent1"/>
+          </a:effectRef>
+          <a:fontRef idx="minor">
+            <a:schemeClr val="lt1"/>
+          </a:fontRef>
+        </p:style>
+        <p:txBody>
+          <a:bodyPr rtlCol="0" anchor="ctr"/>
+          <a:lstStyle/>
+          <a:p>
+            <a:pPr algn="ctr"/>
+            <a:endParaRPr lang="ko-KR" altLang="en-US"/>
+          </a:p>
+        </p:txBody>
+      </p:sp>
+      <p:sp>
+        <p:nvSpPr>
+          <p:cNvPr id="11" name="TextBox 10">
+            <a:extLst>
+              <a:ext uri="{FF2B5EF4-FFF2-40B4-BE49-F238E27FC236}">
+                <a16:creationId xmlns:a16="http://schemas.microsoft.com/office/drawing/2014/main" id="{B301FC93-5131-E5C3-F260-4C3B42D7EE72}"/>
+              </a:ext>
+            </a:extLst>
+          </p:cNvPr>
+          <p:cNvSpPr txBox="1"/>
+          <p:nvPr/>
+        </p:nvSpPr>
+        <p:spPr>
+          <a:xfrm>
+            <a:off x="5981465" y="1167917"/>
+            <a:ext cx="3730267" cy="738664"/>
+          </a:xfrm>
+          <a:prstGeom prst="rect">
+            <a:avLst/>
+          </a:prstGeom>
+          <a:noFill/>
+        </p:spPr>
+        <p:txBody>
+          <a:bodyPr wrap="square" rtlCol="0">
+            <a:spAutoFit/>
+          </a:bodyPr>
+          <a:lstStyle/>
+          <a:p>
+            <a:r>
+              <a:rPr lang="en-US" altLang="ko-KR" sz="1400"/>
+              <a:t>setRows(rows) {</a:t>
+            </a:r>
+          </a:p>
+          <a:p>
+            <a:r>
+              <a:rPr lang="en-US" altLang="ko-KR" sz="1400"/>
+              <a:t>      this.rows = rows</a:t>
+            </a:r>
+          </a:p>
+          <a:p>
+            <a:r>
+              <a:rPr lang="en-US" altLang="ko-KR" sz="1400"/>
+              <a:t>    },</a:t>
+            </a:r>
+            <a:endParaRPr lang="ko-KR" altLang="en-US" sz="1400"/>
+          </a:p>
+        </p:txBody>
+      </p:sp>
+      <p:sp>
+        <p:nvSpPr>
+          <p:cNvPr id="12" name="사각형: 둥근 모서리 11">
+            <a:extLst>
+              <a:ext uri="{FF2B5EF4-FFF2-40B4-BE49-F238E27FC236}">
+                <a16:creationId xmlns:a16="http://schemas.microsoft.com/office/drawing/2014/main" id="{83E3EFD2-05DF-8E6F-6E7B-48E1A5A0FC0C}"/>
+              </a:ext>
+            </a:extLst>
+          </p:cNvPr>
+          <p:cNvSpPr/>
+          <p:nvPr/>
+        </p:nvSpPr>
+        <p:spPr>
+          <a:xfrm>
+            <a:off x="271497" y="31166"/>
+            <a:ext cx="2398060" cy="388454"/>
+          </a:xfrm>
+          <a:prstGeom prst="roundRect">
+            <a:avLst/>
+          </a:prstGeom>
+          <a:solidFill>
+            <a:schemeClr val="bg1">
+              <a:lumMod val="95000"/>
+            </a:schemeClr>
+          </a:solidFill>
+          <a:ln>
+            <a:solidFill>
+              <a:schemeClr val="tx1">
+                <a:lumMod val="50000"/>
+                <a:lumOff val="50000"/>
+              </a:schemeClr>
+            </a:solidFill>
+          </a:ln>
+        </p:spPr>
+        <p:style>
+          <a:lnRef idx="2">
+            <a:schemeClr val="accent1">
+              <a:shade val="15000"/>
+            </a:schemeClr>
+          </a:lnRef>
+          <a:fillRef idx="1">
+            <a:schemeClr val="accent1"/>
+          </a:fillRef>
+          <a:effectRef idx="0">
+            <a:schemeClr val="accent1"/>
+          </a:effectRef>
+          <a:fontRef idx="minor">
+            <a:schemeClr val="lt1"/>
+          </a:fontRef>
+        </p:style>
+        <p:txBody>
+          <a:bodyPr rtlCol="0" anchor="ctr"/>
+          <a:lstStyle/>
+          <a:p>
+            <a:r>
+              <a:rPr lang="en-US" altLang="ko-KR" sz="1400">
+                <a:solidFill>
+                  <a:schemeClr val="tx1">
+                    <a:lumMod val="75000"/>
+                    <a:lumOff val="25000"/>
+                  </a:schemeClr>
+                </a:solidFill>
+              </a:rPr>
+              <a:t>indexStore</a:t>
+            </a:r>
+            <a:endParaRPr lang="ko-KR" altLang="en-US" sz="1400">
+              <a:solidFill>
+                <a:schemeClr val="tx1">
+                  <a:lumMod val="75000"/>
+                  <a:lumOff val="25000"/>
+                </a:schemeClr>
+              </a:solidFill>
+            </a:endParaRPr>
+          </a:p>
+        </p:txBody>
+      </p:sp>
+      <p:cxnSp>
+        <p:nvCxnSpPr>
+          <p:cNvPr id="13" name="직선 연결선 12">
+            <a:extLst>
+              <a:ext uri="{FF2B5EF4-FFF2-40B4-BE49-F238E27FC236}">
+                <a16:creationId xmlns:a16="http://schemas.microsoft.com/office/drawing/2014/main" id="{6A6D1AD8-7664-8716-CAAD-26254A010EA9}"/>
+              </a:ext>
+            </a:extLst>
+          </p:cNvPr>
+          <p:cNvCxnSpPr/>
+          <p:nvPr/>
+        </p:nvCxnSpPr>
+        <p:spPr>
+          <a:xfrm flipV="1">
+            <a:off x="265360" y="340625"/>
+            <a:ext cx="11124750" cy="74610"/>
+          </a:xfrm>
+          <a:prstGeom prst="line">
+            <a:avLst/>
+          </a:prstGeom>
+        </p:spPr>
+        <p:style>
+          <a:lnRef idx="2">
+            <a:schemeClr val="accent1"/>
+          </a:lnRef>
+          <a:fillRef idx="0">
+            <a:schemeClr val="accent1"/>
+          </a:fillRef>
+          <a:effectRef idx="1">
+            <a:schemeClr val="accent1"/>
+          </a:effectRef>
+          <a:fontRef idx="minor">
+            <a:schemeClr val="tx1"/>
+          </a:fontRef>
+        </p:style>
+      </p:cxnSp>
+    </p:spTree>
+    <p:extLst>
+      <p:ext uri="{BB962C8B-B14F-4D97-AF65-F5344CB8AC3E}">
+        <p14:creationId xmlns:p14="http://schemas.microsoft.com/office/powerpoint/2010/main" val="3819106605"/>
       </p:ext>
     </p:extLst>
   </p:cSld>

--- a/examples/화면설계.pptx
+++ b/examples/화면설계.pptx
@@ -18,6 +18,7 @@
     <p:sldId id="266" r:id="rId12"/>
     <p:sldId id="268" r:id="rId13"/>
     <p:sldId id="267" r:id="rId14"/>
+    <p:sldId id="269" r:id="rId15"/>
   </p:sldIdLst>
   <p:sldSz cx="12192000" cy="6858000"/>
   <p:notesSz cx="6858000" cy="9144000"/>
@@ -8550,10 +8551,10 @@
       </p:grpSpPr>
       <p:pic>
         <p:nvPicPr>
-          <p:cNvPr id="10" name="그림 9">
-            <a:extLst>
-              <a:ext uri="{FF2B5EF4-FFF2-40B4-BE49-F238E27FC236}">
-                <a16:creationId xmlns:a16="http://schemas.microsoft.com/office/drawing/2014/main" id="{911A3934-CE5A-44FA-4C77-CFEF4E20C410}"/>
+          <p:cNvPr id="32" name="그림 31">
+            <a:extLst>
+              <a:ext uri="{FF2B5EF4-FFF2-40B4-BE49-F238E27FC236}">
+                <a16:creationId xmlns:a16="http://schemas.microsoft.com/office/drawing/2014/main" id="{E6711CDB-6328-0B69-6535-1191791AE2A9}"/>
               </a:ext>
             </a:extLst>
           </p:cNvPr>
@@ -8564,6 +8565,36 @@
         </p:nvPicPr>
         <p:blipFill>
           <a:blip r:embed="rId2"/>
+          <a:stretch>
+            <a:fillRect/>
+          </a:stretch>
+        </p:blipFill>
+        <p:spPr>
+          <a:xfrm>
+            <a:off x="218870" y="3401066"/>
+            <a:ext cx="7988711" cy="2578233"/>
+          </a:xfrm>
+          <a:prstGeom prst="rect">
+            <a:avLst/>
+          </a:prstGeom>
+        </p:spPr>
+      </p:pic>
+      <p:pic>
+        <p:nvPicPr>
+          <p:cNvPr id="10" name="그림 9">
+            <a:extLst>
+              <a:ext uri="{FF2B5EF4-FFF2-40B4-BE49-F238E27FC236}">
+                <a16:creationId xmlns:a16="http://schemas.microsoft.com/office/drawing/2014/main" id="{911A3934-CE5A-44FA-4C77-CFEF4E20C410}"/>
+              </a:ext>
+            </a:extLst>
+          </p:cNvPr>
+          <p:cNvPicPr>
+            <a:picLocks noChangeAspect="1"/>
+          </p:cNvPicPr>
+          <p:nvPr/>
+        </p:nvPicPr>
+        <p:blipFill>
+          <a:blip r:embed="rId3"/>
           <a:stretch>
             <a:fillRect/>
           </a:stretch>
@@ -8688,7 +8719,7 @@
         </p:nvSpPr>
         <p:spPr>
           <a:xfrm>
-            <a:off x="3086100" y="878701"/>
+            <a:off x="2422773" y="4061977"/>
             <a:ext cx="330200" cy="149999"/>
           </a:xfrm>
           <a:prstGeom prst="rightArrow">
@@ -8722,10 +8753,10 @@
       </p:sp>
       <p:sp>
         <p:nvSpPr>
-          <p:cNvPr id="15" name="팔각형 14">
-            <a:extLst>
-              <a:ext uri="{FF2B5EF4-FFF2-40B4-BE49-F238E27FC236}">
-                <a16:creationId xmlns:a16="http://schemas.microsoft.com/office/drawing/2014/main" id="{0F2AE946-5A52-CC70-9F47-1C29BE28A124}"/>
+          <p:cNvPr id="16" name="화살표: 오른쪽 15">
+            <a:extLst>
+              <a:ext uri="{FF2B5EF4-FFF2-40B4-BE49-F238E27FC236}">
+                <a16:creationId xmlns:a16="http://schemas.microsoft.com/office/drawing/2014/main" id="{CF81452C-AE81-A589-9E80-01AC70DB49A2}"/>
               </a:ext>
             </a:extLst>
           </p:cNvPr>
@@ -8733,8 +8764,54 @@
           <p:nvPr/>
         </p:nvSpPr>
         <p:spPr>
-          <a:xfrm>
-            <a:off x="2810514" y="740419"/>
+          <a:xfrm rot="5400000">
+            <a:off x="4521056" y="1042745"/>
+            <a:ext cx="184359" cy="156270"/>
+          </a:xfrm>
+          <a:prstGeom prst="rightArrow">
+            <a:avLst/>
+          </a:prstGeom>
+        </p:spPr>
+        <p:style>
+          <a:lnRef idx="2">
+            <a:schemeClr val="accent1">
+              <a:shade val="15000"/>
+            </a:schemeClr>
+          </a:lnRef>
+          <a:fillRef idx="1">
+            <a:schemeClr val="accent1"/>
+          </a:fillRef>
+          <a:effectRef idx="0">
+            <a:schemeClr val="accent1"/>
+          </a:effectRef>
+          <a:fontRef idx="minor">
+            <a:schemeClr val="lt1"/>
+          </a:fontRef>
+        </p:style>
+        <p:txBody>
+          <a:bodyPr rtlCol="0" anchor="ctr"/>
+          <a:lstStyle/>
+          <a:p>
+            <a:pPr algn="ctr"/>
+            <a:endParaRPr lang="ko-KR" altLang="en-US"/>
+          </a:p>
+        </p:txBody>
+      </p:sp>
+      <p:sp>
+        <p:nvSpPr>
+          <p:cNvPr id="17" name="팔각형 16">
+            <a:extLst>
+              <a:ext uri="{FF2B5EF4-FFF2-40B4-BE49-F238E27FC236}">
+                <a16:creationId xmlns:a16="http://schemas.microsoft.com/office/drawing/2014/main" id="{A8850727-DE63-5E04-493A-B6B729660567}"/>
+              </a:ext>
+            </a:extLst>
+          </p:cNvPr>
+          <p:cNvSpPr/>
+          <p:nvPr/>
+        </p:nvSpPr>
+        <p:spPr>
+          <a:xfrm>
+            <a:off x="4739802" y="953700"/>
             <a:ext cx="241300" cy="276563"/>
           </a:xfrm>
           <a:prstGeom prst="octagon">
@@ -8775,7 +8852,7 @@
             <a:pPr algn="ctr"/>
             <a:r>
               <a:rPr lang="en-US" altLang="ko-KR" sz="1200"/>
-              <a:t>1</a:t>
+              <a:t>2</a:t>
             </a:r>
             <a:endParaRPr lang="ko-KR" altLang="en-US" sz="1200"/>
           </a:p>
@@ -8783,10 +8860,45 @@
       </p:sp>
       <p:sp>
         <p:nvSpPr>
-          <p:cNvPr id="16" name="화살표: 오른쪽 15">
-            <a:extLst>
-              <a:ext uri="{FF2B5EF4-FFF2-40B4-BE49-F238E27FC236}">
-                <a16:creationId xmlns:a16="http://schemas.microsoft.com/office/drawing/2014/main" id="{CF81452C-AE81-A589-9E80-01AC70DB49A2}"/>
+          <p:cNvPr id="18" name="TextBox 17">
+            <a:extLst>
+              <a:ext uri="{FF2B5EF4-FFF2-40B4-BE49-F238E27FC236}">
+                <a16:creationId xmlns:a16="http://schemas.microsoft.com/office/drawing/2014/main" id="{FEAC06E9-9E9D-9BD1-D06F-520D3957F10A}"/>
+              </a:ext>
+            </a:extLst>
+          </p:cNvPr>
+          <p:cNvSpPr txBox="1"/>
+          <p:nvPr/>
+        </p:nvSpPr>
+        <p:spPr>
+          <a:xfrm>
+            <a:off x="8742671" y="1376838"/>
+            <a:ext cx="3249509" cy="523220"/>
+          </a:xfrm>
+          <a:prstGeom prst="rect">
+            <a:avLst/>
+          </a:prstGeom>
+          <a:noFill/>
+        </p:spPr>
+        <p:txBody>
+          <a:bodyPr wrap="square" rtlCol="0">
+            <a:spAutoFit/>
+          </a:bodyPr>
+          <a:lstStyle/>
+          <a:p>
+            <a:r>
+              <a:rPr lang="ko-KR" altLang="en-US" sz="1400"/>
+              <a:t>편집모드에서 아래쪽 키 클릭 시 바로 아래쪽 셀로 이동</a:t>
+            </a:r>
+          </a:p>
+        </p:txBody>
+      </p:sp>
+      <p:sp>
+        <p:nvSpPr>
+          <p:cNvPr id="19" name="팔각형 18">
+            <a:extLst>
+              <a:ext uri="{FF2B5EF4-FFF2-40B4-BE49-F238E27FC236}">
+                <a16:creationId xmlns:a16="http://schemas.microsoft.com/office/drawing/2014/main" id="{943B6B9D-C50F-0AB4-0DFD-590C3BD9C29F}"/>
               </a:ext>
             </a:extLst>
           </p:cNvPr>
@@ -8794,54 +8906,8 @@
           <p:nvPr/>
         </p:nvSpPr>
         <p:spPr>
-          <a:xfrm rot="5400000">
-            <a:off x="4521056" y="1042745"/>
-            <a:ext cx="184359" cy="156270"/>
-          </a:xfrm>
-          <a:prstGeom prst="rightArrow">
-            <a:avLst/>
-          </a:prstGeom>
-        </p:spPr>
-        <p:style>
-          <a:lnRef idx="2">
-            <a:schemeClr val="accent1">
-              <a:shade val="15000"/>
-            </a:schemeClr>
-          </a:lnRef>
-          <a:fillRef idx="1">
-            <a:schemeClr val="accent1"/>
-          </a:fillRef>
-          <a:effectRef idx="0">
-            <a:schemeClr val="accent1"/>
-          </a:effectRef>
-          <a:fontRef idx="minor">
-            <a:schemeClr val="lt1"/>
-          </a:fontRef>
-        </p:style>
-        <p:txBody>
-          <a:bodyPr rtlCol="0" anchor="ctr"/>
-          <a:lstStyle/>
-          <a:p>
-            <a:pPr algn="ctr"/>
-            <a:endParaRPr lang="ko-KR" altLang="en-US"/>
-          </a:p>
-        </p:txBody>
-      </p:sp>
-      <p:sp>
-        <p:nvSpPr>
-          <p:cNvPr id="17" name="팔각형 16">
-            <a:extLst>
-              <a:ext uri="{FF2B5EF4-FFF2-40B4-BE49-F238E27FC236}">
-                <a16:creationId xmlns:a16="http://schemas.microsoft.com/office/drawing/2014/main" id="{A8850727-DE63-5E04-493A-B6B729660567}"/>
-              </a:ext>
-            </a:extLst>
-          </p:cNvPr>
-          <p:cNvSpPr/>
-          <p:nvPr/>
-        </p:nvSpPr>
-        <p:spPr>
-          <a:xfrm>
-            <a:off x="4739802" y="953700"/>
+          <a:xfrm>
+            <a:off x="8432800" y="1399837"/>
             <a:ext cx="241300" cy="276563"/>
           </a:xfrm>
           <a:prstGeom prst="octagon">
@@ -8890,45 +8956,56 @@
       </p:sp>
       <p:sp>
         <p:nvSpPr>
-          <p:cNvPr id="18" name="TextBox 17">
-            <a:extLst>
-              <a:ext uri="{FF2B5EF4-FFF2-40B4-BE49-F238E27FC236}">
-                <a16:creationId xmlns:a16="http://schemas.microsoft.com/office/drawing/2014/main" id="{FEAC06E9-9E9D-9BD1-D06F-520D3957F10A}"/>
-              </a:ext>
-            </a:extLst>
-          </p:cNvPr>
-          <p:cNvSpPr txBox="1"/>
-          <p:nvPr/>
-        </p:nvSpPr>
-        <p:spPr>
-          <a:xfrm>
-            <a:off x="8742671" y="1376838"/>
-            <a:ext cx="3249509" cy="523220"/>
-          </a:xfrm>
-          <a:prstGeom prst="rect">
+          <p:cNvPr id="20" name="화살표: 오른쪽 19">
+            <a:extLst>
+              <a:ext uri="{FF2B5EF4-FFF2-40B4-BE49-F238E27FC236}">
+                <a16:creationId xmlns:a16="http://schemas.microsoft.com/office/drawing/2014/main" id="{DB7B406C-EE6A-17DB-6366-1E837638957E}"/>
+              </a:ext>
+            </a:extLst>
+          </p:cNvPr>
+          <p:cNvSpPr/>
+          <p:nvPr/>
+        </p:nvSpPr>
+        <p:spPr>
+          <a:xfrm>
+            <a:off x="3086100" y="1686973"/>
+            <a:ext cx="330200" cy="149999"/>
+          </a:xfrm>
+          <a:prstGeom prst="rightArrow">
             <a:avLst/>
           </a:prstGeom>
-          <a:noFill/>
-        </p:spPr>
-        <p:txBody>
-          <a:bodyPr wrap="square" rtlCol="0">
-            <a:spAutoFit/>
-          </a:bodyPr>
-          <a:lstStyle/>
-          <a:p>
-            <a:r>
-              <a:rPr lang="ko-KR" altLang="en-US" sz="1400"/>
-              <a:t>편집모드에서 아래쪽 키 클릭 시 바로 아래쪽 셀로 이동</a:t>
-            </a:r>
-          </a:p>
-        </p:txBody>
-      </p:sp>
-      <p:sp>
-        <p:nvSpPr>
-          <p:cNvPr id="19" name="팔각형 18">
-            <a:extLst>
-              <a:ext uri="{FF2B5EF4-FFF2-40B4-BE49-F238E27FC236}">
-                <a16:creationId xmlns:a16="http://schemas.microsoft.com/office/drawing/2014/main" id="{943B6B9D-C50F-0AB4-0DFD-590C3BD9C29F}"/>
+        </p:spPr>
+        <p:style>
+          <a:lnRef idx="2">
+            <a:schemeClr val="accent1">
+              <a:shade val="15000"/>
+            </a:schemeClr>
+          </a:lnRef>
+          <a:fillRef idx="1">
+            <a:schemeClr val="accent1"/>
+          </a:fillRef>
+          <a:effectRef idx="0">
+            <a:schemeClr val="accent1"/>
+          </a:effectRef>
+          <a:fontRef idx="minor">
+            <a:schemeClr val="lt1"/>
+          </a:fontRef>
+        </p:style>
+        <p:txBody>
+          <a:bodyPr rtlCol="0" anchor="ctr"/>
+          <a:lstStyle/>
+          <a:p>
+            <a:pPr algn="ctr"/>
+            <a:endParaRPr lang="ko-KR" altLang="en-US"/>
+          </a:p>
+        </p:txBody>
+      </p:sp>
+      <p:sp>
+        <p:nvSpPr>
+          <p:cNvPr id="21" name="팔각형 20">
+            <a:extLst>
+              <a:ext uri="{FF2B5EF4-FFF2-40B4-BE49-F238E27FC236}">
+                <a16:creationId xmlns:a16="http://schemas.microsoft.com/office/drawing/2014/main" id="{85FEFE2D-11A4-77DF-2EB5-BD8124E6AF2C}"/>
               </a:ext>
             </a:extLst>
           </p:cNvPr>
@@ -8937,7 +9014,7 @@
         </p:nvSpPr>
         <p:spPr>
           <a:xfrm>
-            <a:off x="8432800" y="1399837"/>
+            <a:off x="2810514" y="1548691"/>
             <a:ext cx="241300" cy="276563"/>
           </a:xfrm>
           <a:prstGeom prst="octagon">
@@ -8978,7 +9055,7 @@
             <a:pPr algn="ctr"/>
             <a:r>
               <a:rPr lang="en-US" altLang="ko-KR" sz="1200"/>
-              <a:t>2</a:t>
+              <a:t>3</a:t>
             </a:r>
             <a:endParaRPr lang="ko-KR" altLang="en-US" sz="1200"/>
           </a:p>
@@ -8986,10 +9063,45 @@
       </p:sp>
       <p:sp>
         <p:nvSpPr>
-          <p:cNvPr id="20" name="화살표: 오른쪽 19">
-            <a:extLst>
-              <a:ext uri="{FF2B5EF4-FFF2-40B4-BE49-F238E27FC236}">
-                <a16:creationId xmlns:a16="http://schemas.microsoft.com/office/drawing/2014/main" id="{DB7B406C-EE6A-17DB-6366-1E837638957E}"/>
+          <p:cNvPr id="22" name="TextBox 21">
+            <a:extLst>
+              <a:ext uri="{FF2B5EF4-FFF2-40B4-BE49-F238E27FC236}">
+                <a16:creationId xmlns:a16="http://schemas.microsoft.com/office/drawing/2014/main" id="{A61DA4C3-4182-6671-D9B4-16BBA0F9F57D}"/>
+              </a:ext>
+            </a:extLst>
+          </p:cNvPr>
+          <p:cNvSpPr txBox="1"/>
+          <p:nvPr/>
+        </p:nvSpPr>
+        <p:spPr>
+          <a:xfrm>
+            <a:off x="8742671" y="2174537"/>
+            <a:ext cx="3249509" cy="523220"/>
+          </a:xfrm>
+          <a:prstGeom prst="rect">
+            <a:avLst/>
+          </a:prstGeom>
+          <a:noFill/>
+        </p:spPr>
+        <p:txBody>
+          <a:bodyPr wrap="square" rtlCol="0">
+            <a:spAutoFit/>
+          </a:bodyPr>
+          <a:lstStyle/>
+          <a:p>
+            <a:r>
+              <a:rPr lang="ko-KR" altLang="en-US" sz="1400"/>
+              <a:t>오른쪽 키 클릭 시 바로 오른쪽 셀로 이동 </a:t>
+            </a:r>
+          </a:p>
+        </p:txBody>
+      </p:sp>
+      <p:sp>
+        <p:nvSpPr>
+          <p:cNvPr id="23" name="팔각형 22">
+            <a:extLst>
+              <a:ext uri="{FF2B5EF4-FFF2-40B4-BE49-F238E27FC236}">
+                <a16:creationId xmlns:a16="http://schemas.microsoft.com/office/drawing/2014/main" id="{96E211F3-85D0-993E-1F93-F90EC4B40822}"/>
               </a:ext>
             </a:extLst>
           </p:cNvPr>
@@ -8998,53 +9110,7 @@
         </p:nvSpPr>
         <p:spPr>
           <a:xfrm>
-            <a:off x="3086100" y="1686973"/>
-            <a:ext cx="330200" cy="149999"/>
-          </a:xfrm>
-          <a:prstGeom prst="rightArrow">
-            <a:avLst/>
-          </a:prstGeom>
-        </p:spPr>
-        <p:style>
-          <a:lnRef idx="2">
-            <a:schemeClr val="accent1">
-              <a:shade val="15000"/>
-            </a:schemeClr>
-          </a:lnRef>
-          <a:fillRef idx="1">
-            <a:schemeClr val="accent1"/>
-          </a:fillRef>
-          <a:effectRef idx="0">
-            <a:schemeClr val="accent1"/>
-          </a:effectRef>
-          <a:fontRef idx="minor">
-            <a:schemeClr val="lt1"/>
-          </a:fontRef>
-        </p:style>
-        <p:txBody>
-          <a:bodyPr rtlCol="0" anchor="ctr"/>
-          <a:lstStyle/>
-          <a:p>
-            <a:pPr algn="ctr"/>
-            <a:endParaRPr lang="ko-KR" altLang="en-US"/>
-          </a:p>
-        </p:txBody>
-      </p:sp>
-      <p:sp>
-        <p:nvSpPr>
-          <p:cNvPr id="21" name="팔각형 20">
-            <a:extLst>
-              <a:ext uri="{FF2B5EF4-FFF2-40B4-BE49-F238E27FC236}">
-                <a16:creationId xmlns:a16="http://schemas.microsoft.com/office/drawing/2014/main" id="{85FEFE2D-11A4-77DF-2EB5-BD8124E6AF2C}"/>
-              </a:ext>
-            </a:extLst>
-          </p:cNvPr>
-          <p:cNvSpPr/>
-          <p:nvPr/>
-        </p:nvSpPr>
-        <p:spPr>
-          <a:xfrm>
-            <a:off x="2810514" y="1548691"/>
+            <a:off x="8432800" y="2197536"/>
             <a:ext cx="241300" cy="276563"/>
           </a:xfrm>
           <a:prstGeom prst="octagon">
@@ -9093,70 +9159,24 @@
       </p:sp>
       <p:sp>
         <p:nvSpPr>
-          <p:cNvPr id="22" name="TextBox 21">
-            <a:extLst>
-              <a:ext uri="{FF2B5EF4-FFF2-40B4-BE49-F238E27FC236}">
-                <a16:creationId xmlns:a16="http://schemas.microsoft.com/office/drawing/2014/main" id="{A61DA4C3-4182-6671-D9B4-16BBA0F9F57D}"/>
-              </a:ext>
-            </a:extLst>
-          </p:cNvPr>
-          <p:cNvSpPr txBox="1"/>
-          <p:nvPr/>
-        </p:nvSpPr>
-        <p:spPr>
-          <a:xfrm>
-            <a:off x="8742671" y="2174537"/>
-            <a:ext cx="3249509" cy="523220"/>
-          </a:xfrm>
-          <a:prstGeom prst="rect">
+          <p:cNvPr id="35" name="화살표: 오른쪽 34">
+            <a:extLst>
+              <a:ext uri="{FF2B5EF4-FFF2-40B4-BE49-F238E27FC236}">
+                <a16:creationId xmlns:a16="http://schemas.microsoft.com/office/drawing/2014/main" id="{79699A85-CE16-FE1F-A61E-B88613297FBD}"/>
+              </a:ext>
+            </a:extLst>
+          </p:cNvPr>
+          <p:cNvSpPr/>
+          <p:nvPr/>
+        </p:nvSpPr>
+        <p:spPr>
+          <a:xfrm>
+            <a:off x="2410974" y="4339247"/>
+            <a:ext cx="330200" cy="149999"/>
+          </a:xfrm>
+          <a:prstGeom prst="rightArrow">
             <a:avLst/>
           </a:prstGeom>
-          <a:noFill/>
-        </p:spPr>
-        <p:txBody>
-          <a:bodyPr wrap="square" rtlCol="0">
-            <a:spAutoFit/>
-          </a:bodyPr>
-          <a:lstStyle/>
-          <a:p>
-            <a:r>
-              <a:rPr lang="ko-KR" altLang="en-US" sz="1400"/>
-              <a:t>오른쪽 키 클릭 시 바로 오른쪽 셀로 이동 </a:t>
-            </a:r>
-          </a:p>
-        </p:txBody>
-      </p:sp>
-      <p:sp>
-        <p:nvSpPr>
-          <p:cNvPr id="23" name="팔각형 22">
-            <a:extLst>
-              <a:ext uri="{FF2B5EF4-FFF2-40B4-BE49-F238E27FC236}">
-                <a16:creationId xmlns:a16="http://schemas.microsoft.com/office/drawing/2014/main" id="{96E211F3-85D0-993E-1F93-F90EC4B40822}"/>
-              </a:ext>
-            </a:extLst>
-          </p:cNvPr>
-          <p:cNvSpPr/>
-          <p:nvPr/>
-        </p:nvSpPr>
-        <p:spPr>
-          <a:xfrm>
-            <a:off x="8432800" y="2197536"/>
-            <a:ext cx="241300" cy="276563"/>
-          </a:xfrm>
-          <a:prstGeom prst="octagon">
-            <a:avLst/>
-          </a:prstGeom>
-          <a:solidFill>
-            <a:srgbClr val="FF0000"/>
-          </a:solidFill>
-          <a:ln w="3175">
-            <a:solidFill>
-              <a:schemeClr val="tx1">
-                <a:lumMod val="50000"/>
-                <a:lumOff val="50000"/>
-              </a:schemeClr>
-            </a:solidFill>
-          </a:ln>
         </p:spPr>
         <p:style>
           <a:lnRef idx="2">
@@ -9179,11 +9199,375 @@
           <a:lstStyle/>
           <a:p>
             <a:pPr algn="ctr"/>
-            <a:r>
-              <a:rPr lang="en-US" altLang="ko-KR" sz="1200"/>
-              <a:t>3</a:t>
-            </a:r>
-            <a:endParaRPr lang="ko-KR" altLang="en-US" sz="1200"/>
+            <a:endParaRPr lang="ko-KR" altLang="en-US"/>
+          </a:p>
+        </p:txBody>
+      </p:sp>
+      <p:sp>
+        <p:nvSpPr>
+          <p:cNvPr id="37" name="화살표: 오른쪽 36">
+            <a:extLst>
+              <a:ext uri="{FF2B5EF4-FFF2-40B4-BE49-F238E27FC236}">
+                <a16:creationId xmlns:a16="http://schemas.microsoft.com/office/drawing/2014/main" id="{D1286537-EB01-C1E2-B3B0-F5D217E578DD}"/>
+              </a:ext>
+            </a:extLst>
+          </p:cNvPr>
+          <p:cNvSpPr/>
+          <p:nvPr/>
+        </p:nvSpPr>
+        <p:spPr>
+          <a:xfrm>
+            <a:off x="4335630" y="4339247"/>
+            <a:ext cx="330200" cy="149999"/>
+          </a:xfrm>
+          <a:prstGeom prst="rightArrow">
+            <a:avLst/>
+          </a:prstGeom>
+        </p:spPr>
+        <p:style>
+          <a:lnRef idx="2">
+            <a:schemeClr val="accent1">
+              <a:shade val="15000"/>
+            </a:schemeClr>
+          </a:lnRef>
+          <a:fillRef idx="1">
+            <a:schemeClr val="accent1"/>
+          </a:fillRef>
+          <a:effectRef idx="0">
+            <a:schemeClr val="accent1"/>
+          </a:effectRef>
+          <a:fontRef idx="minor">
+            <a:schemeClr val="lt1"/>
+          </a:fontRef>
+        </p:style>
+        <p:txBody>
+          <a:bodyPr rtlCol="0" anchor="ctr"/>
+          <a:lstStyle/>
+          <a:p>
+            <a:pPr algn="ctr"/>
+            <a:endParaRPr lang="ko-KR" altLang="en-US"/>
+          </a:p>
+        </p:txBody>
+      </p:sp>
+      <p:sp>
+        <p:nvSpPr>
+          <p:cNvPr id="38" name="화살표: 오른쪽 37">
+            <a:extLst>
+              <a:ext uri="{FF2B5EF4-FFF2-40B4-BE49-F238E27FC236}">
+                <a16:creationId xmlns:a16="http://schemas.microsoft.com/office/drawing/2014/main" id="{247879BF-9D8A-0FC6-40B6-9B3956AE73F6}"/>
+              </a:ext>
+            </a:extLst>
+          </p:cNvPr>
+          <p:cNvSpPr/>
+          <p:nvPr/>
+        </p:nvSpPr>
+        <p:spPr>
+          <a:xfrm>
+            <a:off x="6040544" y="4073694"/>
+            <a:ext cx="330200" cy="149999"/>
+          </a:xfrm>
+          <a:prstGeom prst="rightArrow">
+            <a:avLst/>
+          </a:prstGeom>
+        </p:spPr>
+        <p:style>
+          <a:lnRef idx="2">
+            <a:schemeClr val="accent1">
+              <a:shade val="15000"/>
+            </a:schemeClr>
+          </a:lnRef>
+          <a:fillRef idx="1">
+            <a:schemeClr val="accent1"/>
+          </a:fillRef>
+          <a:effectRef idx="0">
+            <a:schemeClr val="accent1"/>
+          </a:effectRef>
+          <a:fontRef idx="minor">
+            <a:schemeClr val="lt1"/>
+          </a:fontRef>
+        </p:style>
+        <p:txBody>
+          <a:bodyPr rtlCol="0" anchor="ctr"/>
+          <a:lstStyle/>
+          <a:p>
+            <a:pPr algn="ctr"/>
+            <a:endParaRPr lang="ko-KR" altLang="en-US"/>
+          </a:p>
+        </p:txBody>
+      </p:sp>
+      <p:sp>
+        <p:nvSpPr>
+          <p:cNvPr id="39" name="화살표: 오른쪽 38">
+            <a:extLst>
+              <a:ext uri="{FF2B5EF4-FFF2-40B4-BE49-F238E27FC236}">
+                <a16:creationId xmlns:a16="http://schemas.microsoft.com/office/drawing/2014/main" id="{0D92A068-11F5-744C-7605-9891EBF57FFC}"/>
+              </a:ext>
+            </a:extLst>
+          </p:cNvPr>
+          <p:cNvSpPr/>
+          <p:nvPr/>
+        </p:nvSpPr>
+        <p:spPr>
+          <a:xfrm>
+            <a:off x="6040544" y="4339246"/>
+            <a:ext cx="330200" cy="149999"/>
+          </a:xfrm>
+          <a:prstGeom prst="rightArrow">
+            <a:avLst/>
+          </a:prstGeom>
+        </p:spPr>
+        <p:style>
+          <a:lnRef idx="2">
+            <a:schemeClr val="accent1">
+              <a:shade val="15000"/>
+            </a:schemeClr>
+          </a:lnRef>
+          <a:fillRef idx="1">
+            <a:schemeClr val="accent1"/>
+          </a:fillRef>
+          <a:effectRef idx="0">
+            <a:schemeClr val="accent1"/>
+          </a:effectRef>
+          <a:fontRef idx="minor">
+            <a:schemeClr val="lt1"/>
+          </a:fontRef>
+        </p:style>
+        <p:txBody>
+          <a:bodyPr rtlCol="0" anchor="ctr"/>
+          <a:lstStyle/>
+          <a:p>
+            <a:pPr algn="ctr"/>
+            <a:endParaRPr lang="ko-KR" altLang="en-US"/>
+          </a:p>
+        </p:txBody>
+      </p:sp>
+      <p:sp>
+        <p:nvSpPr>
+          <p:cNvPr id="40" name="화살표: 오른쪽 39">
+            <a:extLst>
+              <a:ext uri="{FF2B5EF4-FFF2-40B4-BE49-F238E27FC236}">
+                <a16:creationId xmlns:a16="http://schemas.microsoft.com/office/drawing/2014/main" id="{8A884B0D-C44A-6ED7-D23B-2BF0F4FC949E}"/>
+              </a:ext>
+            </a:extLst>
+          </p:cNvPr>
+          <p:cNvSpPr/>
+          <p:nvPr/>
+        </p:nvSpPr>
+        <p:spPr>
+          <a:xfrm>
+            <a:off x="2398698" y="4616517"/>
+            <a:ext cx="330200" cy="149999"/>
+          </a:xfrm>
+          <a:prstGeom prst="rightArrow">
+            <a:avLst/>
+          </a:prstGeom>
+        </p:spPr>
+        <p:style>
+          <a:lnRef idx="2">
+            <a:schemeClr val="accent1">
+              <a:shade val="15000"/>
+            </a:schemeClr>
+          </a:lnRef>
+          <a:fillRef idx="1">
+            <a:schemeClr val="accent1"/>
+          </a:fillRef>
+          <a:effectRef idx="0">
+            <a:schemeClr val="accent1"/>
+          </a:effectRef>
+          <a:fontRef idx="minor">
+            <a:schemeClr val="lt1"/>
+          </a:fontRef>
+        </p:style>
+        <p:txBody>
+          <a:bodyPr rtlCol="0" anchor="ctr"/>
+          <a:lstStyle/>
+          <a:p>
+            <a:pPr algn="ctr"/>
+            <a:endParaRPr lang="ko-KR" altLang="en-US"/>
+          </a:p>
+        </p:txBody>
+      </p:sp>
+      <p:sp>
+        <p:nvSpPr>
+          <p:cNvPr id="41" name="화살표: 오른쪽 40">
+            <a:extLst>
+              <a:ext uri="{FF2B5EF4-FFF2-40B4-BE49-F238E27FC236}">
+                <a16:creationId xmlns:a16="http://schemas.microsoft.com/office/drawing/2014/main" id="{8EC567D7-F8B1-EA80-B286-D2A26BC8B81E}"/>
+              </a:ext>
+            </a:extLst>
+          </p:cNvPr>
+          <p:cNvSpPr/>
+          <p:nvPr/>
+        </p:nvSpPr>
+        <p:spPr>
+          <a:xfrm>
+            <a:off x="2398698" y="4882003"/>
+            <a:ext cx="330200" cy="149999"/>
+          </a:xfrm>
+          <a:prstGeom prst="rightArrow">
+            <a:avLst/>
+          </a:prstGeom>
+        </p:spPr>
+        <p:style>
+          <a:lnRef idx="2">
+            <a:schemeClr val="accent1">
+              <a:shade val="15000"/>
+            </a:schemeClr>
+          </a:lnRef>
+          <a:fillRef idx="1">
+            <a:schemeClr val="accent1"/>
+          </a:fillRef>
+          <a:effectRef idx="0">
+            <a:schemeClr val="accent1"/>
+          </a:effectRef>
+          <a:fontRef idx="minor">
+            <a:schemeClr val="lt1"/>
+          </a:fontRef>
+        </p:style>
+        <p:txBody>
+          <a:bodyPr rtlCol="0" anchor="ctr"/>
+          <a:lstStyle/>
+          <a:p>
+            <a:pPr algn="ctr"/>
+            <a:endParaRPr lang="ko-KR" altLang="en-US"/>
+          </a:p>
+        </p:txBody>
+      </p:sp>
+      <p:sp>
+        <p:nvSpPr>
+          <p:cNvPr id="42" name="화살표: 오른쪽 41">
+            <a:extLst>
+              <a:ext uri="{FF2B5EF4-FFF2-40B4-BE49-F238E27FC236}">
+                <a16:creationId xmlns:a16="http://schemas.microsoft.com/office/drawing/2014/main" id="{37F40763-109C-7F48-97D9-47B1820AE6A6}"/>
+              </a:ext>
+            </a:extLst>
+          </p:cNvPr>
+          <p:cNvSpPr/>
+          <p:nvPr/>
+        </p:nvSpPr>
+        <p:spPr>
+          <a:xfrm>
+            <a:off x="4283035" y="4882002"/>
+            <a:ext cx="330200" cy="149999"/>
+          </a:xfrm>
+          <a:prstGeom prst="rightArrow">
+            <a:avLst/>
+          </a:prstGeom>
+        </p:spPr>
+        <p:style>
+          <a:lnRef idx="2">
+            <a:schemeClr val="accent1">
+              <a:shade val="15000"/>
+            </a:schemeClr>
+          </a:lnRef>
+          <a:fillRef idx="1">
+            <a:schemeClr val="accent1"/>
+          </a:fillRef>
+          <a:effectRef idx="0">
+            <a:schemeClr val="accent1"/>
+          </a:effectRef>
+          <a:fontRef idx="minor">
+            <a:schemeClr val="lt1"/>
+          </a:fontRef>
+        </p:style>
+        <p:txBody>
+          <a:bodyPr rtlCol="0" anchor="ctr"/>
+          <a:lstStyle/>
+          <a:p>
+            <a:pPr algn="ctr"/>
+            <a:endParaRPr lang="ko-KR" altLang="en-US"/>
+          </a:p>
+        </p:txBody>
+      </p:sp>
+      <p:sp>
+        <p:nvSpPr>
+          <p:cNvPr id="43" name="화살표: 오른쪽 42">
+            <a:extLst>
+              <a:ext uri="{FF2B5EF4-FFF2-40B4-BE49-F238E27FC236}">
+                <a16:creationId xmlns:a16="http://schemas.microsoft.com/office/drawing/2014/main" id="{5F15BD63-56BD-7330-8F76-85D763361E64}"/>
+              </a:ext>
+            </a:extLst>
+          </p:cNvPr>
+          <p:cNvSpPr/>
+          <p:nvPr/>
+        </p:nvSpPr>
+        <p:spPr>
+          <a:xfrm>
+            <a:off x="6040544" y="4882001"/>
+            <a:ext cx="330200" cy="149999"/>
+          </a:xfrm>
+          <a:prstGeom prst="rightArrow">
+            <a:avLst/>
+          </a:prstGeom>
+        </p:spPr>
+        <p:style>
+          <a:lnRef idx="2">
+            <a:schemeClr val="accent1">
+              <a:shade val="15000"/>
+            </a:schemeClr>
+          </a:lnRef>
+          <a:fillRef idx="1">
+            <a:schemeClr val="accent1"/>
+          </a:fillRef>
+          <a:effectRef idx="0">
+            <a:schemeClr val="accent1"/>
+          </a:effectRef>
+          <a:fontRef idx="minor">
+            <a:schemeClr val="lt1"/>
+          </a:fontRef>
+        </p:style>
+        <p:txBody>
+          <a:bodyPr rtlCol="0" anchor="ctr"/>
+          <a:lstStyle/>
+          <a:p>
+            <a:pPr algn="ctr"/>
+            <a:endParaRPr lang="ko-KR" altLang="en-US"/>
+          </a:p>
+        </p:txBody>
+      </p:sp>
+      <p:sp>
+        <p:nvSpPr>
+          <p:cNvPr id="44" name="화살표: 오른쪽 43">
+            <a:extLst>
+              <a:ext uri="{FF2B5EF4-FFF2-40B4-BE49-F238E27FC236}">
+                <a16:creationId xmlns:a16="http://schemas.microsoft.com/office/drawing/2014/main" id="{392CC4C9-0043-348C-8E6D-02ED4EA151C2}"/>
+              </a:ext>
+            </a:extLst>
+          </p:cNvPr>
+          <p:cNvSpPr/>
+          <p:nvPr/>
+        </p:nvSpPr>
+        <p:spPr>
+          <a:xfrm>
+            <a:off x="6031291" y="4619766"/>
+            <a:ext cx="330200" cy="149999"/>
+          </a:xfrm>
+          <a:prstGeom prst="rightArrow">
+            <a:avLst/>
+          </a:prstGeom>
+        </p:spPr>
+        <p:style>
+          <a:lnRef idx="2">
+            <a:schemeClr val="accent1">
+              <a:shade val="15000"/>
+            </a:schemeClr>
+          </a:lnRef>
+          <a:fillRef idx="1">
+            <a:schemeClr val="accent1"/>
+          </a:fillRef>
+          <a:effectRef idx="0">
+            <a:schemeClr val="accent1"/>
+          </a:effectRef>
+          <a:fontRef idx="minor">
+            <a:schemeClr val="lt1"/>
+          </a:fontRef>
+        </p:style>
+        <p:txBody>
+          <a:bodyPr rtlCol="0" anchor="ctr"/>
+          <a:lstStyle/>
+          <a:p>
+            <a:pPr algn="ctr"/>
+            <a:endParaRPr lang="ko-KR" altLang="en-US"/>
           </a:p>
         </p:txBody>
       </p:sp>
@@ -9191,6 +9575,66 @@
     <p:extLst>
       <p:ext uri="{BB962C8B-B14F-4D97-AF65-F5344CB8AC3E}">
         <p14:creationId xmlns:p14="http://schemas.microsoft.com/office/powerpoint/2010/main" val="4264362927"/>
+      </p:ext>
+    </p:extLst>
+  </p:cSld>
+  <p:clrMapOvr>
+    <a:masterClrMapping/>
+  </p:clrMapOvr>
+</p:sld>
+</file>
+
+<file path=ppt/slides/slide14.xml><?xml version="1.0" encoding="utf-8"?>
+<p:sld xmlns:a="http://schemas.openxmlformats.org/drawingml/2006/main" xmlns:r="http://schemas.openxmlformats.org/officeDocument/2006/relationships" xmlns:p="http://schemas.openxmlformats.org/presentationml/2006/main">
+  <p:cSld>
+    <p:spTree>
+      <p:nvGrpSpPr>
+        <p:cNvPr id="1" name=""/>
+        <p:cNvGrpSpPr/>
+        <p:nvPr/>
+      </p:nvGrpSpPr>
+      <p:grpSpPr>
+        <a:xfrm>
+          <a:off x="0" y="0"/>
+          <a:ext cx="0" cy="0"/>
+          <a:chOff x="0" y="0"/>
+          <a:chExt cx="0" cy="0"/>
+        </a:xfrm>
+      </p:grpSpPr>
+      <p:pic>
+        <p:nvPicPr>
+          <p:cNvPr id="3" name="그림 2">
+            <a:extLst>
+              <a:ext uri="{FF2B5EF4-FFF2-40B4-BE49-F238E27FC236}">
+                <a16:creationId xmlns:a16="http://schemas.microsoft.com/office/drawing/2014/main" id="{18F32BBF-6D6C-CD56-6E91-1B201EB8B70F}"/>
+              </a:ext>
+            </a:extLst>
+          </p:cNvPr>
+          <p:cNvPicPr>
+            <a:picLocks noChangeAspect="1"/>
+          </p:cNvPicPr>
+          <p:nvPr/>
+        </p:nvPicPr>
+        <p:blipFill>
+          <a:blip r:embed="rId2"/>
+          <a:stretch>
+            <a:fillRect/>
+          </a:stretch>
+        </p:blipFill>
+        <p:spPr>
+          <a:xfrm>
+            <a:off x="685800" y="695444"/>
+            <a:ext cx="10617299" cy="3392809"/>
+          </a:xfrm>
+          <a:prstGeom prst="rect">
+            <a:avLst/>
+          </a:prstGeom>
+        </p:spPr>
+      </p:pic>
+    </p:spTree>
+    <p:extLst>
+      <p:ext uri="{BB962C8B-B14F-4D97-AF65-F5344CB8AC3E}">
+        <p14:creationId xmlns:p14="http://schemas.microsoft.com/office/powerpoint/2010/main" val="788694791"/>
       </p:ext>
     </p:extLst>
   </p:cSld>

--- a/examples/화면설계.pptx
+++ b/examples/화면설계.pptx
@@ -19,6 +19,7 @@
     <p:sldId id="268" r:id="rId13"/>
     <p:sldId id="267" r:id="rId14"/>
     <p:sldId id="269" r:id="rId15"/>
+    <p:sldId id="270" r:id="rId16"/>
   </p:sldIdLst>
   <p:sldSz cx="12192000" cy="6858000"/>
   <p:notesSz cx="6858000" cy="9144000"/>
@@ -9631,10 +9632,256 @@
           </a:prstGeom>
         </p:spPr>
       </p:pic>
+      <p:sp>
+        <p:nvSpPr>
+          <p:cNvPr id="7" name="직사각형 6">
+            <a:extLst>
+              <a:ext uri="{FF2B5EF4-FFF2-40B4-BE49-F238E27FC236}">
+                <a16:creationId xmlns:a16="http://schemas.microsoft.com/office/drawing/2014/main" id="{621CEB9A-A16B-7725-3D15-0B1B8C89EC20}"/>
+              </a:ext>
+            </a:extLst>
+          </p:cNvPr>
+          <p:cNvSpPr/>
+          <p:nvPr/>
+        </p:nvSpPr>
+        <p:spPr>
+          <a:xfrm>
+            <a:off x="1568824" y="1246094"/>
+            <a:ext cx="2384611" cy="259977"/>
+          </a:xfrm>
+          <a:prstGeom prst="rect">
+            <a:avLst/>
+          </a:prstGeom>
+          <a:noFill/>
+          <a:ln>
+            <a:solidFill>
+              <a:srgbClr val="FF0000"/>
+            </a:solidFill>
+          </a:ln>
+        </p:spPr>
+        <p:style>
+          <a:lnRef idx="2">
+            <a:schemeClr val="accent1">
+              <a:shade val="15000"/>
+            </a:schemeClr>
+          </a:lnRef>
+          <a:fillRef idx="1">
+            <a:schemeClr val="accent1"/>
+          </a:fillRef>
+          <a:effectRef idx="0">
+            <a:schemeClr val="accent1"/>
+          </a:effectRef>
+          <a:fontRef idx="minor">
+            <a:schemeClr val="lt1"/>
+          </a:fontRef>
+        </p:style>
+        <p:txBody>
+          <a:bodyPr rtlCol="0" anchor="ctr"/>
+          <a:lstStyle/>
+          <a:p>
+            <a:pPr algn="ctr"/>
+            <a:endParaRPr lang="ko-KR" altLang="en-US"/>
+          </a:p>
+        </p:txBody>
+      </p:sp>
+      <p:sp>
+        <p:nvSpPr>
+          <p:cNvPr id="8" name="직사각형 7">
+            <a:extLst>
+              <a:ext uri="{FF2B5EF4-FFF2-40B4-BE49-F238E27FC236}">
+                <a16:creationId xmlns:a16="http://schemas.microsoft.com/office/drawing/2014/main" id="{F2B6F997-0555-34A6-5DCE-A1C168482756}"/>
+              </a:ext>
+            </a:extLst>
+          </p:cNvPr>
+          <p:cNvSpPr/>
+          <p:nvPr/>
+        </p:nvSpPr>
+        <p:spPr>
+          <a:xfrm>
+            <a:off x="3953435" y="1246094"/>
+            <a:ext cx="2384611" cy="259977"/>
+          </a:xfrm>
+          <a:prstGeom prst="rect">
+            <a:avLst/>
+          </a:prstGeom>
+          <a:noFill/>
+          <a:ln>
+            <a:solidFill>
+              <a:srgbClr val="FF0000"/>
+            </a:solidFill>
+          </a:ln>
+        </p:spPr>
+        <p:style>
+          <a:lnRef idx="2">
+            <a:schemeClr val="accent1">
+              <a:shade val="15000"/>
+            </a:schemeClr>
+          </a:lnRef>
+          <a:fillRef idx="1">
+            <a:schemeClr val="accent1"/>
+          </a:fillRef>
+          <a:effectRef idx="0">
+            <a:schemeClr val="accent1"/>
+          </a:effectRef>
+          <a:fontRef idx="minor">
+            <a:schemeClr val="lt1"/>
+          </a:fontRef>
+        </p:style>
+        <p:txBody>
+          <a:bodyPr rtlCol="0" anchor="ctr"/>
+          <a:lstStyle/>
+          <a:p>
+            <a:pPr algn="ctr"/>
+            <a:endParaRPr lang="ko-KR" altLang="en-US"/>
+          </a:p>
+        </p:txBody>
+      </p:sp>
     </p:spTree>
     <p:extLst>
       <p:ext uri="{BB962C8B-B14F-4D97-AF65-F5344CB8AC3E}">
         <p14:creationId xmlns:p14="http://schemas.microsoft.com/office/powerpoint/2010/main" val="788694791"/>
+      </p:ext>
+    </p:extLst>
+  </p:cSld>
+  <p:clrMapOvr>
+    <a:masterClrMapping/>
+  </p:clrMapOvr>
+</p:sld>
+</file>
+
+<file path=ppt/slides/slide15.xml><?xml version="1.0" encoding="utf-8"?>
+<p:sld xmlns:a="http://schemas.openxmlformats.org/drawingml/2006/main" xmlns:r="http://schemas.openxmlformats.org/officeDocument/2006/relationships" xmlns:p="http://schemas.openxmlformats.org/presentationml/2006/main">
+  <p:cSld>
+    <p:spTree>
+      <p:nvGrpSpPr>
+        <p:cNvPr id="1" name=""/>
+        <p:cNvGrpSpPr/>
+        <p:nvPr/>
+      </p:nvGrpSpPr>
+      <p:grpSpPr>
+        <a:xfrm>
+          <a:off x="0" y="0"/>
+          <a:ext cx="0" cy="0"/>
+          <a:chOff x="0" y="0"/>
+          <a:chExt cx="0" cy="0"/>
+        </a:xfrm>
+      </p:grpSpPr>
+      <p:pic>
+        <p:nvPicPr>
+          <p:cNvPr id="14" name="그림 13">
+            <a:extLst>
+              <a:ext uri="{FF2B5EF4-FFF2-40B4-BE49-F238E27FC236}">
+                <a16:creationId xmlns:a16="http://schemas.microsoft.com/office/drawing/2014/main" id="{22BE0210-98A9-EC7F-2CD7-BFF3E918ABB9}"/>
+              </a:ext>
+            </a:extLst>
+          </p:cNvPr>
+          <p:cNvPicPr>
+            <a:picLocks noChangeAspect="1"/>
+          </p:cNvPicPr>
+          <p:nvPr/>
+        </p:nvPicPr>
+        <p:blipFill>
+          <a:blip r:embed="rId2"/>
+          <a:stretch>
+            <a:fillRect/>
+          </a:stretch>
+        </p:blipFill>
+        <p:spPr>
+          <a:xfrm>
+            <a:off x="600633" y="2770855"/>
+            <a:ext cx="8616920" cy="3092876"/>
+          </a:xfrm>
+          <a:prstGeom prst="rect">
+            <a:avLst/>
+          </a:prstGeom>
+        </p:spPr>
+      </p:pic>
+      <p:sp>
+        <p:nvSpPr>
+          <p:cNvPr id="8" name="직사각형 7">
+            <a:extLst>
+              <a:ext uri="{FF2B5EF4-FFF2-40B4-BE49-F238E27FC236}">
+                <a16:creationId xmlns:a16="http://schemas.microsoft.com/office/drawing/2014/main" id="{F2B6F997-0555-34A6-5DCE-A1C168482756}"/>
+              </a:ext>
+            </a:extLst>
+          </p:cNvPr>
+          <p:cNvSpPr/>
+          <p:nvPr/>
+        </p:nvSpPr>
+        <p:spPr>
+          <a:xfrm>
+            <a:off x="9726707" y="5697722"/>
+            <a:ext cx="2384611" cy="259977"/>
+          </a:xfrm>
+          <a:prstGeom prst="rect">
+            <a:avLst/>
+          </a:prstGeom>
+          <a:noFill/>
+          <a:ln>
+            <a:solidFill>
+              <a:srgbClr val="FF0000"/>
+            </a:solidFill>
+          </a:ln>
+        </p:spPr>
+        <p:style>
+          <a:lnRef idx="2">
+            <a:schemeClr val="accent1">
+              <a:shade val="15000"/>
+            </a:schemeClr>
+          </a:lnRef>
+          <a:fillRef idx="1">
+            <a:schemeClr val="accent1"/>
+          </a:fillRef>
+          <a:effectRef idx="0">
+            <a:schemeClr val="accent1"/>
+          </a:effectRef>
+          <a:fontRef idx="minor">
+            <a:schemeClr val="lt1"/>
+          </a:fontRef>
+        </p:style>
+        <p:txBody>
+          <a:bodyPr rtlCol="0" anchor="ctr"/>
+          <a:lstStyle/>
+          <a:p>
+            <a:pPr algn="ctr"/>
+            <a:endParaRPr lang="ko-KR" altLang="en-US"/>
+          </a:p>
+        </p:txBody>
+      </p:sp>
+      <p:pic>
+        <p:nvPicPr>
+          <p:cNvPr id="4" name="그림 3">
+            <a:extLst>
+              <a:ext uri="{FF2B5EF4-FFF2-40B4-BE49-F238E27FC236}">
+                <a16:creationId xmlns:a16="http://schemas.microsoft.com/office/drawing/2014/main" id="{43CEE0C5-5382-1F1D-D451-5FA607996E4E}"/>
+              </a:ext>
+            </a:extLst>
+          </p:cNvPr>
+          <p:cNvPicPr>
+            <a:picLocks noChangeAspect="1"/>
+          </p:cNvPicPr>
+          <p:nvPr/>
+        </p:nvPicPr>
+        <p:blipFill>
+          <a:blip r:embed="rId3"/>
+          <a:stretch>
+            <a:fillRect/>
+          </a:stretch>
+        </p:blipFill>
+        <p:spPr>
+          <a:xfrm>
+            <a:off x="1066798" y="224744"/>
+            <a:ext cx="6768355" cy="2417820"/>
+          </a:xfrm>
+          <a:prstGeom prst="rect">
+            <a:avLst/>
+          </a:prstGeom>
+        </p:spPr>
+      </p:pic>
+    </p:spTree>
+    <p:extLst>
+      <p:ext uri="{BB962C8B-B14F-4D97-AF65-F5344CB8AC3E}">
+        <p14:creationId xmlns:p14="http://schemas.microsoft.com/office/powerpoint/2010/main" val="4154852095"/>
       </p:ext>
     </p:extLst>
   </p:cSld>
